--- a/docs/교재/통합반_오프라인/05회차/통합반_오프라인_05회차.pptx
+++ b/docs/교재/통합반_오프라인/05회차/통합반_오프라인_05회차.pptx
@@ -47,6 +47,7 @@
     <p:sldId id="295" r:id="rId47"/>
     <p:sldId id="296" r:id="rId48"/>
     <p:sldId id="297" r:id="rId49"/>
+    <p:sldId id="298" r:id="rId50"/>
   </p:sldIdLst>
   <p:sldSz cx="12191695" cy="6858000" type="screen4x3"/>
   <p:notesSz cx="6858000" cy="9144000"/>
@@ -543,7 +544,7 @@
           <a:lstStyle/>
           <a:p>
             <a:r>
-              <a:t>앞 회차까지는 판단의 재료인 지식과 규칙을 만들었습니다. 오늘은 그 재료로 실제로 일하는 에이전트를 다룹니다. 이 네 가지를 자료 없이 자신의 말로 설명할 수 있는지가 오늘의 기준입니다.</a:t>
+              <a:t>4회차까지는 판단의 재료인 지식과 규칙을 만들었습니다. 오늘은 그 재료로 실제로 일하는 에이전트를 다룹니다. 이 네 가지를 자료 없이 자신의 말로 설명할 수 있는지가 오늘의 기준입니다.</a:t>
             </a:r>
           </a:p>
         </p:txBody>
@@ -1593,7 +1594,7 @@
           <a:lstStyle/>
           <a:p>
             <a:r>
-              <a:t>셋째 멈춤 조건인 권한 제한입니다. 에이전트마다 부를 수 있는 도구가 허용 목록으로 정해져 있습니다. 목록 밖의 도구를 부르려 하면 실행되지 않고 권한 요청이 되며, 그 요청은 질문이 되어 사람에게 올라갑니다. 마지막 칸은 에이전트에게 주는 지시의 한 문장입니다. 사람이 질문에 답하더라도 그것으로 에이전트의 권한이 넓어지지는 않습니다.</a:t>
+              <a:t>둘째인 도구 호출 실패는 다시 해도 오류가 돌아올 때 지어내지 않고 멈추는 것이었고, 여기서는 셋째 멈춤 조건인 권한 제한을 봅니다. 에이전트마다 부를 수 있는 도구가 허용 목록으로 정해져 있습니다. 목록 밖의 도구를 부르려 하면 실행되지 않고 권한 요청이 되며, 그 요청은 질문이 되어 사람에게 올라갑니다. 마지막 칸은 에이전트에게 주는 지시의 한 문장입니다. 사람이 질문에 답하더라도 그것으로 에이전트의 권한이 넓어지지는 않습니다.</a:t>
             </a:r>
           </a:p>
         </p:txBody>
@@ -1733,7 +1734,7 @@
           <a:lstStyle/>
           <a:p>
             <a:r>
-              <a:t>첫 실습에서는 에이전트 하나를 직접 구성합니다. 앞에서 본 항목대로 이름과 목표와 역할을 적고, 쓸 수 있는 읽기 도구 가운데 필요한 것을 고릅니다. 그런 다음 그 에이전트에게 질문하고, 답에 붙은 근거와 호출 기록을 읽습니다. 끝으로 같은 업무 문제를 다음 실습에서 직접 만들 에이전트에 넣을 수 있게, 질문에 쓴 입력을 정리해 둡니다.</a:t>
+              <a:t>에이전트가 낸 결과는 시스템이 먼저 검사합니다. 정해진 항목이 빠졌거나 모양이 어긋나면 그 결과는 승인 화면으로 가지 못하고, 거절됐다는 알림과 이유가 에이전트에게 되돌아갑니다. 에이전트는 같은 실행 안에서 고쳐서 다시 냅니다. 이 교정은 두 번까지입니다.</a:t>
             </a:r>
           </a:p>
         </p:txBody>
@@ -1803,7 +1804,7 @@
           <a:lstStyle/>
           <a:p>
             <a:r>
-              <a:t>둘째 실습은 VS Code에서 Claude Code로 진행합니다. 공용 온톨로지의 관계와 제공된 센서 입력을 읽어 후보 원인과 증거, 추가 점검 항목을 내는 에이전트를 만듭니다. 확인되지 않은 원인은 단정하지 않고 가설로 표시해야 합니다. 끝나면 에이전트와, 후보 원인과 점검 항목을 근거와 함께 적은 출력이 파일로 남습니다.</a:t>
+              <a:t>첫 실습에서는 에이전트 하나를 직접 구성합니다. 앞에서 본 항목대로 이름과 목표와 역할을 적고, 쓸 수 있는 읽기 도구 가운데 필요한 것을 고릅니다. 그런 다음 그 에이전트에게 질문하고, 답에 붙은 근거와 호출 기록을 읽습니다. 끝으로 같은 업무 문제를 다음 실습에서 직접 만들 에이전트에 넣을 수 있게, 질문에 쓴 입력을 정리해 둡니다.</a:t>
             </a:r>
           </a:p>
         </p:txBody>
@@ -1873,7 +1874,7 @@
           <a:lstStyle/>
           <a:p>
             <a:r>
-              <a:t>셋째 실습에서는 앞에서 만든 에이전트를 그대로 씁니다. 서로 다른 센서 값과 고장 후보를 넣어 후보마다 맞는 증거와 맞지 않는 증거를 견줍니다. 증거가 모자라거나 서로 어긋날 때 에이전트가 원인을 단정하지 않고 추가 확인을 요청하는지를 봅니다. 그런 다음 무엇부터 점검할지의 순서와 그 근거를 보완합니다.</a:t>
+              <a:t>둘째 실습은 VS Code에서 Claude Code로 진행합니다. 공용 온톨로지의 관계와 제공된 센서 입력을 읽어 후보 원인과 증거, 추가 점검 항목을 내는 에이전트를 만듭니다. 확인되지 않은 원인은 단정하지 않고 가설로 표시해야 합니다. 끝나면 에이전트와, 후보 원인과 점검 항목을 근거와 함께 적은 출력이 파일로 남습니다.</a:t>
             </a:r>
           </a:p>
         </p:txBody>
@@ -1943,7 +1944,7 @@
           <a:lstStyle/>
           <a:p>
             <a:r>
-              <a:t>넷째 실습에서는 불량 접수 메시지를 받아 후속 업무로 넘기는 작은 에이전트를 만듭니다. 출력은 품질 유형, 추가 확인 항목, 담당 부서, 대응 초안의 정해진 항목을 가진 품질 대응 카드입니다. 원인이 정해지지 않은 접수는 원인을 단정하지 않고 조사 요청으로 넘기는 갈래를 반드시 둡니다.</a:t>
+              <a:t>셋째 실습에서는 앞에서 만든 에이전트를 그대로 씁니다. 서로 다른 센서 값과 고장 후보를 넣어 후보마다 맞는 증거와 맞지 않는 증거를 견줍니다. 증거가 모자라거나 서로 어긋날 때 에이전트가 원인을 단정하지 않고 추가 확인을 요청하는지를 봅니다. 그런 다음 무엇부터 점검할지의 순서와 그 근거를 보완합니다.</a:t>
             </a:r>
           </a:p>
         </p:txBody>
@@ -2013,7 +2014,7 @@
           <a:lstStyle/>
           <a:p>
             <a:r>
-              <a:t>뜻은 앞에서 풀었으므로 여기서는 이름과 자리만 확인합니다. 이 넷과 함께 실행 고리, 정보원, 멈춤 조건, 보류, 허용 목록이 오늘의 용어입니다. 하나를 골라 자료를 덮고 자신의 문장으로 써 보시기 바랍니다.</a:t>
+              <a:t>넷째 실습에서는 불량 접수 메시지를 받아 후속 업무로 넘기는 작은 에이전트를 만듭니다. 출력은 품질 유형, 추가 확인 항목, 담당 부서, 대응 초안의 정해진 항목을 가진 품질 대응 카드입니다. 원인이 정해지지 않은 접수는 원인을 단정하지 않고 조사 요청으로 넘기는 갈래를 반드시 둡니다.</a:t>
             </a:r>
           </a:p>
         </p:txBody>
@@ -2153,7 +2154,7 @@
           <a:lstStyle/>
           <a:p>
             <a:r>
-              <a:t>처리 기록의 한 장면을 실행 고리의 단계에 대어 보는 문항입니다. 두 호출의 도구가 같은지 다른지, 뒤 호출의 입력이 어디에서 왔는지를 따져 보시기 바랍니다.</a:t>
+              <a:t>뜻은 앞에서 풀었으므로 여기서는 이름만 다시 확인합니다. 이 넷과 함께 실행 고리, 정보원, 멈춤 조건, 보류, 허용 목록이 오늘의 용어입니다. 하나를 골라 자료를 덮고 자신의 문장으로 써 보시기 바랍니다.</a:t>
             </a:r>
           </a:p>
         </p:txBody>
@@ -2223,7 +2224,7 @@
           <a:lstStyle/>
           <a:p>
             <a:r>
-              <a:t>지식과 값, 그리고 실패와 값 없음을 구분하는지를 확인하는 문항입니다. 보기마다 무엇을 무엇으로 바꾸어 썼는지를 짚어 보시기 바랍니다.</a:t>
+              <a:t>처리 기록의 한 장면을 실행 고리의 단계에 대어 보는 문항입니다. 두 호출의 도구가 같은지 다른지, 뒤 호출의 입력이 어디에서 왔는지를 따져 보시기 바랍니다.</a:t>
             </a:r>
           </a:p>
         </p:txBody>
@@ -2293,7 +2294,7 @@
           <a:lstStyle/>
           <a:p>
             <a:r>
-              <a:t>에이전트와 사람 사이의 책임 경계를 확인하는 문항입니다. 상황이 급하다는 것이 권한을 바꾸는지, 사람의 답변이 권한을 바꾸는지를 따져 보시기 바랍니다.</a:t>
+              <a:t>지식과 값, 그리고 실패와 값 없음을 구분하는지를 확인하는 문항입니다. 보기마다 무엇을 무엇으로 바꾸어 썼는지를 짚어 보시기 바랍니다.</a:t>
             </a:r>
           </a:p>
         </p:txBody>
@@ -2319,6 +2320,76 @@
 </file>
 
 <file path=ppt/notesSlides/notesSlide33.xml><?xml version="1.0" encoding="utf-8"?>
+<p:notes xmlns:a="http://schemas.openxmlformats.org/drawingml/2006/main" xmlns:p="http://schemas.openxmlformats.org/presentationml/2006/main" xmlns:r="http://schemas.openxmlformats.org/officeDocument/2006/relationships">
+  <p:cSld>
+    <p:spTree>
+      <p:nvGrpSpPr>
+        <p:cNvPr id="1" name=""/>
+        <p:cNvGrpSpPr/>
+        <p:nvPr/>
+      </p:nvGrpSpPr>
+      <p:grpSpPr>
+        <a:xfrm>
+          <a:off x="0" y="0"/>
+          <a:ext cx="0" cy="0"/>
+          <a:chOff x="0" y="0"/>
+          <a:chExt cx="0" cy="0"/>
+        </a:xfrm>
+      </p:grpSpPr>
+      <p:sp>
+        <p:nvSpPr>
+          <p:cNvPr id="2" name="Slide Image Placeholder 1"/>
+          <p:cNvSpPr>
+            <a:spLocks noGrp="1"/>
+          </p:cNvSpPr>
+          <p:nvPr>
+            <p:ph type="sldImg" idx="2"/>
+          </p:nvPr>
+        </p:nvSpPr>
+        <p:spPr/>
+      </p:sp>
+      <p:sp>
+        <p:nvSpPr>
+          <p:cNvPr id="3" name="Notes Placeholder 2"/>
+          <p:cNvSpPr>
+            <a:spLocks noGrp="1"/>
+          </p:cNvSpPr>
+          <p:nvPr>
+            <p:ph type="body" idx="3" sz="quarter"/>
+          </p:nvPr>
+        </p:nvSpPr>
+        <p:spPr/>
+        <p:txBody>
+          <a:bodyPr/>
+          <a:lstStyle/>
+          <a:p>
+            <a:r>
+              <a:t>에이전트와 사람 사이의 책임 경계를 확인하는 문항입니다. 상황이 급하다는 것이 권한을 바꾸는지, 사람의 답변이 권한을 바꾸는지를 따져 보시기 바랍니다.</a:t>
+            </a:r>
+          </a:p>
+        </p:txBody>
+      </p:sp>
+      <p:sp>
+        <p:nvSpPr>
+          <p:cNvPr id="4" name="Slide Number Placeholder 3"/>
+          <p:cNvSpPr>
+            <a:spLocks noGrp="1"/>
+          </p:cNvSpPr>
+          <p:nvPr>
+            <p:ph type="sldNum" idx="5" sz="quarter"/>
+          </p:nvPr>
+        </p:nvSpPr>
+        <p:spPr/>
+      </p:sp>
+    </p:spTree>
+  </p:cSld>
+  <p:clrMapOvr>
+    <a:masterClrMapping/>
+  </p:clrMapOvr>
+</p:notes>
+</file>
+
+<file path=ppt/notesSlides/notesSlide34.xml><?xml version="1.0" encoding="utf-8"?>
 <p:notes xmlns:a="http://schemas.openxmlformats.org/drawingml/2006/main" xmlns:p="http://schemas.openxmlformats.org/presentationml/2006/main" xmlns:r="http://schemas.openxmlformats.org/officeDocument/2006/relationships">
   <p:cSld>
     <p:spTree>
@@ -7269,7 +7340,7 @@
       </p:sp>
       <p:pic>
         <p:nvPicPr>
-          <p:cNvPr id="6" name="삽화:세요소.svg" descr="illust_9110670304354282503_1791735250.png"/>
+          <p:cNvPr id="6" name="삽화:세요소.svg" descr="illust_3991639501693704938_1791735250.png"/>
           <p:cNvPicPr>
             <a:picLocks noChangeAspect="1"/>
           </p:cNvPicPr>
@@ -9391,7 +9462,7 @@
       </p:sp>
       <p:pic>
         <p:nvPicPr>
-          <p:cNvPr id="6" name="삽화:실행고리.svg" descr="illust_4789649705531715480_1791735250.png"/>
+          <p:cNvPr id="6" name="삽화:실행고리.svg" descr="illust_190617246343993327_1791735250.png"/>
           <p:cNvPicPr>
             <a:picLocks noChangeAspect="1"/>
           </p:cNvPicPr>
@@ -10915,7 +10986,7 @@
         <p:spPr>
           <a:xfrm>
             <a:off x="3108960" y="4160520"/>
-            <a:ext cx="1290319" cy="347472"/>
+            <a:ext cx="822960" cy="347472"/>
           </a:xfrm>
           <a:prstGeom prst="roundRect">
             <a:avLst>
@@ -10946,7 +11017,7 @@
         <p:spPr>
           <a:xfrm>
             <a:off x="3108960" y="4160520"/>
-            <a:ext cx="1290319" cy="347472"/>
+            <a:ext cx="822960" cy="347472"/>
           </a:xfrm>
           <a:prstGeom prst="rect">
             <a:avLst/>
@@ -10971,7 +11042,7 @@
                 <a:ea typeface="맑은 고딕"/>
                 <a:cs typeface="맑은 고딕"/>
               </a:rPr>
-              <a:t>이론 · 실습</a:t>
+              <a:t>이론</a:t>
             </a:r>
           </a:p>
         </p:txBody>
@@ -11189,7 +11260,7 @@
       </p:sp>
       <p:pic>
         <p:nvPicPr>
-          <p:cNvPr id="6" name="삽화:정보원.svg" descr="illust_4857264224131920844_1791735250.png"/>
+          <p:cNvPr id="6" name="삽화:정보원.svg" descr="illust_175209253604745589_1791735250.png"/>
           <p:cNvPicPr>
             <a:picLocks noChangeAspect="1"/>
           </p:cNvPicPr>
@@ -16574,7 +16645,7 @@
       </p:sp>
       <p:pic>
         <p:nvPicPr>
-          <p:cNvPr id="6" name="삽화:신선도.svg" descr="illust_3484930357521633113_1791735250.png"/>
+          <p:cNvPr id="6" name="삽화:신선도.svg" descr="illust_420244806827002284_1791735250.png"/>
           <p:cNvPicPr>
             <a:picLocks noChangeAspect="1"/>
           </p:cNvPicPr>
@@ -17839,7 +17910,7 @@
       </p:sp>
       <p:pic>
         <p:nvPicPr>
-          <p:cNvPr id="6" name="삽화:멈춤조건.svg" descr="illust_7903600949670440299_1791735250.png"/>
+          <p:cNvPr id="6" name="삽화:멈춤조건.svg" descr="illust_1126432722587110781_1791735250.png"/>
           <p:cNvPicPr>
             <a:picLocks noChangeAspect="1"/>
           </p:cNvPicPr>
@@ -21743,7 +21814,7 @@
     <p:bg>
       <p:bgPr>
         <a:solidFill>
-          <a:srgbClr val="E7F3FD"/>
+          <a:srgbClr val="FFFFFF"/>
         </a:solidFill>
         <a:effectLst/>
       </p:bgPr>
@@ -21763,8 +21834,115 @@
         </p:nvSpPr>
         <p:spPr>
           <a:xfrm>
-            <a:off x="457200" y="384048"/>
-            <a:ext cx="8229600" cy="457200"/>
+            <a:off x="457200" y="329184"/>
+            <a:ext cx="11277295" cy="603504"/>
+          </a:xfrm>
+          <a:prstGeom prst="rect">
+            <a:avLst/>
+          </a:prstGeom>
+          <a:noFill/>
+        </p:spPr>
+        <p:txBody>
+          <a:bodyPr wrap="square" anchor="ctr"/>
+          <a:lstStyle/>
+          <a:p>
+            <a:pPr algn="l">
+              <a:lnSpc>
+                <a:spcPct val="110000"/>
+              </a:lnSpc>
+            </a:pPr>
+            <a:r>
+              <a:rPr sz="2800" b="1">
+                <a:solidFill>
+                  <a:srgbClr val="13294B"/>
+                </a:solidFill>
+                <a:latin typeface="맑은 고딕"/>
+                <a:ea typeface="맑은 고딕"/>
+                <a:cs typeface="맑은 고딕"/>
+              </a:rPr>
+              <a:t>출력 형식의 검사와 교정</a:t>
+            </a:r>
+          </a:p>
+        </p:txBody>
+      </p:sp>
+      <p:sp>
+        <p:nvSpPr>
+          <p:cNvPr id="3" name="TextBox 2"/>
+          <p:cNvSpPr txBox="1"/>
+          <p:nvPr/>
+        </p:nvSpPr>
+        <p:spPr>
+          <a:xfrm>
+            <a:off x="457200" y="932688"/>
+            <a:ext cx="11277295" cy="420624"/>
+          </a:xfrm>
+          <a:prstGeom prst="rect">
+            <a:avLst/>
+          </a:prstGeom>
+          <a:noFill/>
+        </p:spPr>
+        <p:txBody>
+          <a:bodyPr wrap="square" anchor="ctr"/>
+          <a:lstStyle/>
+          <a:p>
+            <a:pPr algn="l">
+              <a:lnSpc>
+                <a:spcPct val="110000"/>
+              </a:lnSpc>
+            </a:pPr>
+            <a:r>
+              <a:rPr sz="1600" b="0">
+                <a:solidFill>
+                  <a:srgbClr val="556175"/>
+                </a:solidFill>
+                <a:latin typeface="맑은 고딕"/>
+                <a:ea typeface="맑은 고딕"/>
+                <a:cs typeface="맑은 고딕"/>
+              </a:rPr>
+              <a:t>형식이 어긋난 결과는 다음 단계로 넘어가지 못하고, 거절된 이유와 함께 에이전트에게 되돌아가 고쳐진다.</a:t>
+            </a:r>
+          </a:p>
+        </p:txBody>
+      </p:sp>
+      <p:sp>
+        <p:nvSpPr>
+          <p:cNvPr id="4" name="Rectangle 3"/>
+          <p:cNvSpPr/>
+          <p:nvPr/>
+        </p:nvSpPr>
+        <p:spPr>
+          <a:xfrm>
+            <a:off x="548640" y="1408176"/>
+            <a:ext cx="11094415" cy="18288"/>
+          </a:xfrm>
+          <a:prstGeom prst="rect">
+            <a:avLst/>
+          </a:prstGeom>
+          <a:solidFill>
+            <a:srgbClr val="D3D9E1"/>
+          </a:solidFill>
+          <a:ln>
+            <a:noFill/>
+          </a:ln>
+        </p:spPr>
+        <p:txBody>
+          <a:bodyPr rtlCol="0" anchor="ctr"/>
+          <a:lstStyle/>
+          <a:p>
+            <a:pPr algn="ctr"/>
+          </a:p>
+        </p:txBody>
+      </p:sp>
+      <p:sp>
+        <p:nvSpPr>
+          <p:cNvPr id="5" name="TextBox 4"/>
+          <p:cNvSpPr txBox="1"/>
+          <p:nvPr/>
+        </p:nvSpPr>
+        <p:spPr>
+          <a:xfrm>
+            <a:off x="10911535" y="6473952"/>
+            <a:ext cx="822960" cy="274320"/>
           </a:xfrm>
           <a:prstGeom prst="rect">
             <a:avLst/>
@@ -21775,37 +21953,267 @@
           <a:bodyPr wrap="square" anchor="t"/>
           <a:lstStyle/>
           <a:p>
-            <a:pPr algn="l">
-              <a:lnSpc>
-                <a:spcPct val="110000"/>
-              </a:lnSpc>
-            </a:pPr>
-            <a:r>
-              <a:rPr sz="2000" b="1">
-                <a:solidFill>
-                  <a:srgbClr val="5CB8F2"/>
-                </a:solidFill>
-                <a:latin typeface="맑은 고딕"/>
-                <a:ea typeface="맑은 고딕"/>
-                <a:cs typeface="맑은 고딕"/>
-              </a:rPr>
-              <a:t>경남대학교 피지컬AI 사관학교</a:t>
-            </a:r>
-          </a:p>
-        </p:txBody>
-      </p:sp>
-      <p:sp>
-        <p:nvSpPr>
-          <p:cNvPr id="3" name="Rectangle 2"/>
+            <a:pPr algn="r">
+              <a:lnSpc>
+                <a:spcPct val="110000"/>
+              </a:lnSpc>
+            </a:pPr>
+            <a:r>
+              <a:rPr sz="1000" b="0">
+                <a:solidFill>
+                  <a:srgbClr val="556175"/>
+                </a:solidFill>
+                <a:latin typeface="맑은 고딕"/>
+                <a:ea typeface="맑은 고딕"/>
+                <a:cs typeface="맑은 고딕"/>
+              </a:rPr>
+              <a:t>29</a:t>
+            </a:r>
+          </a:p>
+        </p:txBody>
+      </p:sp>
+      <p:sp>
+        <p:nvSpPr>
+          <p:cNvPr id="6" name="Rounded Rectangle 5"/>
           <p:cNvSpPr/>
           <p:nvPr/>
         </p:nvSpPr>
         <p:spPr>
           <a:xfrm>
-            <a:off x="548640" y="859536"/>
-            <a:ext cx="3606800" cy="41148"/>
-          </a:xfrm>
-          <a:prstGeom prst="rect">
+            <a:off x="548640" y="2603182"/>
+            <a:ext cx="2485567" cy="2776346"/>
+          </a:xfrm>
+          <a:prstGeom prst="roundRect">
+            <a:avLst>
+              <a:gd name="adj" fmla="val 5000"/>
+            </a:avLst>
+          </a:prstGeom>
+          <a:solidFill>
+            <a:srgbClr val="F3F6F9"/>
+          </a:solidFill>
+          <a:ln>
+            <a:noFill/>
+          </a:ln>
+        </p:spPr>
+        <p:txBody>
+          <a:bodyPr rtlCol="0" anchor="ctr"/>
+          <a:lstStyle/>
+          <a:p>
+            <a:pPr algn="ctr"/>
+          </a:p>
+        </p:txBody>
+      </p:sp>
+      <p:sp>
+        <p:nvSpPr>
+          <p:cNvPr id="7" name="Oval 6"/>
+          <p:cNvSpPr/>
+          <p:nvPr/>
+        </p:nvSpPr>
+        <p:spPr>
+          <a:xfrm>
+            <a:off x="1425663" y="2786062"/>
+            <a:ext cx="731520" cy="731520"/>
+          </a:xfrm>
+          <a:prstGeom prst="ellipse">
+            <a:avLst/>
+          </a:prstGeom>
+          <a:solidFill>
+            <a:srgbClr val="FFFFFF"/>
+          </a:solidFill>
+          <a:ln>
+            <a:noFill/>
+          </a:ln>
+        </p:spPr>
+        <p:txBody>
+          <a:bodyPr rtlCol="0" anchor="ctr"/>
+          <a:lstStyle/>
+          <a:p>
+            <a:pPr algn="ctr"/>
+          </a:p>
+        </p:txBody>
+      </p:sp>
+      <p:pic>
+        <p:nvPicPr>
+          <p:cNvPr id="8" name="아이콘:send" descr="send_13294B_1.6.png"/>
+          <p:cNvPicPr>
+            <a:picLocks noChangeAspect="1"/>
+          </p:cNvPicPr>
+          <p:nvPr/>
+        </p:nvPicPr>
+        <p:blipFill>
+          <a:blip r:embed="rId3"/>
+          <a:stretch>
+            <a:fillRect/>
+          </a:stretch>
+        </p:blipFill>
+        <p:spPr>
+          <a:xfrm>
+            <a:off x="1579283" y="2939681"/>
+            <a:ext cx="424281" cy="424281"/>
+          </a:xfrm>
+          <a:prstGeom prst="rect">
+            <a:avLst/>
+          </a:prstGeom>
+        </p:spPr>
+      </p:pic>
+      <p:sp>
+        <p:nvSpPr>
+          <p:cNvPr id="9" name="TextBox 8"/>
+          <p:cNvSpPr txBox="1"/>
+          <p:nvPr/>
+        </p:nvSpPr>
+        <p:spPr>
+          <a:xfrm>
+            <a:off x="621792" y="3590734"/>
+            <a:ext cx="2339263" cy="1715642"/>
+          </a:xfrm>
+          <a:prstGeom prst="rect">
+            <a:avLst/>
+          </a:prstGeom>
+          <a:noFill/>
+        </p:spPr>
+        <p:txBody>
+          <a:bodyPr wrap="square" anchor="t"/>
+          <a:lstStyle/>
+          <a:p>
+            <a:pPr algn="ctr">
+              <a:lnSpc>
+                <a:spcPct val="110000"/>
+              </a:lnSpc>
+              <a:spcAft>
+                <a:spcPts val="400"/>
+              </a:spcAft>
+            </a:pPr>
+            <a:r>
+              <a:rPr sz="1700" b="1">
+                <a:solidFill>
+                  <a:srgbClr val="13294B"/>
+                </a:solidFill>
+                <a:latin typeface="맑은 고딕"/>
+                <a:ea typeface="맑은 고딕"/>
+                <a:cs typeface="맑은 고딕"/>
+              </a:rPr>
+              <a:t>제출</a:t>
+            </a:r>
+          </a:p>
+          <a:p>
+            <a:pPr algn="ctr">
+              <a:lnSpc>
+                <a:spcPct val="110000"/>
+              </a:lnSpc>
+              <a:spcAft>
+                <a:spcPts val="400"/>
+              </a:spcAft>
+            </a:pPr>
+            <a:r>
+              <a:rPr sz="1350" b="0">
+                <a:solidFill>
+                  <a:srgbClr val="1F2A3A"/>
+                </a:solidFill>
+                <a:latin typeface="맑은 고딕"/>
+                <a:ea typeface="맑은 고딕"/>
+                <a:cs typeface="맑은 고딕"/>
+              </a:rPr>
+              <a:t>에이전트가</a:t>
+            </a:r>
+          </a:p>
+          <a:p>
+            <a:pPr algn="ctr">
+              <a:lnSpc>
+                <a:spcPct val="110000"/>
+              </a:lnSpc>
+              <a:spcAft>
+                <a:spcPts val="400"/>
+              </a:spcAft>
+            </a:pPr>
+            <a:r>
+              <a:rPr sz="1350" b="0">
+                <a:solidFill>
+                  <a:srgbClr val="1F2A3A"/>
+                </a:solidFill>
+                <a:latin typeface="맑은 고딕"/>
+                <a:ea typeface="맑은 고딕"/>
+                <a:cs typeface="맑은 고딕"/>
+              </a:rPr>
+              <a:t>결과 객체를 낸다</a:t>
+            </a:r>
+          </a:p>
+        </p:txBody>
+      </p:sp>
+      <p:sp>
+        <p:nvSpPr>
+          <p:cNvPr id="10" name="Right Arrow 9"/>
+          <p:cNvSpPr/>
+          <p:nvPr/>
+        </p:nvSpPr>
+        <p:spPr>
+          <a:xfrm>
+            <a:off x="3098215" y="3854196"/>
+            <a:ext cx="256031" cy="274320"/>
+          </a:xfrm>
+          <a:prstGeom prst="rightArrow">
+            <a:avLst/>
+          </a:prstGeom>
+          <a:solidFill>
+            <a:srgbClr val="13294B"/>
+          </a:solidFill>
+          <a:ln>
+            <a:noFill/>
+          </a:ln>
+        </p:spPr>
+        <p:txBody>
+          <a:bodyPr rtlCol="0" anchor="ctr"/>
+          <a:lstStyle/>
+          <a:p>
+            <a:pPr algn="ctr"/>
+          </a:p>
+        </p:txBody>
+      </p:sp>
+      <p:sp>
+        <p:nvSpPr>
+          <p:cNvPr id="11" name="Rounded Rectangle 10"/>
+          <p:cNvSpPr/>
+          <p:nvPr/>
+        </p:nvSpPr>
+        <p:spPr>
+          <a:xfrm>
+            <a:off x="3418255" y="2603182"/>
+            <a:ext cx="2485567" cy="2776346"/>
+          </a:xfrm>
+          <a:prstGeom prst="roundRect">
+            <a:avLst>
+              <a:gd name="adj" fmla="val 5000"/>
+            </a:avLst>
+          </a:prstGeom>
+          <a:solidFill>
+            <a:srgbClr val="E7F3FD"/>
+          </a:solidFill>
+          <a:ln w="25400">
+            <a:solidFill>
+              <a:srgbClr val="5CB8F2"/>
+            </a:solidFill>
+          </a:ln>
+        </p:spPr>
+        <p:txBody>
+          <a:bodyPr rtlCol="0" anchor="ctr"/>
+          <a:lstStyle/>
+          <a:p>
+            <a:pPr algn="ctr"/>
+          </a:p>
+        </p:txBody>
+      </p:sp>
+      <p:sp>
+        <p:nvSpPr>
+          <p:cNvPr id="12" name="Oval 11"/>
+          <p:cNvSpPr/>
+          <p:nvPr/>
+        </p:nvSpPr>
+        <p:spPr>
+          <a:xfrm>
+            <a:off x="4295279" y="2786062"/>
+            <a:ext cx="731520" cy="731520"/>
+          </a:xfrm>
+          <a:prstGeom prst="ellipse">
             <a:avLst/>
           </a:prstGeom>
           <a:solidFill>
@@ -21823,33 +22231,60 @@
           </a:p>
         </p:txBody>
       </p:sp>
-      <p:sp>
-        <p:nvSpPr>
-          <p:cNvPr id="4" name="TextBox 3"/>
-          <p:cNvSpPr txBox="1"/>
-          <p:nvPr/>
-        </p:nvSpPr>
-        <p:spPr>
-          <a:xfrm>
-            <a:off x="731520" y="2011680"/>
-            <a:ext cx="10911535" cy="2011680"/>
-          </a:xfrm>
-          <a:prstGeom prst="rect">
-            <a:avLst/>
-          </a:prstGeom>
-          <a:noFill/>
-        </p:spPr>
-        <p:txBody>
-          <a:bodyPr wrap="square" anchor="ctr"/>
-          <a:lstStyle/>
-          <a:p>
-            <a:pPr algn="l">
-              <a:lnSpc>
-                <a:spcPct val="110000"/>
-              </a:lnSpc>
-            </a:pPr>
-            <a:r>
-              <a:rPr sz="3400" b="1">
+      <p:pic>
+        <p:nvPicPr>
+          <p:cNvPr id="13" name="아이콘:checks" descr="checks_13294B_1.6.png"/>
+          <p:cNvPicPr>
+            <a:picLocks noChangeAspect="1"/>
+          </p:cNvPicPr>
+          <p:nvPr/>
+        </p:nvPicPr>
+        <p:blipFill>
+          <a:blip r:embed="rId4"/>
+          <a:stretch>
+            <a:fillRect/>
+          </a:stretch>
+        </p:blipFill>
+        <p:spPr>
+          <a:xfrm>
+            <a:off x="4448898" y="2939681"/>
+            <a:ext cx="424281" cy="424281"/>
+          </a:xfrm>
+          <a:prstGeom prst="rect">
+            <a:avLst/>
+          </a:prstGeom>
+        </p:spPr>
+      </p:pic>
+      <p:sp>
+        <p:nvSpPr>
+          <p:cNvPr id="14" name="TextBox 13"/>
+          <p:cNvSpPr txBox="1"/>
+          <p:nvPr/>
+        </p:nvSpPr>
+        <p:spPr>
+          <a:xfrm>
+            <a:off x="3491407" y="3590734"/>
+            <a:ext cx="2339263" cy="1715642"/>
+          </a:xfrm>
+          <a:prstGeom prst="rect">
+            <a:avLst/>
+          </a:prstGeom>
+          <a:noFill/>
+        </p:spPr>
+        <p:txBody>
+          <a:bodyPr wrap="square" anchor="t"/>
+          <a:lstStyle/>
+          <a:p>
+            <a:pPr algn="ctr">
+              <a:lnSpc>
+                <a:spcPct val="110000"/>
+              </a:lnSpc>
+              <a:spcAft>
+                <a:spcPts val="400"/>
+              </a:spcAft>
+            </a:pPr>
+            <a:r>
+              <a:rPr sz="1700" b="1">
                 <a:solidFill>
                   <a:srgbClr val="13294B"/>
                 </a:solidFill>
@@ -21857,29 +22292,69 @@
                 <a:ea typeface="맑은 고딕"/>
                 <a:cs typeface="맑은 고딕"/>
               </a:rPr>
-              <a:t>실습: 나의 첫 업무 에이전트 구성하기</a:t>
-            </a:r>
-          </a:p>
-        </p:txBody>
-      </p:sp>
-      <p:sp>
-        <p:nvSpPr>
-          <p:cNvPr id="5" name="Rounded Rectangle 4"/>
+              <a:t>형식 검사</a:t>
+            </a:r>
+          </a:p>
+          <a:p>
+            <a:pPr algn="ctr">
+              <a:lnSpc>
+                <a:spcPct val="110000"/>
+              </a:lnSpc>
+              <a:spcAft>
+                <a:spcPts val="400"/>
+              </a:spcAft>
+            </a:pPr>
+            <a:r>
+              <a:rPr sz="1350" b="0">
+                <a:solidFill>
+                  <a:srgbClr val="1F2A3A"/>
+                </a:solidFill>
+                <a:latin typeface="맑은 고딕"/>
+                <a:ea typeface="맑은 고딕"/>
+                <a:cs typeface="맑은 고딕"/>
+              </a:rPr>
+              <a:t>정해진 항목과</a:t>
+            </a:r>
+          </a:p>
+          <a:p>
+            <a:pPr algn="ctr">
+              <a:lnSpc>
+                <a:spcPct val="110000"/>
+              </a:lnSpc>
+              <a:spcAft>
+                <a:spcPts val="400"/>
+              </a:spcAft>
+            </a:pPr>
+            <a:r>
+              <a:rPr sz="1350" b="0">
+                <a:solidFill>
+                  <a:srgbClr val="1F2A3A"/>
+                </a:solidFill>
+                <a:latin typeface="맑은 고딕"/>
+                <a:ea typeface="맑은 고딕"/>
+                <a:cs typeface="맑은 고딕"/>
+              </a:rPr>
+              <a:t>맞는지를 시스템이 본다</a:t>
+            </a:r>
+          </a:p>
+        </p:txBody>
+      </p:sp>
+      <p:sp>
+        <p:nvSpPr>
+          <p:cNvPr id="15" name="Right Arrow 14"/>
           <p:cNvSpPr/>
           <p:nvPr/>
         </p:nvSpPr>
         <p:spPr>
           <a:xfrm>
-            <a:off x="822960" y="4160520"/>
-            <a:ext cx="822960" cy="347472"/>
-          </a:xfrm>
-          <a:prstGeom prst="roundRect">
-            <a:avLst>
-              <a:gd name="adj" fmla="val 50000"/>
-            </a:avLst>
+            <a:off x="5967831" y="3854196"/>
+            <a:ext cx="256031" cy="274320"/>
+          </a:xfrm>
+          <a:prstGeom prst="rightArrow">
+            <a:avLst/>
           </a:prstGeom>
           <a:solidFill>
-            <a:srgbClr val="5CB8F2"/>
+            <a:srgbClr val="13294B"/>
           </a:solidFill>
           <a:ln>
             <a:noFill/>
@@ -21895,31 +22370,118 @@
       </p:sp>
       <p:sp>
         <p:nvSpPr>
-          <p:cNvPr id="6" name="TextBox 5"/>
-          <p:cNvSpPr txBox="1"/>
-          <p:nvPr/>
-        </p:nvSpPr>
-        <p:spPr>
-          <a:xfrm>
-            <a:off x="822960" y="4160520"/>
-            <a:ext cx="822960" cy="347472"/>
-          </a:xfrm>
-          <a:prstGeom prst="rect">
-            <a:avLst/>
-          </a:prstGeom>
-          <a:noFill/>
-        </p:spPr>
-        <p:txBody>
-          <a:bodyPr wrap="square" anchor="ctr"/>
+          <p:cNvPr id="16" name="Rounded Rectangle 15"/>
+          <p:cNvSpPr/>
+          <p:nvPr/>
+        </p:nvSpPr>
+        <p:spPr>
+          <a:xfrm>
+            <a:off x="6287871" y="2603182"/>
+            <a:ext cx="2485567" cy="2776346"/>
+          </a:xfrm>
+          <a:prstGeom prst="roundRect">
+            <a:avLst>
+              <a:gd name="adj" fmla="val 5000"/>
+            </a:avLst>
+          </a:prstGeom>
+          <a:solidFill>
+            <a:srgbClr val="F3F6F9"/>
+          </a:solidFill>
+          <a:ln>
+            <a:noFill/>
+          </a:ln>
+        </p:spPr>
+        <p:txBody>
+          <a:bodyPr rtlCol="0" anchor="ctr"/>
+          <a:lstStyle/>
+          <a:p>
+            <a:pPr algn="ctr"/>
+          </a:p>
+        </p:txBody>
+      </p:sp>
+      <p:sp>
+        <p:nvSpPr>
+          <p:cNvPr id="17" name="Oval 16"/>
+          <p:cNvSpPr/>
+          <p:nvPr/>
+        </p:nvSpPr>
+        <p:spPr>
+          <a:xfrm>
+            <a:off x="7164895" y="2786062"/>
+            <a:ext cx="731520" cy="731520"/>
+          </a:xfrm>
+          <a:prstGeom prst="ellipse">
+            <a:avLst/>
+          </a:prstGeom>
+          <a:solidFill>
+            <a:srgbClr val="FFFFFF"/>
+          </a:solidFill>
+          <a:ln>
+            <a:noFill/>
+          </a:ln>
+        </p:spPr>
+        <p:txBody>
+          <a:bodyPr rtlCol="0" anchor="ctr"/>
+          <a:lstStyle/>
+          <a:p>
+            <a:pPr algn="ctr"/>
+          </a:p>
+        </p:txBody>
+      </p:sp>
+      <p:pic>
+        <p:nvPicPr>
+          <p:cNvPr id="18" name="아이콘:arrow-back-up" descr="arrow-back-up_13294B_1.6.png"/>
+          <p:cNvPicPr>
+            <a:picLocks noChangeAspect="1"/>
+          </p:cNvPicPr>
+          <p:nvPr/>
+        </p:nvPicPr>
+        <p:blipFill>
+          <a:blip r:embed="rId5"/>
+          <a:stretch>
+            <a:fillRect/>
+          </a:stretch>
+        </p:blipFill>
+        <p:spPr>
+          <a:xfrm>
+            <a:off x="7318514" y="2939681"/>
+            <a:ext cx="424281" cy="424281"/>
+          </a:xfrm>
+          <a:prstGeom prst="rect">
+            <a:avLst/>
+          </a:prstGeom>
+        </p:spPr>
+      </p:pic>
+      <p:sp>
+        <p:nvSpPr>
+          <p:cNvPr id="19" name="TextBox 18"/>
+          <p:cNvSpPr txBox="1"/>
+          <p:nvPr/>
+        </p:nvSpPr>
+        <p:spPr>
+          <a:xfrm>
+            <a:off x="6361023" y="3590734"/>
+            <a:ext cx="2339263" cy="1715642"/>
+          </a:xfrm>
+          <a:prstGeom prst="rect">
+            <a:avLst/>
+          </a:prstGeom>
+          <a:noFill/>
+        </p:spPr>
+        <p:txBody>
+          <a:bodyPr wrap="square" anchor="t"/>
           <a:lstStyle/>
           <a:p>
             <a:pPr algn="ctr">
               <a:lnSpc>
                 <a:spcPct val="110000"/>
               </a:lnSpc>
-            </a:pPr>
-            <a:r>
-              <a:rPr sz="1300" b="1">
+              <a:spcAft>
+                <a:spcPts val="400"/>
+              </a:spcAft>
+            </a:pPr>
+            <a:r>
+              <a:rPr sz="1700" b="1">
                 <a:solidFill>
                   <a:srgbClr val="13294B"/>
                 </a:solidFill>
@@ -21927,21 +22489,197 @@
                 <a:ea typeface="맑은 고딕"/>
                 <a:cs typeface="맑은 고딕"/>
               </a:rPr>
-              <a:t>실습</a:t>
-            </a:r>
-          </a:p>
-        </p:txBody>
-      </p:sp>
-      <p:sp>
-        <p:nvSpPr>
-          <p:cNvPr id="7" name="TextBox 6"/>
-          <p:cNvSpPr txBox="1"/>
-          <p:nvPr/>
-        </p:nvSpPr>
-        <p:spPr>
-          <a:xfrm>
-            <a:off x="731520" y="4617720"/>
-            <a:ext cx="10911535" cy="457200"/>
+              <a:t>거절과 교정</a:t>
+            </a:r>
+          </a:p>
+          <a:p>
+            <a:pPr algn="ctr">
+              <a:lnSpc>
+                <a:spcPct val="110000"/>
+              </a:lnSpc>
+              <a:spcAft>
+                <a:spcPts val="400"/>
+              </a:spcAft>
+            </a:pPr>
+            <a:r>
+              <a:rPr sz="1350" b="0">
+                <a:solidFill>
+                  <a:srgbClr val="1F2A3A"/>
+                </a:solidFill>
+                <a:latin typeface="맑은 고딕"/>
+                <a:ea typeface="맑은 고딕"/>
+                <a:cs typeface="맑은 고딕"/>
+              </a:rPr>
+              <a:t>「출력 형식 검사에서</a:t>
+            </a:r>
+          </a:p>
+          <a:p>
+            <a:pPr algn="ctr">
+              <a:lnSpc>
+                <a:spcPct val="110000"/>
+              </a:lnSpc>
+              <a:spcAft>
+                <a:spcPts val="400"/>
+              </a:spcAft>
+            </a:pPr>
+            <a:r>
+              <a:rPr sz="1350" b="0">
+                <a:solidFill>
+                  <a:srgbClr val="1F2A3A"/>
+                </a:solidFill>
+                <a:latin typeface="맑은 고딕"/>
+                <a:ea typeface="맑은 고딕"/>
+                <a:cs typeface="맑은 고딕"/>
+              </a:rPr>
+              <a:t>거절됐습니다」를 받고</a:t>
+            </a:r>
+          </a:p>
+          <a:p>
+            <a:pPr algn="ctr">
+              <a:lnSpc>
+                <a:spcPct val="110000"/>
+              </a:lnSpc>
+              <a:spcAft>
+                <a:spcPts val="400"/>
+              </a:spcAft>
+            </a:pPr>
+            <a:r>
+              <a:rPr sz="1350" b="0">
+                <a:solidFill>
+                  <a:srgbClr val="1F2A3A"/>
+                </a:solidFill>
+                <a:latin typeface="맑은 고딕"/>
+                <a:ea typeface="맑은 고딕"/>
+                <a:cs typeface="맑은 고딕"/>
+              </a:rPr>
+              <a:t>고쳐서 다시 낸다</a:t>
+            </a:r>
+          </a:p>
+        </p:txBody>
+      </p:sp>
+      <p:sp>
+        <p:nvSpPr>
+          <p:cNvPr id="20" name="Right Arrow 19"/>
+          <p:cNvSpPr/>
+          <p:nvPr/>
+        </p:nvSpPr>
+        <p:spPr>
+          <a:xfrm>
+            <a:off x="8837447" y="3854196"/>
+            <a:ext cx="256031" cy="274320"/>
+          </a:xfrm>
+          <a:prstGeom prst="rightArrow">
+            <a:avLst/>
+          </a:prstGeom>
+          <a:solidFill>
+            <a:srgbClr val="13294B"/>
+          </a:solidFill>
+          <a:ln>
+            <a:noFill/>
+          </a:ln>
+        </p:spPr>
+        <p:txBody>
+          <a:bodyPr rtlCol="0" anchor="ctr"/>
+          <a:lstStyle/>
+          <a:p>
+            <a:pPr algn="ctr"/>
+          </a:p>
+        </p:txBody>
+      </p:sp>
+      <p:sp>
+        <p:nvSpPr>
+          <p:cNvPr id="21" name="Rounded Rectangle 20"/>
+          <p:cNvSpPr/>
+          <p:nvPr/>
+        </p:nvSpPr>
+        <p:spPr>
+          <a:xfrm>
+            <a:off x="9157487" y="2603182"/>
+            <a:ext cx="2485567" cy="2776346"/>
+          </a:xfrm>
+          <a:prstGeom prst="roundRect">
+            <a:avLst>
+              <a:gd name="adj" fmla="val 5000"/>
+            </a:avLst>
+          </a:prstGeom>
+          <a:solidFill>
+            <a:srgbClr val="F3F6F9"/>
+          </a:solidFill>
+          <a:ln>
+            <a:noFill/>
+          </a:ln>
+        </p:spPr>
+        <p:txBody>
+          <a:bodyPr rtlCol="0" anchor="ctr"/>
+          <a:lstStyle/>
+          <a:p>
+            <a:pPr algn="ctr"/>
+          </a:p>
+        </p:txBody>
+      </p:sp>
+      <p:sp>
+        <p:nvSpPr>
+          <p:cNvPr id="22" name="Oval 21"/>
+          <p:cNvSpPr/>
+          <p:nvPr/>
+        </p:nvSpPr>
+        <p:spPr>
+          <a:xfrm>
+            <a:off x="10034511" y="2786062"/>
+            <a:ext cx="731520" cy="731520"/>
+          </a:xfrm>
+          <a:prstGeom prst="ellipse">
+            <a:avLst/>
+          </a:prstGeom>
+          <a:solidFill>
+            <a:srgbClr val="FFFFFF"/>
+          </a:solidFill>
+          <a:ln>
+            <a:noFill/>
+          </a:ln>
+        </p:spPr>
+        <p:txBody>
+          <a:bodyPr rtlCol="0" anchor="ctr"/>
+          <a:lstStyle/>
+          <a:p>
+            <a:pPr algn="ctr"/>
+          </a:p>
+        </p:txBody>
+      </p:sp>
+      <p:pic>
+        <p:nvPicPr>
+          <p:cNvPr id="23" name="아이콘:user-check" descr="user-check_13294B_1.6.png"/>
+          <p:cNvPicPr>
+            <a:picLocks noChangeAspect="1"/>
+          </p:cNvPicPr>
+          <p:nvPr/>
+        </p:nvPicPr>
+        <p:blipFill>
+          <a:blip r:embed="rId6"/>
+          <a:stretch>
+            <a:fillRect/>
+          </a:stretch>
+        </p:blipFill>
+        <p:spPr>
+          <a:xfrm>
+            <a:off x="10188130" y="2939681"/>
+            <a:ext cx="424281" cy="424281"/>
+          </a:xfrm>
+          <a:prstGeom prst="rect">
+            <a:avLst/>
+          </a:prstGeom>
+        </p:spPr>
+      </p:pic>
+      <p:sp>
+        <p:nvSpPr>
+          <p:cNvPr id="24" name="TextBox 23"/>
+          <p:cNvSpPr txBox="1"/>
+          <p:nvPr/>
+        </p:nvSpPr>
+        <p:spPr>
+          <a:xfrm>
+            <a:off x="9230639" y="3590734"/>
+            <a:ext cx="2339263" cy="1715642"/>
           </a:xfrm>
           <a:prstGeom prst="rect">
             <a:avLst/>
@@ -21952,21 +22690,66 @@
           <a:bodyPr wrap="square" anchor="t"/>
           <a:lstStyle/>
           <a:p>
-            <a:pPr algn="l">
-              <a:lnSpc>
-                <a:spcPct val="110000"/>
-              </a:lnSpc>
-            </a:pPr>
-            <a:r>
-              <a:rPr sz="1700" b="0">
-                <a:solidFill>
-                  <a:srgbClr val="556175"/>
-                </a:solidFill>
-                <a:latin typeface="맑은 고딕"/>
-                <a:ea typeface="맑은 고딕"/>
-                <a:cs typeface="맑은 고딕"/>
-              </a:rPr>
-              <a:t>HYD 포털에서 에이전트의 이름, 목표, 역할, 사용 도구를 정하고 직접 질문한다</a:t>
+            <a:pPr algn="ctr">
+              <a:lnSpc>
+                <a:spcPct val="110000"/>
+              </a:lnSpc>
+              <a:spcAft>
+                <a:spcPts val="400"/>
+              </a:spcAft>
+            </a:pPr>
+            <a:r>
+              <a:rPr sz="1700" b="1">
+                <a:solidFill>
+                  <a:srgbClr val="13294B"/>
+                </a:solidFill>
+                <a:latin typeface="맑은 고딕"/>
+                <a:ea typeface="맑은 고딕"/>
+                <a:cs typeface="맑은 고딕"/>
+              </a:rPr>
+              <a:t>통과</a:t>
+            </a:r>
+          </a:p>
+          <a:p>
+            <a:pPr algn="ctr">
+              <a:lnSpc>
+                <a:spcPct val="110000"/>
+              </a:lnSpc>
+              <a:spcAft>
+                <a:spcPts val="400"/>
+              </a:spcAft>
+            </a:pPr>
+            <a:r>
+              <a:rPr sz="1350" b="0">
+                <a:solidFill>
+                  <a:srgbClr val="1F2A3A"/>
+                </a:solidFill>
+                <a:latin typeface="맑은 고딕"/>
+                <a:ea typeface="맑은 고딕"/>
+                <a:cs typeface="맑은 고딕"/>
+              </a:rPr>
+              <a:t>승인할 담당자에게</a:t>
+            </a:r>
+          </a:p>
+          <a:p>
+            <a:pPr algn="ctr">
+              <a:lnSpc>
+                <a:spcPct val="110000"/>
+              </a:lnSpc>
+              <a:spcAft>
+                <a:spcPts val="400"/>
+              </a:spcAft>
+            </a:pPr>
+            <a:r>
+              <a:rPr sz="1350" b="0">
+                <a:solidFill>
+                  <a:srgbClr val="1F2A3A"/>
+                </a:solidFill>
+                <a:latin typeface="맑은 고딕"/>
+                <a:ea typeface="맑은 고딕"/>
+                <a:cs typeface="맑은 고딕"/>
+              </a:rPr>
+              <a:t>넘어간다</a:t>
             </a:r>
           </a:p>
         </p:txBody>
@@ -22073,7 +22856,7 @@
         </p:nvSpPr>
         <p:spPr>
           <a:xfrm>
-            <a:off x="548640" y="3063239"/>
+            <a:off x="548640" y="1600199"/>
             <a:ext cx="822960" cy="731520"/>
           </a:xfrm>
           <a:prstGeom prst="rect">
@@ -22112,7 +22895,7 @@
         </p:nvSpPr>
         <p:spPr>
           <a:xfrm>
-            <a:off x="1417319" y="3063239"/>
+            <a:off x="1417319" y="1600199"/>
             <a:ext cx="8488375" cy="731520"/>
           </a:xfrm>
           <a:prstGeom prst="rect">
@@ -22151,7 +22934,7 @@
         </p:nvSpPr>
         <p:spPr>
           <a:xfrm>
-            <a:off x="10088575" y="3282695"/>
+            <a:off x="10088575" y="1819655"/>
             <a:ext cx="1371600" cy="292608"/>
           </a:xfrm>
           <a:prstGeom prst="roundRect">
@@ -22182,7 +22965,7 @@
         </p:nvSpPr>
         <p:spPr>
           <a:xfrm>
-            <a:off x="10088575" y="3282695"/>
+            <a:off x="10088575" y="1819655"/>
             <a:ext cx="1371600" cy="292608"/>
           </a:xfrm>
           <a:prstGeom prst="rect">
@@ -22221,7 +23004,7 @@
         </p:nvSpPr>
         <p:spPr>
           <a:xfrm>
-            <a:off x="548640" y="3785615"/>
+            <a:off x="548640" y="2322576"/>
             <a:ext cx="11094415" cy="13716"/>
           </a:xfrm>
           <a:prstGeom prst="rect">
@@ -22250,7 +23033,7 @@
         </p:nvSpPr>
         <p:spPr>
           <a:xfrm>
-            <a:off x="548640" y="3794759"/>
+            <a:off x="548640" y="2331720"/>
             <a:ext cx="822960" cy="731520"/>
           </a:xfrm>
           <a:prstGeom prst="rect">
@@ -22289,7 +23072,7 @@
         </p:nvSpPr>
         <p:spPr>
           <a:xfrm>
-            <a:off x="1417319" y="3794759"/>
+            <a:off x="1417319" y="2331720"/>
             <a:ext cx="8488375" cy="731520"/>
           </a:xfrm>
           <a:prstGeom prst="rect">
@@ -22328,7 +23111,7 @@
         </p:nvSpPr>
         <p:spPr>
           <a:xfrm>
-            <a:off x="10088575" y="4014215"/>
+            <a:off x="10088575" y="2551175"/>
             <a:ext cx="1371600" cy="292608"/>
           </a:xfrm>
           <a:prstGeom prst="roundRect">
@@ -22359,7 +23142,7 @@
         </p:nvSpPr>
         <p:spPr>
           <a:xfrm>
-            <a:off x="10088575" y="4014215"/>
+            <a:off x="10088575" y="2551175"/>
             <a:ext cx="1371600" cy="292608"/>
           </a:xfrm>
           <a:prstGeom prst="rect">
@@ -22385,14 +23168,722 @@
                 <a:ea typeface="맑은 고딕"/>
                 <a:cs typeface="맑은 고딕"/>
               </a:rPr>
-              <a:t>이론 · 실습</a:t>
-            </a:r>
-          </a:p>
-        </p:txBody>
-      </p:sp>
-      <p:sp>
-        <p:nvSpPr>
-          <p:cNvPr id="13" name="TextBox 12"/>
+              <a:t>이론</a:t>
+            </a:r>
+          </a:p>
+        </p:txBody>
+      </p:sp>
+      <p:sp>
+        <p:nvSpPr>
+          <p:cNvPr id="13" name="Rectangle 12"/>
+          <p:cNvSpPr/>
+          <p:nvPr/>
+        </p:nvSpPr>
+        <p:spPr>
+          <a:xfrm>
+            <a:off x="548640" y="3054096"/>
+            <a:ext cx="11094415" cy="13716"/>
+          </a:xfrm>
+          <a:prstGeom prst="rect">
+            <a:avLst/>
+          </a:prstGeom>
+          <a:solidFill>
+            <a:srgbClr val="D3D9E1"/>
+          </a:solidFill>
+          <a:ln>
+            <a:noFill/>
+          </a:ln>
+        </p:spPr>
+        <p:txBody>
+          <a:bodyPr rtlCol="0" anchor="ctr"/>
+          <a:lstStyle/>
+          <a:p>
+            <a:pPr algn="ctr"/>
+          </a:p>
+        </p:txBody>
+      </p:sp>
+      <p:sp>
+        <p:nvSpPr>
+          <p:cNvPr id="14" name="TextBox 13"/>
+          <p:cNvSpPr txBox="1"/>
+          <p:nvPr/>
+        </p:nvSpPr>
+        <p:spPr>
+          <a:xfrm>
+            <a:off x="548640" y="3063239"/>
+            <a:ext cx="822960" cy="731520"/>
+          </a:xfrm>
+          <a:prstGeom prst="rect">
+            <a:avLst/>
+          </a:prstGeom>
+          <a:noFill/>
+        </p:spPr>
+        <p:txBody>
+          <a:bodyPr wrap="square" anchor="ctr"/>
+          <a:lstStyle/>
+          <a:p>
+            <a:pPr algn="l">
+              <a:lnSpc>
+                <a:spcPct val="110000"/>
+              </a:lnSpc>
+            </a:pPr>
+            <a:r>
+              <a:rPr sz="2200" b="1">
+                <a:solidFill>
+                  <a:srgbClr val="1A6FC4"/>
+                </a:solidFill>
+                <a:latin typeface="맑은 고딕"/>
+                <a:ea typeface="맑은 고딕"/>
+                <a:cs typeface="맑은 고딕"/>
+              </a:rPr>
+              <a:t>03</a:t>
+            </a:r>
+          </a:p>
+        </p:txBody>
+      </p:sp>
+      <p:sp>
+        <p:nvSpPr>
+          <p:cNvPr id="15" name="TextBox 14"/>
+          <p:cNvSpPr txBox="1"/>
+          <p:nvPr/>
+        </p:nvSpPr>
+        <p:spPr>
+          <a:xfrm>
+            <a:off x="1417319" y="3063239"/>
+            <a:ext cx="8488375" cy="731520"/>
+          </a:xfrm>
+          <a:prstGeom prst="rect">
+            <a:avLst/>
+          </a:prstGeom>
+          <a:noFill/>
+        </p:spPr>
+        <p:txBody>
+          <a:bodyPr wrap="square" anchor="ctr"/>
+          <a:lstStyle/>
+          <a:p>
+            <a:pPr algn="l">
+              <a:lnSpc>
+                <a:spcPct val="110000"/>
+              </a:lnSpc>
+            </a:pPr>
+            <a:r>
+              <a:rPr sz="1900" b="1">
+                <a:solidFill>
+                  <a:srgbClr val="13294B"/>
+                </a:solidFill>
+                <a:latin typeface="맑은 고딕"/>
+                <a:ea typeface="맑은 고딕"/>
+                <a:cs typeface="맑은 고딕"/>
+              </a:rPr>
+              <a:t>나의 첫 업무 에이전트 구성하기</a:t>
+            </a:r>
+          </a:p>
+        </p:txBody>
+      </p:sp>
+      <p:sp>
+        <p:nvSpPr>
+          <p:cNvPr id="16" name="Rounded Rectangle 15"/>
+          <p:cNvSpPr/>
+          <p:nvPr/>
+        </p:nvSpPr>
+        <p:spPr>
+          <a:xfrm>
+            <a:off x="10088575" y="3282695"/>
+            <a:ext cx="1371600" cy="292608"/>
+          </a:xfrm>
+          <a:prstGeom prst="roundRect">
+            <a:avLst>
+              <a:gd name="adj" fmla="val 50000"/>
+            </a:avLst>
+          </a:prstGeom>
+          <a:solidFill>
+            <a:srgbClr val="D3D9E1"/>
+          </a:solidFill>
+          <a:ln>
+            <a:noFill/>
+          </a:ln>
+        </p:spPr>
+        <p:txBody>
+          <a:bodyPr rtlCol="0" anchor="ctr"/>
+          <a:lstStyle/>
+          <a:p>
+            <a:pPr algn="ctr"/>
+          </a:p>
+        </p:txBody>
+      </p:sp>
+      <p:sp>
+        <p:nvSpPr>
+          <p:cNvPr id="17" name="TextBox 16"/>
+          <p:cNvSpPr txBox="1"/>
+          <p:nvPr/>
+        </p:nvSpPr>
+        <p:spPr>
+          <a:xfrm>
+            <a:off x="10088575" y="3282695"/>
+            <a:ext cx="1371600" cy="292608"/>
+          </a:xfrm>
+          <a:prstGeom prst="rect">
+            <a:avLst/>
+          </a:prstGeom>
+          <a:noFill/>
+        </p:spPr>
+        <p:txBody>
+          <a:bodyPr wrap="square" anchor="ctr"/>
+          <a:lstStyle/>
+          <a:p>
+            <a:pPr algn="ctr">
+              <a:lnSpc>
+                <a:spcPct val="110000"/>
+              </a:lnSpc>
+            </a:pPr>
+            <a:r>
+              <a:rPr sz="1200" b="1">
+                <a:solidFill>
+                  <a:srgbClr val="13294B"/>
+                </a:solidFill>
+                <a:latin typeface="맑은 고딕"/>
+                <a:ea typeface="맑은 고딕"/>
+                <a:cs typeface="맑은 고딕"/>
+              </a:rPr>
+              <a:t>실습</a:t>
+            </a:r>
+          </a:p>
+        </p:txBody>
+      </p:sp>
+      <p:sp>
+        <p:nvSpPr>
+          <p:cNvPr id="18" name="Rectangle 17"/>
+          <p:cNvSpPr/>
+          <p:nvPr/>
+        </p:nvSpPr>
+        <p:spPr>
+          <a:xfrm>
+            <a:off x="548640" y="3785615"/>
+            <a:ext cx="11094415" cy="13716"/>
+          </a:xfrm>
+          <a:prstGeom prst="rect">
+            <a:avLst/>
+          </a:prstGeom>
+          <a:solidFill>
+            <a:srgbClr val="D3D9E1"/>
+          </a:solidFill>
+          <a:ln>
+            <a:noFill/>
+          </a:ln>
+        </p:spPr>
+        <p:txBody>
+          <a:bodyPr rtlCol="0" anchor="ctr"/>
+          <a:lstStyle/>
+          <a:p>
+            <a:pPr algn="ctr"/>
+          </a:p>
+        </p:txBody>
+      </p:sp>
+      <p:sp>
+        <p:nvSpPr>
+          <p:cNvPr id="19" name="TextBox 18"/>
+          <p:cNvSpPr txBox="1"/>
+          <p:nvPr/>
+        </p:nvSpPr>
+        <p:spPr>
+          <a:xfrm>
+            <a:off x="548640" y="3794760"/>
+            <a:ext cx="822960" cy="731520"/>
+          </a:xfrm>
+          <a:prstGeom prst="rect">
+            <a:avLst/>
+          </a:prstGeom>
+          <a:noFill/>
+        </p:spPr>
+        <p:txBody>
+          <a:bodyPr wrap="square" anchor="ctr"/>
+          <a:lstStyle/>
+          <a:p>
+            <a:pPr algn="l">
+              <a:lnSpc>
+                <a:spcPct val="110000"/>
+              </a:lnSpc>
+            </a:pPr>
+            <a:r>
+              <a:rPr sz="2200" b="1">
+                <a:solidFill>
+                  <a:srgbClr val="1A6FC4"/>
+                </a:solidFill>
+                <a:latin typeface="맑은 고딕"/>
+                <a:ea typeface="맑은 고딕"/>
+                <a:cs typeface="맑은 고딕"/>
+              </a:rPr>
+              <a:t>04</a:t>
+            </a:r>
+          </a:p>
+        </p:txBody>
+      </p:sp>
+      <p:sp>
+        <p:nvSpPr>
+          <p:cNvPr id="20" name="TextBox 19"/>
+          <p:cNvSpPr txBox="1"/>
+          <p:nvPr/>
+        </p:nvSpPr>
+        <p:spPr>
+          <a:xfrm>
+            <a:off x="1417319" y="3794760"/>
+            <a:ext cx="8488375" cy="731520"/>
+          </a:xfrm>
+          <a:prstGeom prst="rect">
+            <a:avLst/>
+          </a:prstGeom>
+          <a:noFill/>
+        </p:spPr>
+        <p:txBody>
+          <a:bodyPr wrap="square" anchor="ctr"/>
+          <a:lstStyle/>
+          <a:p>
+            <a:pPr algn="l">
+              <a:lnSpc>
+                <a:spcPct val="110000"/>
+              </a:lnSpc>
+            </a:pPr>
+            <a:r>
+              <a:rPr sz="1900" b="1">
+                <a:solidFill>
+                  <a:srgbClr val="13294B"/>
+                </a:solidFill>
+                <a:latin typeface="맑은 고딕"/>
+                <a:ea typeface="맑은 고딕"/>
+                <a:cs typeface="맑은 고딕"/>
+              </a:rPr>
+              <a:t>설비 이상의 원인을 추론하는 에이전트 제작</a:t>
+            </a:r>
+          </a:p>
+        </p:txBody>
+      </p:sp>
+      <p:sp>
+        <p:nvSpPr>
+          <p:cNvPr id="21" name="Rounded Rectangle 20"/>
+          <p:cNvSpPr/>
+          <p:nvPr/>
+        </p:nvSpPr>
+        <p:spPr>
+          <a:xfrm>
+            <a:off x="10088575" y="4014216"/>
+            <a:ext cx="1371600" cy="292608"/>
+          </a:xfrm>
+          <a:prstGeom prst="roundRect">
+            <a:avLst>
+              <a:gd name="adj" fmla="val 50000"/>
+            </a:avLst>
+          </a:prstGeom>
+          <a:solidFill>
+            <a:srgbClr val="D3D9E1"/>
+          </a:solidFill>
+          <a:ln>
+            <a:noFill/>
+          </a:ln>
+        </p:spPr>
+        <p:txBody>
+          <a:bodyPr rtlCol="0" anchor="ctr"/>
+          <a:lstStyle/>
+          <a:p>
+            <a:pPr algn="ctr"/>
+          </a:p>
+        </p:txBody>
+      </p:sp>
+      <p:sp>
+        <p:nvSpPr>
+          <p:cNvPr id="22" name="TextBox 21"/>
+          <p:cNvSpPr txBox="1"/>
+          <p:nvPr/>
+        </p:nvSpPr>
+        <p:spPr>
+          <a:xfrm>
+            <a:off x="10088575" y="4014216"/>
+            <a:ext cx="1371600" cy="292608"/>
+          </a:xfrm>
+          <a:prstGeom prst="rect">
+            <a:avLst/>
+          </a:prstGeom>
+          <a:noFill/>
+        </p:spPr>
+        <p:txBody>
+          <a:bodyPr wrap="square" anchor="ctr"/>
+          <a:lstStyle/>
+          <a:p>
+            <a:pPr algn="ctr">
+              <a:lnSpc>
+                <a:spcPct val="110000"/>
+              </a:lnSpc>
+            </a:pPr>
+            <a:r>
+              <a:rPr sz="1200" b="1">
+                <a:solidFill>
+                  <a:srgbClr val="13294B"/>
+                </a:solidFill>
+                <a:latin typeface="맑은 고딕"/>
+                <a:ea typeface="맑은 고딕"/>
+                <a:cs typeface="맑은 고딕"/>
+              </a:rPr>
+              <a:t>실습</a:t>
+            </a:r>
+          </a:p>
+        </p:txBody>
+      </p:sp>
+      <p:sp>
+        <p:nvSpPr>
+          <p:cNvPr id="23" name="Rectangle 22"/>
+          <p:cNvSpPr/>
+          <p:nvPr/>
+        </p:nvSpPr>
+        <p:spPr>
+          <a:xfrm>
+            <a:off x="548640" y="4517136"/>
+            <a:ext cx="11094415" cy="13716"/>
+          </a:xfrm>
+          <a:prstGeom prst="rect">
+            <a:avLst/>
+          </a:prstGeom>
+          <a:solidFill>
+            <a:srgbClr val="D3D9E1"/>
+          </a:solidFill>
+          <a:ln>
+            <a:noFill/>
+          </a:ln>
+        </p:spPr>
+        <p:txBody>
+          <a:bodyPr rtlCol="0" anchor="ctr"/>
+          <a:lstStyle/>
+          <a:p>
+            <a:pPr algn="ctr"/>
+          </a:p>
+        </p:txBody>
+      </p:sp>
+      <p:sp>
+        <p:nvSpPr>
+          <p:cNvPr id="24" name="TextBox 23"/>
+          <p:cNvSpPr txBox="1"/>
+          <p:nvPr/>
+        </p:nvSpPr>
+        <p:spPr>
+          <a:xfrm>
+            <a:off x="548640" y="4526279"/>
+            <a:ext cx="822960" cy="731520"/>
+          </a:xfrm>
+          <a:prstGeom prst="rect">
+            <a:avLst/>
+          </a:prstGeom>
+          <a:noFill/>
+        </p:spPr>
+        <p:txBody>
+          <a:bodyPr wrap="square" anchor="ctr"/>
+          <a:lstStyle/>
+          <a:p>
+            <a:pPr algn="l">
+              <a:lnSpc>
+                <a:spcPct val="110000"/>
+              </a:lnSpc>
+            </a:pPr>
+            <a:r>
+              <a:rPr sz="2200" b="1">
+                <a:solidFill>
+                  <a:srgbClr val="1A6FC4"/>
+                </a:solidFill>
+                <a:latin typeface="맑은 고딕"/>
+                <a:ea typeface="맑은 고딕"/>
+                <a:cs typeface="맑은 고딕"/>
+              </a:rPr>
+              <a:t>05</a:t>
+            </a:r>
+          </a:p>
+        </p:txBody>
+      </p:sp>
+      <p:sp>
+        <p:nvSpPr>
+          <p:cNvPr id="25" name="TextBox 24"/>
+          <p:cNvSpPr txBox="1"/>
+          <p:nvPr/>
+        </p:nvSpPr>
+        <p:spPr>
+          <a:xfrm>
+            <a:off x="1417319" y="4526279"/>
+            <a:ext cx="8488375" cy="731520"/>
+          </a:xfrm>
+          <a:prstGeom prst="rect">
+            <a:avLst/>
+          </a:prstGeom>
+          <a:noFill/>
+        </p:spPr>
+        <p:txBody>
+          <a:bodyPr wrap="square" anchor="ctr"/>
+          <a:lstStyle/>
+          <a:p>
+            <a:pPr algn="l">
+              <a:lnSpc>
+                <a:spcPct val="110000"/>
+              </a:lnSpc>
+            </a:pPr>
+            <a:r>
+              <a:rPr sz="1900" b="1">
+                <a:solidFill>
+                  <a:srgbClr val="13294B"/>
+                </a:solidFill>
+                <a:latin typeface="맑은 고딕"/>
+                <a:ea typeface="맑은 고딕"/>
+                <a:cs typeface="맑은 고딕"/>
+              </a:rPr>
+              <a:t>여러 증거의 비교와 점검 우선순위 결정</a:t>
+            </a:r>
+          </a:p>
+        </p:txBody>
+      </p:sp>
+      <p:sp>
+        <p:nvSpPr>
+          <p:cNvPr id="26" name="Rounded Rectangle 25"/>
+          <p:cNvSpPr/>
+          <p:nvPr/>
+        </p:nvSpPr>
+        <p:spPr>
+          <a:xfrm>
+            <a:off x="10088575" y="4745736"/>
+            <a:ext cx="1371600" cy="292608"/>
+          </a:xfrm>
+          <a:prstGeom prst="roundRect">
+            <a:avLst>
+              <a:gd name="adj" fmla="val 50000"/>
+            </a:avLst>
+          </a:prstGeom>
+          <a:solidFill>
+            <a:srgbClr val="D3D9E1"/>
+          </a:solidFill>
+          <a:ln>
+            <a:noFill/>
+          </a:ln>
+        </p:spPr>
+        <p:txBody>
+          <a:bodyPr rtlCol="0" anchor="ctr"/>
+          <a:lstStyle/>
+          <a:p>
+            <a:pPr algn="ctr"/>
+          </a:p>
+        </p:txBody>
+      </p:sp>
+      <p:sp>
+        <p:nvSpPr>
+          <p:cNvPr id="27" name="TextBox 26"/>
+          <p:cNvSpPr txBox="1"/>
+          <p:nvPr/>
+        </p:nvSpPr>
+        <p:spPr>
+          <a:xfrm>
+            <a:off x="10088575" y="4745736"/>
+            <a:ext cx="1371600" cy="292608"/>
+          </a:xfrm>
+          <a:prstGeom prst="rect">
+            <a:avLst/>
+          </a:prstGeom>
+          <a:noFill/>
+        </p:spPr>
+        <p:txBody>
+          <a:bodyPr wrap="square" anchor="ctr"/>
+          <a:lstStyle/>
+          <a:p>
+            <a:pPr algn="ctr">
+              <a:lnSpc>
+                <a:spcPct val="110000"/>
+              </a:lnSpc>
+            </a:pPr>
+            <a:r>
+              <a:rPr sz="1200" b="1">
+                <a:solidFill>
+                  <a:srgbClr val="13294B"/>
+                </a:solidFill>
+                <a:latin typeface="맑은 고딕"/>
+                <a:ea typeface="맑은 고딕"/>
+                <a:cs typeface="맑은 고딕"/>
+              </a:rPr>
+              <a:t>실습</a:t>
+            </a:r>
+          </a:p>
+        </p:txBody>
+      </p:sp>
+      <p:sp>
+        <p:nvSpPr>
+          <p:cNvPr id="28" name="Rectangle 27"/>
+          <p:cNvSpPr/>
+          <p:nvPr/>
+        </p:nvSpPr>
+        <p:spPr>
+          <a:xfrm>
+            <a:off x="548640" y="5248655"/>
+            <a:ext cx="11094415" cy="13716"/>
+          </a:xfrm>
+          <a:prstGeom prst="rect">
+            <a:avLst/>
+          </a:prstGeom>
+          <a:solidFill>
+            <a:srgbClr val="D3D9E1"/>
+          </a:solidFill>
+          <a:ln>
+            <a:noFill/>
+          </a:ln>
+        </p:spPr>
+        <p:txBody>
+          <a:bodyPr rtlCol="0" anchor="ctr"/>
+          <a:lstStyle/>
+          <a:p>
+            <a:pPr algn="ctr"/>
+          </a:p>
+        </p:txBody>
+      </p:sp>
+      <p:sp>
+        <p:nvSpPr>
+          <p:cNvPr id="29" name="TextBox 28"/>
+          <p:cNvSpPr txBox="1"/>
+          <p:nvPr/>
+        </p:nvSpPr>
+        <p:spPr>
+          <a:xfrm>
+            <a:off x="548640" y="5257800"/>
+            <a:ext cx="822960" cy="731520"/>
+          </a:xfrm>
+          <a:prstGeom prst="rect">
+            <a:avLst/>
+          </a:prstGeom>
+          <a:noFill/>
+        </p:spPr>
+        <p:txBody>
+          <a:bodyPr wrap="square" anchor="ctr"/>
+          <a:lstStyle/>
+          <a:p>
+            <a:pPr algn="l">
+              <a:lnSpc>
+                <a:spcPct val="110000"/>
+              </a:lnSpc>
+            </a:pPr>
+            <a:r>
+              <a:rPr sz="2200" b="1">
+                <a:solidFill>
+                  <a:srgbClr val="1A6FC4"/>
+                </a:solidFill>
+                <a:latin typeface="맑은 고딕"/>
+                <a:ea typeface="맑은 고딕"/>
+                <a:cs typeface="맑은 고딕"/>
+              </a:rPr>
+              <a:t>06</a:t>
+            </a:r>
+          </a:p>
+        </p:txBody>
+      </p:sp>
+      <p:sp>
+        <p:nvSpPr>
+          <p:cNvPr id="30" name="TextBox 29"/>
+          <p:cNvSpPr txBox="1"/>
+          <p:nvPr/>
+        </p:nvSpPr>
+        <p:spPr>
+          <a:xfrm>
+            <a:off x="1417319" y="5257800"/>
+            <a:ext cx="8488375" cy="731520"/>
+          </a:xfrm>
+          <a:prstGeom prst="rect">
+            <a:avLst/>
+          </a:prstGeom>
+          <a:noFill/>
+        </p:spPr>
+        <p:txBody>
+          <a:bodyPr wrap="square" anchor="ctr"/>
+          <a:lstStyle/>
+          <a:p>
+            <a:pPr algn="l">
+              <a:lnSpc>
+                <a:spcPct val="110000"/>
+              </a:lnSpc>
+            </a:pPr>
+            <a:r>
+              <a:rPr sz="1900" b="1">
+                <a:solidFill>
+                  <a:srgbClr val="13294B"/>
+                </a:solidFill>
+                <a:latin typeface="맑은 고딕"/>
+                <a:ea typeface="맑은 고딕"/>
+                <a:cs typeface="맑은 고딕"/>
+              </a:rPr>
+              <a:t>품질 불량 접수의 후속 업무 연결</a:t>
+            </a:r>
+          </a:p>
+        </p:txBody>
+      </p:sp>
+      <p:sp>
+        <p:nvSpPr>
+          <p:cNvPr id="31" name="Rounded Rectangle 30"/>
+          <p:cNvSpPr/>
+          <p:nvPr/>
+        </p:nvSpPr>
+        <p:spPr>
+          <a:xfrm>
+            <a:off x="10088575" y="5477256"/>
+            <a:ext cx="1371600" cy="292608"/>
+          </a:xfrm>
+          <a:prstGeom prst="roundRect">
+            <a:avLst>
+              <a:gd name="adj" fmla="val 50000"/>
+            </a:avLst>
+          </a:prstGeom>
+          <a:solidFill>
+            <a:srgbClr val="D3D9E1"/>
+          </a:solidFill>
+          <a:ln>
+            <a:noFill/>
+          </a:ln>
+        </p:spPr>
+        <p:txBody>
+          <a:bodyPr rtlCol="0" anchor="ctr"/>
+          <a:lstStyle/>
+          <a:p>
+            <a:pPr algn="ctr"/>
+          </a:p>
+        </p:txBody>
+      </p:sp>
+      <p:sp>
+        <p:nvSpPr>
+          <p:cNvPr id="32" name="TextBox 31"/>
+          <p:cNvSpPr txBox="1"/>
+          <p:nvPr/>
+        </p:nvSpPr>
+        <p:spPr>
+          <a:xfrm>
+            <a:off x="10088575" y="5477256"/>
+            <a:ext cx="1371600" cy="292608"/>
+          </a:xfrm>
+          <a:prstGeom prst="rect">
+            <a:avLst/>
+          </a:prstGeom>
+          <a:noFill/>
+        </p:spPr>
+        <p:txBody>
+          <a:bodyPr wrap="square" anchor="ctr"/>
+          <a:lstStyle/>
+          <a:p>
+            <a:pPr algn="ctr">
+              <a:lnSpc>
+                <a:spcPct val="110000"/>
+              </a:lnSpc>
+            </a:pPr>
+            <a:r>
+              <a:rPr sz="1200" b="1">
+                <a:solidFill>
+                  <a:srgbClr val="13294B"/>
+                </a:solidFill>
+                <a:latin typeface="맑은 고딕"/>
+                <a:ea typeface="맑은 고딕"/>
+                <a:cs typeface="맑은 고딕"/>
+              </a:rPr>
+              <a:t>실습</a:t>
+            </a:r>
+          </a:p>
+        </p:txBody>
+      </p:sp>
+      <p:sp>
+        <p:nvSpPr>
+          <p:cNvPr id="33" name="TextBox 32"/>
           <p:cNvSpPr txBox="1"/>
           <p:nvPr/>
         </p:nvSpPr>
@@ -22438,6 +23929,248 @@
 </file>
 
 <file path=ppt/slides/slide30.xml><?xml version="1.0" encoding="utf-8"?>
+<p:sld xmlns:a="http://schemas.openxmlformats.org/drawingml/2006/main" xmlns:p="http://schemas.openxmlformats.org/presentationml/2006/main" xmlns:r="http://schemas.openxmlformats.org/officeDocument/2006/relationships">
+  <p:cSld>
+    <p:bg>
+      <p:bgPr>
+        <a:solidFill>
+          <a:srgbClr val="E7F3FD"/>
+        </a:solidFill>
+        <a:effectLst/>
+      </p:bgPr>
+    </p:bg>
+    <p:spTree>
+      <p:nvGrpSpPr>
+        <p:cNvPr id="1" name=""/>
+        <p:cNvGrpSpPr/>
+        <p:nvPr/>
+      </p:nvGrpSpPr>
+      <p:grpSpPr/>
+      <p:sp>
+        <p:nvSpPr>
+          <p:cNvPr id="2" name="TextBox 1"/>
+          <p:cNvSpPr txBox="1"/>
+          <p:nvPr/>
+        </p:nvSpPr>
+        <p:spPr>
+          <a:xfrm>
+            <a:off x="457200" y="384048"/>
+            <a:ext cx="8229600" cy="457200"/>
+          </a:xfrm>
+          <a:prstGeom prst="rect">
+            <a:avLst/>
+          </a:prstGeom>
+          <a:noFill/>
+        </p:spPr>
+        <p:txBody>
+          <a:bodyPr wrap="square" anchor="t"/>
+          <a:lstStyle/>
+          <a:p>
+            <a:pPr algn="l">
+              <a:lnSpc>
+                <a:spcPct val="110000"/>
+              </a:lnSpc>
+            </a:pPr>
+            <a:r>
+              <a:rPr sz="2000" b="1">
+                <a:solidFill>
+                  <a:srgbClr val="5CB8F2"/>
+                </a:solidFill>
+                <a:latin typeface="맑은 고딕"/>
+                <a:ea typeface="맑은 고딕"/>
+                <a:cs typeface="맑은 고딕"/>
+              </a:rPr>
+              <a:t>경남대학교 피지컬AI 사관학교</a:t>
+            </a:r>
+          </a:p>
+        </p:txBody>
+      </p:sp>
+      <p:sp>
+        <p:nvSpPr>
+          <p:cNvPr id="3" name="Rectangle 2"/>
+          <p:cNvSpPr/>
+          <p:nvPr/>
+        </p:nvSpPr>
+        <p:spPr>
+          <a:xfrm>
+            <a:off x="548640" y="859536"/>
+            <a:ext cx="3606800" cy="41148"/>
+          </a:xfrm>
+          <a:prstGeom prst="rect">
+            <a:avLst/>
+          </a:prstGeom>
+          <a:solidFill>
+            <a:srgbClr val="5CB8F2"/>
+          </a:solidFill>
+          <a:ln>
+            <a:noFill/>
+          </a:ln>
+        </p:spPr>
+        <p:txBody>
+          <a:bodyPr rtlCol="0" anchor="ctr"/>
+          <a:lstStyle/>
+          <a:p>
+            <a:pPr algn="ctr"/>
+          </a:p>
+        </p:txBody>
+      </p:sp>
+      <p:sp>
+        <p:nvSpPr>
+          <p:cNvPr id="4" name="TextBox 3"/>
+          <p:cNvSpPr txBox="1"/>
+          <p:nvPr/>
+        </p:nvSpPr>
+        <p:spPr>
+          <a:xfrm>
+            <a:off x="731520" y="2011680"/>
+            <a:ext cx="10911535" cy="2011680"/>
+          </a:xfrm>
+          <a:prstGeom prst="rect">
+            <a:avLst/>
+          </a:prstGeom>
+          <a:noFill/>
+        </p:spPr>
+        <p:txBody>
+          <a:bodyPr wrap="square" anchor="ctr"/>
+          <a:lstStyle/>
+          <a:p>
+            <a:pPr algn="l">
+              <a:lnSpc>
+                <a:spcPct val="110000"/>
+              </a:lnSpc>
+            </a:pPr>
+            <a:r>
+              <a:rPr sz="3400" b="1">
+                <a:solidFill>
+                  <a:srgbClr val="13294B"/>
+                </a:solidFill>
+                <a:latin typeface="맑은 고딕"/>
+                <a:ea typeface="맑은 고딕"/>
+                <a:cs typeface="맑은 고딕"/>
+              </a:rPr>
+              <a:t>실습: 나의 첫 업무 에이전트 구성하기</a:t>
+            </a:r>
+          </a:p>
+        </p:txBody>
+      </p:sp>
+      <p:sp>
+        <p:nvSpPr>
+          <p:cNvPr id="5" name="Rounded Rectangle 4"/>
+          <p:cNvSpPr/>
+          <p:nvPr/>
+        </p:nvSpPr>
+        <p:spPr>
+          <a:xfrm>
+            <a:off x="822960" y="4160520"/>
+            <a:ext cx="822960" cy="347472"/>
+          </a:xfrm>
+          <a:prstGeom prst="roundRect">
+            <a:avLst>
+              <a:gd name="adj" fmla="val 50000"/>
+            </a:avLst>
+          </a:prstGeom>
+          <a:solidFill>
+            <a:srgbClr val="5CB8F2"/>
+          </a:solidFill>
+          <a:ln>
+            <a:noFill/>
+          </a:ln>
+        </p:spPr>
+        <p:txBody>
+          <a:bodyPr rtlCol="0" anchor="ctr"/>
+          <a:lstStyle/>
+          <a:p>
+            <a:pPr algn="ctr"/>
+          </a:p>
+        </p:txBody>
+      </p:sp>
+      <p:sp>
+        <p:nvSpPr>
+          <p:cNvPr id="6" name="TextBox 5"/>
+          <p:cNvSpPr txBox="1"/>
+          <p:nvPr/>
+        </p:nvSpPr>
+        <p:spPr>
+          <a:xfrm>
+            <a:off x="822960" y="4160520"/>
+            <a:ext cx="822960" cy="347472"/>
+          </a:xfrm>
+          <a:prstGeom prst="rect">
+            <a:avLst/>
+          </a:prstGeom>
+          <a:noFill/>
+        </p:spPr>
+        <p:txBody>
+          <a:bodyPr wrap="square" anchor="ctr"/>
+          <a:lstStyle/>
+          <a:p>
+            <a:pPr algn="ctr">
+              <a:lnSpc>
+                <a:spcPct val="110000"/>
+              </a:lnSpc>
+            </a:pPr>
+            <a:r>
+              <a:rPr sz="1300" b="1">
+                <a:solidFill>
+                  <a:srgbClr val="13294B"/>
+                </a:solidFill>
+                <a:latin typeface="맑은 고딕"/>
+                <a:ea typeface="맑은 고딕"/>
+                <a:cs typeface="맑은 고딕"/>
+              </a:rPr>
+              <a:t>실습</a:t>
+            </a:r>
+          </a:p>
+        </p:txBody>
+      </p:sp>
+      <p:sp>
+        <p:nvSpPr>
+          <p:cNvPr id="7" name="TextBox 6"/>
+          <p:cNvSpPr txBox="1"/>
+          <p:nvPr/>
+        </p:nvSpPr>
+        <p:spPr>
+          <a:xfrm>
+            <a:off x="731520" y="4617720"/>
+            <a:ext cx="10911535" cy="457200"/>
+          </a:xfrm>
+          <a:prstGeom prst="rect">
+            <a:avLst/>
+          </a:prstGeom>
+          <a:noFill/>
+        </p:spPr>
+        <p:txBody>
+          <a:bodyPr wrap="square" anchor="t"/>
+          <a:lstStyle/>
+          <a:p>
+            <a:pPr algn="l">
+              <a:lnSpc>
+                <a:spcPct val="110000"/>
+              </a:lnSpc>
+            </a:pPr>
+            <a:r>
+              <a:rPr sz="1700" b="0">
+                <a:solidFill>
+                  <a:srgbClr val="556175"/>
+                </a:solidFill>
+                <a:latin typeface="맑은 고딕"/>
+                <a:ea typeface="맑은 고딕"/>
+                <a:cs typeface="맑은 고딕"/>
+              </a:rPr>
+              <a:t>HYD 포털에서 에이전트의 이름, 목표, 역할, 사용 도구를 정하고 직접 질문한다</a:t>
+            </a:r>
+          </a:p>
+        </p:txBody>
+      </p:sp>
+    </p:spTree>
+  </p:cSld>
+  <p:clrMapOvr>
+    <a:masterClrMapping/>
+  </p:clrMapOvr>
+</p:sld>
+</file>
+
+<file path=ppt/slides/slide31.xml><?xml version="1.0" encoding="utf-8"?>
 <p:sld xmlns:a="http://schemas.openxmlformats.org/drawingml/2006/main" xmlns:p="http://schemas.openxmlformats.org/presentationml/2006/main" xmlns:r="http://schemas.openxmlformats.org/officeDocument/2006/relationships">
   <p:cSld>
     <p:bg>
@@ -22596,7 +24329,7 @@
                 <a:ea typeface="맑은 고딕"/>
                 <a:cs typeface="맑은 고딕"/>
               </a:rPr>
-              <a:t>30</a:t>
+              <a:t>31</a:t>
             </a:r>
           </a:p>
         </p:txBody>
@@ -23308,7 +25041,7 @@
 </p:sld>
 </file>
 
-<file path=ppt/slides/slide31.xml><?xml version="1.0" encoding="utf-8"?>
+<file path=ppt/slides/slide32.xml><?xml version="1.0" encoding="utf-8"?>
 <p:sld xmlns:a="http://schemas.openxmlformats.org/drawingml/2006/main" xmlns:p="http://schemas.openxmlformats.org/presentationml/2006/main" xmlns:r="http://schemas.openxmlformats.org/officeDocument/2006/relationships">
   <p:cSld>
     <p:bg>
@@ -23550,7 +25283,7 @@
 </p:sld>
 </file>
 
-<file path=ppt/slides/slide32.xml><?xml version="1.0" encoding="utf-8"?>
+<file path=ppt/slides/slide33.xml><?xml version="1.0" encoding="utf-8"?>
 <p:sld xmlns:a="http://schemas.openxmlformats.org/drawingml/2006/main" xmlns:p="http://schemas.openxmlformats.org/presentationml/2006/main" xmlns:r="http://schemas.openxmlformats.org/officeDocument/2006/relationships">
   <p:cSld>
     <p:bg>
@@ -23709,7 +25442,7 @@
                 <a:ea typeface="맑은 고딕"/>
                 <a:cs typeface="맑은 고딕"/>
               </a:rPr>
-              <a:t>32</a:t>
+              <a:t>33</a:t>
             </a:r>
           </a:p>
         </p:txBody>
@@ -24525,7 +26258,7 @@
 </p:sld>
 </file>
 
-<file path=ppt/slides/slide33.xml><?xml version="1.0" encoding="utf-8"?>
+<file path=ppt/slides/slide34.xml><?xml version="1.0" encoding="utf-8"?>
 <p:sld xmlns:a="http://schemas.openxmlformats.org/drawingml/2006/main" xmlns:p="http://schemas.openxmlformats.org/presentationml/2006/main" xmlns:r="http://schemas.openxmlformats.org/officeDocument/2006/relationships">
   <p:cSld>
     <p:bg>
@@ -24767,7 +26500,7 @@
 </p:sld>
 </file>
 
-<file path=ppt/slides/slide34.xml><?xml version="1.0" encoding="utf-8"?>
+<file path=ppt/slides/slide35.xml><?xml version="1.0" encoding="utf-8"?>
 <p:sld xmlns:a="http://schemas.openxmlformats.org/drawingml/2006/main" xmlns:p="http://schemas.openxmlformats.org/presentationml/2006/main" xmlns:r="http://schemas.openxmlformats.org/officeDocument/2006/relationships">
   <p:cSld>
     <p:bg>
@@ -24926,7 +26659,7 @@
                 <a:ea typeface="맑은 고딕"/>
                 <a:cs typeface="맑은 고딕"/>
               </a:rPr>
-              <a:t>34</a:t>
+              <a:t>35</a:t>
             </a:r>
           </a:p>
         </p:txBody>
@@ -25784,7 +27517,7 @@
 </p:sld>
 </file>
 
-<file path=ppt/slides/slide35.xml><?xml version="1.0" encoding="utf-8"?>
+<file path=ppt/slides/slide36.xml><?xml version="1.0" encoding="utf-8"?>
 <p:sld xmlns:a="http://schemas.openxmlformats.org/drawingml/2006/main" xmlns:p="http://schemas.openxmlformats.org/presentationml/2006/main" xmlns:r="http://schemas.openxmlformats.org/officeDocument/2006/relationships">
   <p:cSld>
     <p:bg>
@@ -26014,1054 +27747,6 @@
                 <a:cs typeface="맑은 고딕"/>
               </a:rPr>
               <a:t>불량 접수 메시지를 분류해 구조화된 품질 대응 카드를 내는 작은 에이전트를 만든다</a:t>
-            </a:r>
-          </a:p>
-        </p:txBody>
-      </p:sp>
-    </p:spTree>
-  </p:cSld>
-  <p:clrMapOvr>
-    <a:masterClrMapping/>
-  </p:clrMapOvr>
-</p:sld>
-</file>
-
-<file path=ppt/slides/slide36.xml><?xml version="1.0" encoding="utf-8"?>
-<p:sld xmlns:a="http://schemas.openxmlformats.org/drawingml/2006/main" xmlns:p="http://schemas.openxmlformats.org/presentationml/2006/main" xmlns:r="http://schemas.openxmlformats.org/officeDocument/2006/relationships">
-  <p:cSld>
-    <p:bg>
-      <p:bgPr>
-        <a:solidFill>
-          <a:srgbClr val="FFFFFF"/>
-        </a:solidFill>
-        <a:effectLst/>
-      </p:bgPr>
-    </p:bg>
-    <p:spTree>
-      <p:nvGrpSpPr>
-        <p:cNvPr id="1" name=""/>
-        <p:cNvGrpSpPr/>
-        <p:nvPr/>
-      </p:nvGrpSpPr>
-      <p:grpSpPr/>
-      <p:sp>
-        <p:nvSpPr>
-          <p:cNvPr id="2" name="TextBox 1"/>
-          <p:cNvSpPr txBox="1"/>
-          <p:nvPr/>
-        </p:nvSpPr>
-        <p:spPr>
-          <a:xfrm>
-            <a:off x="457200" y="329184"/>
-            <a:ext cx="11277295" cy="603504"/>
-          </a:xfrm>
-          <a:prstGeom prst="rect">
-            <a:avLst/>
-          </a:prstGeom>
-          <a:noFill/>
-        </p:spPr>
-        <p:txBody>
-          <a:bodyPr wrap="square" anchor="ctr"/>
-          <a:lstStyle/>
-          <a:p>
-            <a:pPr algn="l">
-              <a:lnSpc>
-                <a:spcPct val="110000"/>
-              </a:lnSpc>
-            </a:pPr>
-            <a:r>
-              <a:rPr sz="2800" b="1">
-                <a:solidFill>
-                  <a:srgbClr val="13294B"/>
-                </a:solidFill>
-                <a:latin typeface="맑은 고딕"/>
-                <a:ea typeface="맑은 고딕"/>
-                <a:cs typeface="맑은 고딕"/>
-              </a:rPr>
-              <a:t>실습에서 만드는 출력과 갈라지는 경우</a:t>
-            </a:r>
-          </a:p>
-        </p:txBody>
-      </p:sp>
-      <p:sp>
-        <p:nvSpPr>
-          <p:cNvPr id="3" name="TextBox 2"/>
-          <p:cNvSpPr txBox="1"/>
-          <p:nvPr/>
-        </p:nvSpPr>
-        <p:spPr>
-          <a:xfrm>
-            <a:off x="457200" y="932688"/>
-            <a:ext cx="11277295" cy="420624"/>
-          </a:xfrm>
-          <a:prstGeom prst="rect">
-            <a:avLst/>
-          </a:prstGeom>
-          <a:noFill/>
-        </p:spPr>
-        <p:txBody>
-          <a:bodyPr wrap="square" anchor="ctr"/>
-          <a:lstStyle/>
-          <a:p>
-            <a:pPr algn="l">
-              <a:lnSpc>
-                <a:spcPct val="110000"/>
-              </a:lnSpc>
-            </a:pPr>
-            <a:r>
-              <a:rPr sz="1600" b="0">
-                <a:solidFill>
-                  <a:srgbClr val="556175"/>
-                </a:solidFill>
-                <a:latin typeface="맑은 고딕"/>
-                <a:ea typeface="맑은 고딕"/>
-                <a:cs typeface="맑은 고딕"/>
-              </a:rPr>
-              <a:t>이 실습을 마치면 불량 접수 한 건이 품질 유형, 확인 항목, 담당 부서, 대응 초안을 갖춘 품질 대응 카드로 바뀐다.</a:t>
-            </a:r>
-          </a:p>
-        </p:txBody>
-      </p:sp>
-      <p:sp>
-        <p:nvSpPr>
-          <p:cNvPr id="4" name="Rectangle 3"/>
-          <p:cNvSpPr/>
-          <p:nvPr/>
-        </p:nvSpPr>
-        <p:spPr>
-          <a:xfrm>
-            <a:off x="548640" y="1408176"/>
-            <a:ext cx="11094415" cy="18288"/>
-          </a:xfrm>
-          <a:prstGeom prst="rect">
-            <a:avLst/>
-          </a:prstGeom>
-          <a:solidFill>
-            <a:srgbClr val="D3D9E1"/>
-          </a:solidFill>
-          <a:ln>
-            <a:noFill/>
-          </a:ln>
-        </p:spPr>
-        <p:txBody>
-          <a:bodyPr rtlCol="0" anchor="ctr"/>
-          <a:lstStyle/>
-          <a:p>
-            <a:pPr algn="ctr"/>
-          </a:p>
-        </p:txBody>
-      </p:sp>
-      <p:sp>
-        <p:nvSpPr>
-          <p:cNvPr id="5" name="TextBox 4"/>
-          <p:cNvSpPr txBox="1"/>
-          <p:nvPr/>
-        </p:nvSpPr>
-        <p:spPr>
-          <a:xfrm>
-            <a:off x="10911535" y="6473952"/>
-            <a:ext cx="822960" cy="274320"/>
-          </a:xfrm>
-          <a:prstGeom prst="rect">
-            <a:avLst/>
-          </a:prstGeom>
-          <a:noFill/>
-        </p:spPr>
-        <p:txBody>
-          <a:bodyPr wrap="square" anchor="t"/>
-          <a:lstStyle/>
-          <a:p>
-            <a:pPr algn="r">
-              <a:lnSpc>
-                <a:spcPct val="110000"/>
-              </a:lnSpc>
-            </a:pPr>
-            <a:r>
-              <a:rPr sz="1000" b="0">
-                <a:solidFill>
-                  <a:srgbClr val="556175"/>
-                </a:solidFill>
-                <a:latin typeface="맑은 고딕"/>
-                <a:ea typeface="맑은 고딕"/>
-                <a:cs typeface="맑은 고딕"/>
-              </a:rPr>
-              <a:t>36</a:t>
-            </a:r>
-          </a:p>
-        </p:txBody>
-      </p:sp>
-      <p:sp>
-        <p:nvSpPr>
-          <p:cNvPr id="6" name="Rounded Rectangle 5"/>
-          <p:cNvSpPr/>
-          <p:nvPr/>
-        </p:nvSpPr>
-        <p:spPr>
-          <a:xfrm>
-            <a:off x="548640" y="2488311"/>
-            <a:ext cx="2567863" cy="3006089"/>
-          </a:xfrm>
-          <a:prstGeom prst="roundRect">
-            <a:avLst>
-              <a:gd name="adj" fmla="val 4000"/>
-            </a:avLst>
-          </a:prstGeom>
-          <a:solidFill>
-            <a:srgbClr val="FFFFFF"/>
-          </a:solidFill>
-          <a:ln w="15875">
-            <a:solidFill>
-              <a:srgbClr val="D3D9E1"/>
-            </a:solidFill>
-          </a:ln>
-        </p:spPr>
-        <p:txBody>
-          <a:bodyPr rtlCol="0" anchor="ctr"/>
-          <a:lstStyle/>
-          <a:p>
-            <a:pPr algn="ctr"/>
-          </a:p>
-        </p:txBody>
-      </p:sp>
-      <p:sp>
-        <p:nvSpPr>
-          <p:cNvPr id="7" name="Oval 6"/>
-          <p:cNvSpPr/>
-          <p:nvPr/>
-        </p:nvSpPr>
-        <p:spPr>
-          <a:xfrm>
-            <a:off x="777240" y="2689479"/>
-            <a:ext cx="731520" cy="731520"/>
-          </a:xfrm>
-          <a:prstGeom prst="ellipse">
-            <a:avLst/>
-          </a:prstGeom>
-          <a:solidFill>
-            <a:srgbClr val="E7F3FD"/>
-          </a:solidFill>
-          <a:ln>
-            <a:noFill/>
-          </a:ln>
-        </p:spPr>
-        <p:txBody>
-          <a:bodyPr rtlCol="0" anchor="ctr"/>
-          <a:lstStyle/>
-          <a:p>
-            <a:pPr algn="ctr"/>
-          </a:p>
-        </p:txBody>
-      </p:sp>
-      <p:pic>
-        <p:nvPicPr>
-          <p:cNvPr id="8" name="아이콘:category" descr="category_13294B_1.6.png"/>
-          <p:cNvPicPr>
-            <a:picLocks noChangeAspect="1"/>
-          </p:cNvPicPr>
-          <p:nvPr/>
-        </p:nvPicPr>
-        <p:blipFill>
-          <a:blip r:embed="rId3"/>
-          <a:stretch>
-            <a:fillRect/>
-          </a:stretch>
-        </p:blipFill>
-        <p:spPr>
-          <a:xfrm>
-            <a:off x="930859" y="2843098"/>
-            <a:ext cx="424281" cy="424281"/>
-          </a:xfrm>
-          <a:prstGeom prst="rect">
-            <a:avLst/>
-          </a:prstGeom>
-        </p:spPr>
-      </p:pic>
-      <p:sp>
-        <p:nvSpPr>
-          <p:cNvPr id="9" name="TextBox 8"/>
-          <p:cNvSpPr txBox="1"/>
-          <p:nvPr/>
-        </p:nvSpPr>
-        <p:spPr>
-          <a:xfrm>
-            <a:off x="713232" y="3512439"/>
-            <a:ext cx="2238679" cy="1479041"/>
-          </a:xfrm>
-          <a:prstGeom prst="rect">
-            <a:avLst/>
-          </a:prstGeom>
-          <a:noFill/>
-        </p:spPr>
-        <p:txBody>
-          <a:bodyPr wrap="square" anchor="t"/>
-          <a:lstStyle/>
-          <a:p>
-            <a:pPr algn="l">
-              <a:lnSpc>
-                <a:spcPct val="110000"/>
-              </a:lnSpc>
-              <a:spcAft>
-                <a:spcPts val="400"/>
-              </a:spcAft>
-            </a:pPr>
-            <a:r>
-              <a:rPr sz="1800" b="1">
-                <a:solidFill>
-                  <a:srgbClr val="13294B"/>
-                </a:solidFill>
-                <a:latin typeface="맑은 고딕"/>
-                <a:ea typeface="맑은 고딕"/>
-                <a:cs typeface="맑은 고딕"/>
-              </a:rPr>
-              <a:t>품질 유형</a:t>
-            </a:r>
-          </a:p>
-          <a:p>
-            <a:pPr algn="l">
-              <a:lnSpc>
-                <a:spcPct val="110000"/>
-              </a:lnSpc>
-              <a:spcAft>
-                <a:spcPts val="400"/>
-              </a:spcAft>
-            </a:pPr>
-            <a:r>
-              <a:rPr sz="1350" b="0">
-                <a:solidFill>
-                  <a:srgbClr val="1F2A3A"/>
-                </a:solidFill>
-                <a:latin typeface="맑은 고딕"/>
-                <a:ea typeface="맑은 고딕"/>
-                <a:cs typeface="맑은 고딕"/>
-              </a:rPr>
-              <a:t>제공된 분류 기준으로 접수 내용의 유형을 정한다</a:t>
-            </a:r>
-          </a:p>
-        </p:txBody>
-      </p:sp>
-      <p:sp>
-        <p:nvSpPr>
-          <p:cNvPr id="10" name="Rounded Rectangle 9"/>
-          <p:cNvSpPr/>
-          <p:nvPr/>
-        </p:nvSpPr>
-        <p:spPr>
-          <a:xfrm>
-            <a:off x="777240" y="5064633"/>
-            <a:ext cx="822960" cy="292608"/>
-          </a:xfrm>
-          <a:prstGeom prst="roundRect">
-            <a:avLst>
-              <a:gd name="adj" fmla="val 50000"/>
-            </a:avLst>
-          </a:prstGeom>
-          <a:solidFill>
-            <a:srgbClr val="D3D9E1"/>
-          </a:solidFill>
-          <a:ln>
-            <a:noFill/>
-          </a:ln>
-        </p:spPr>
-        <p:txBody>
-          <a:bodyPr rtlCol="0" anchor="ctr"/>
-          <a:lstStyle/>
-          <a:p>
-            <a:pPr algn="ctr"/>
-          </a:p>
-        </p:txBody>
-      </p:sp>
-      <p:sp>
-        <p:nvSpPr>
-          <p:cNvPr id="11" name="TextBox 10"/>
-          <p:cNvSpPr txBox="1"/>
-          <p:nvPr/>
-        </p:nvSpPr>
-        <p:spPr>
-          <a:xfrm>
-            <a:off x="777240" y="5064633"/>
-            <a:ext cx="822960" cy="292608"/>
-          </a:xfrm>
-          <a:prstGeom prst="rect">
-            <a:avLst/>
-          </a:prstGeom>
-          <a:noFill/>
-        </p:spPr>
-        <p:txBody>
-          <a:bodyPr wrap="square" anchor="ctr"/>
-          <a:lstStyle/>
-          <a:p>
-            <a:pPr algn="ctr">
-              <a:lnSpc>
-                <a:spcPct val="110000"/>
-              </a:lnSpc>
-            </a:pPr>
-            <a:r>
-              <a:rPr sz="1200" b="1">
-                <a:solidFill>
-                  <a:srgbClr val="13294B"/>
-                </a:solidFill>
-                <a:latin typeface="맑은 고딕"/>
-                <a:ea typeface="맑은 고딕"/>
-                <a:cs typeface="맑은 고딕"/>
-              </a:rPr>
-              <a:t>분류</a:t>
-            </a:r>
-          </a:p>
-        </p:txBody>
-      </p:sp>
-      <p:sp>
-        <p:nvSpPr>
-          <p:cNvPr id="12" name="Rounded Rectangle 11"/>
-          <p:cNvSpPr/>
-          <p:nvPr/>
-        </p:nvSpPr>
-        <p:spPr>
-          <a:xfrm>
-            <a:off x="3390823" y="2488311"/>
-            <a:ext cx="2567863" cy="3006089"/>
-          </a:xfrm>
-          <a:prstGeom prst="roundRect">
-            <a:avLst>
-              <a:gd name="adj" fmla="val 4000"/>
-            </a:avLst>
-          </a:prstGeom>
-          <a:solidFill>
-            <a:srgbClr val="FFFFFF"/>
-          </a:solidFill>
-          <a:ln w="15875">
-            <a:solidFill>
-              <a:srgbClr val="D3D9E1"/>
-            </a:solidFill>
-          </a:ln>
-        </p:spPr>
-        <p:txBody>
-          <a:bodyPr rtlCol="0" anchor="ctr"/>
-          <a:lstStyle/>
-          <a:p>
-            <a:pPr algn="ctr"/>
-          </a:p>
-        </p:txBody>
-      </p:sp>
-      <p:sp>
-        <p:nvSpPr>
-          <p:cNvPr id="13" name="Oval 12"/>
-          <p:cNvSpPr/>
-          <p:nvPr/>
-        </p:nvSpPr>
-        <p:spPr>
-          <a:xfrm>
-            <a:off x="3619423" y="2689479"/>
-            <a:ext cx="731520" cy="731520"/>
-          </a:xfrm>
-          <a:prstGeom prst="ellipse">
-            <a:avLst/>
-          </a:prstGeom>
-          <a:solidFill>
-            <a:srgbClr val="E7F3FD"/>
-          </a:solidFill>
-          <a:ln>
-            <a:noFill/>
-          </a:ln>
-        </p:spPr>
-        <p:txBody>
-          <a:bodyPr rtlCol="0" anchor="ctr"/>
-          <a:lstStyle/>
-          <a:p>
-            <a:pPr algn="ctr"/>
-          </a:p>
-        </p:txBody>
-      </p:sp>
-      <p:pic>
-        <p:nvPicPr>
-          <p:cNvPr id="14" name="아이콘:list-check" descr="list-check_13294B_1.6.png"/>
-          <p:cNvPicPr>
-            <a:picLocks noChangeAspect="1"/>
-          </p:cNvPicPr>
-          <p:nvPr/>
-        </p:nvPicPr>
-        <p:blipFill>
-          <a:blip r:embed="rId4"/>
-          <a:stretch>
-            <a:fillRect/>
-          </a:stretch>
-        </p:blipFill>
-        <p:spPr>
-          <a:xfrm>
-            <a:off x="3773043" y="2843098"/>
-            <a:ext cx="424281" cy="424281"/>
-          </a:xfrm>
-          <a:prstGeom prst="rect">
-            <a:avLst/>
-          </a:prstGeom>
-        </p:spPr>
-      </p:pic>
-      <p:sp>
-        <p:nvSpPr>
-          <p:cNvPr id="15" name="TextBox 14"/>
-          <p:cNvSpPr txBox="1"/>
-          <p:nvPr/>
-        </p:nvSpPr>
-        <p:spPr>
-          <a:xfrm>
-            <a:off x="3555415" y="3512439"/>
-            <a:ext cx="2238679" cy="1479041"/>
-          </a:xfrm>
-          <a:prstGeom prst="rect">
-            <a:avLst/>
-          </a:prstGeom>
-          <a:noFill/>
-        </p:spPr>
-        <p:txBody>
-          <a:bodyPr wrap="square" anchor="t"/>
-          <a:lstStyle/>
-          <a:p>
-            <a:pPr algn="l">
-              <a:lnSpc>
-                <a:spcPct val="110000"/>
-              </a:lnSpc>
-              <a:spcAft>
-                <a:spcPts val="400"/>
-              </a:spcAft>
-            </a:pPr>
-            <a:r>
-              <a:rPr sz="1800" b="1">
-                <a:solidFill>
-                  <a:srgbClr val="13294B"/>
-                </a:solidFill>
-                <a:latin typeface="맑은 고딕"/>
-                <a:ea typeface="맑은 고딕"/>
-                <a:cs typeface="맑은 고딕"/>
-              </a:rPr>
-              <a:t>추가 확인 항목</a:t>
-            </a:r>
-          </a:p>
-          <a:p>
-            <a:pPr algn="l">
-              <a:lnSpc>
-                <a:spcPct val="110000"/>
-              </a:lnSpc>
-              <a:spcAft>
-                <a:spcPts val="400"/>
-              </a:spcAft>
-            </a:pPr>
-            <a:r>
-              <a:rPr sz="1350" b="0">
-                <a:solidFill>
-                  <a:srgbClr val="1F2A3A"/>
-                </a:solidFill>
-                <a:latin typeface="맑은 고딕"/>
-                <a:ea typeface="맑은 고딕"/>
-                <a:cs typeface="맑은 고딕"/>
-              </a:rPr>
-              <a:t>판단에 모자란 정보를 확인 항목으로 적는다</a:t>
-            </a:r>
-          </a:p>
-        </p:txBody>
-      </p:sp>
-      <p:sp>
-        <p:nvSpPr>
-          <p:cNvPr id="16" name="Rounded Rectangle 15"/>
-          <p:cNvSpPr/>
-          <p:nvPr/>
-        </p:nvSpPr>
-        <p:spPr>
-          <a:xfrm>
-            <a:off x="3619423" y="5064633"/>
-            <a:ext cx="822960" cy="292608"/>
-          </a:xfrm>
-          <a:prstGeom prst="roundRect">
-            <a:avLst>
-              <a:gd name="adj" fmla="val 50000"/>
-            </a:avLst>
-          </a:prstGeom>
-          <a:solidFill>
-            <a:srgbClr val="D3D9E1"/>
-          </a:solidFill>
-          <a:ln>
-            <a:noFill/>
-          </a:ln>
-        </p:spPr>
-        <p:txBody>
-          <a:bodyPr rtlCol="0" anchor="ctr"/>
-          <a:lstStyle/>
-          <a:p>
-            <a:pPr algn="ctr"/>
-          </a:p>
-        </p:txBody>
-      </p:sp>
-      <p:sp>
-        <p:nvSpPr>
-          <p:cNvPr id="17" name="TextBox 16"/>
-          <p:cNvSpPr txBox="1"/>
-          <p:nvPr/>
-        </p:nvSpPr>
-        <p:spPr>
-          <a:xfrm>
-            <a:off x="3619423" y="5064633"/>
-            <a:ext cx="822960" cy="292608"/>
-          </a:xfrm>
-          <a:prstGeom prst="rect">
-            <a:avLst/>
-          </a:prstGeom>
-          <a:noFill/>
-        </p:spPr>
-        <p:txBody>
-          <a:bodyPr wrap="square" anchor="ctr"/>
-          <a:lstStyle/>
-          <a:p>
-            <a:pPr algn="ctr">
-              <a:lnSpc>
-                <a:spcPct val="110000"/>
-              </a:lnSpc>
-            </a:pPr>
-            <a:r>
-              <a:rPr sz="1200" b="1">
-                <a:solidFill>
-                  <a:srgbClr val="13294B"/>
-                </a:solidFill>
-                <a:latin typeface="맑은 고딕"/>
-                <a:ea typeface="맑은 고딕"/>
-                <a:cs typeface="맑은 고딕"/>
-              </a:rPr>
-              <a:t>확인</a:t>
-            </a:r>
-          </a:p>
-        </p:txBody>
-      </p:sp>
-      <p:sp>
-        <p:nvSpPr>
-          <p:cNvPr id="18" name="Rounded Rectangle 17"/>
-          <p:cNvSpPr/>
-          <p:nvPr/>
-        </p:nvSpPr>
-        <p:spPr>
-          <a:xfrm>
-            <a:off x="6233007" y="2488311"/>
-            <a:ext cx="2567863" cy="3006089"/>
-          </a:xfrm>
-          <a:prstGeom prst="roundRect">
-            <a:avLst>
-              <a:gd name="adj" fmla="val 4000"/>
-            </a:avLst>
-          </a:prstGeom>
-          <a:solidFill>
-            <a:srgbClr val="FFFFFF"/>
-          </a:solidFill>
-          <a:ln w="15875">
-            <a:solidFill>
-              <a:srgbClr val="D3D9E1"/>
-            </a:solidFill>
-          </a:ln>
-        </p:spPr>
-        <p:txBody>
-          <a:bodyPr rtlCol="0" anchor="ctr"/>
-          <a:lstStyle/>
-          <a:p>
-            <a:pPr algn="ctr"/>
-          </a:p>
-        </p:txBody>
-      </p:sp>
-      <p:sp>
-        <p:nvSpPr>
-          <p:cNvPr id="19" name="Oval 18"/>
-          <p:cNvSpPr/>
-          <p:nvPr/>
-        </p:nvSpPr>
-        <p:spPr>
-          <a:xfrm>
-            <a:off x="6461607" y="2689479"/>
-            <a:ext cx="731520" cy="731520"/>
-          </a:xfrm>
-          <a:prstGeom prst="ellipse">
-            <a:avLst/>
-          </a:prstGeom>
-          <a:solidFill>
-            <a:srgbClr val="E7F3FD"/>
-          </a:solidFill>
-          <a:ln>
-            <a:noFill/>
-          </a:ln>
-        </p:spPr>
-        <p:txBody>
-          <a:bodyPr rtlCol="0" anchor="ctr"/>
-          <a:lstStyle/>
-          <a:p>
-            <a:pPr algn="ctr"/>
-          </a:p>
-        </p:txBody>
-      </p:sp>
-      <p:pic>
-        <p:nvPicPr>
-          <p:cNvPr id="20" name="아이콘:building-factory-2" descr="building-factory-2_13294B_1.6.png"/>
-          <p:cNvPicPr>
-            <a:picLocks noChangeAspect="1"/>
-          </p:cNvPicPr>
-          <p:nvPr/>
-        </p:nvPicPr>
-        <p:blipFill>
-          <a:blip r:embed="rId5"/>
-          <a:stretch>
-            <a:fillRect/>
-          </a:stretch>
-        </p:blipFill>
-        <p:spPr>
-          <a:xfrm>
-            <a:off x="6615226" y="2843098"/>
-            <a:ext cx="424281" cy="424281"/>
-          </a:xfrm>
-          <a:prstGeom prst="rect">
-            <a:avLst/>
-          </a:prstGeom>
-        </p:spPr>
-      </p:pic>
-      <p:sp>
-        <p:nvSpPr>
-          <p:cNvPr id="21" name="TextBox 20"/>
-          <p:cNvSpPr txBox="1"/>
-          <p:nvPr/>
-        </p:nvSpPr>
-        <p:spPr>
-          <a:xfrm>
-            <a:off x="6397599" y="3512439"/>
-            <a:ext cx="2238679" cy="1479041"/>
-          </a:xfrm>
-          <a:prstGeom prst="rect">
-            <a:avLst/>
-          </a:prstGeom>
-          <a:noFill/>
-        </p:spPr>
-        <p:txBody>
-          <a:bodyPr wrap="square" anchor="t"/>
-          <a:lstStyle/>
-          <a:p>
-            <a:pPr algn="l">
-              <a:lnSpc>
-                <a:spcPct val="110000"/>
-              </a:lnSpc>
-              <a:spcAft>
-                <a:spcPts val="400"/>
-              </a:spcAft>
-            </a:pPr>
-            <a:r>
-              <a:rPr sz="1800" b="1">
-                <a:solidFill>
-                  <a:srgbClr val="13294B"/>
-                </a:solidFill>
-                <a:latin typeface="맑은 고딕"/>
-                <a:ea typeface="맑은 고딕"/>
-                <a:cs typeface="맑은 고딕"/>
-              </a:rPr>
-              <a:t>담당 부서와 대응 초안</a:t>
-            </a:r>
-          </a:p>
-          <a:p>
-            <a:pPr algn="l">
-              <a:lnSpc>
-                <a:spcPct val="110000"/>
-              </a:lnSpc>
-              <a:spcAft>
-                <a:spcPts val="400"/>
-              </a:spcAft>
-            </a:pPr>
-            <a:r>
-              <a:rPr sz="1350" b="0">
-                <a:solidFill>
-                  <a:srgbClr val="1F2A3A"/>
-                </a:solidFill>
-                <a:latin typeface="맑은 고딕"/>
-                <a:ea typeface="맑은 고딕"/>
-                <a:cs typeface="맑은 고딕"/>
-              </a:rPr>
-              <a:t>넘길 부서를 정하고 대응 초안을 쓴다</a:t>
-            </a:r>
-          </a:p>
-        </p:txBody>
-      </p:sp>
-      <p:sp>
-        <p:nvSpPr>
-          <p:cNvPr id="22" name="Rounded Rectangle 21"/>
-          <p:cNvSpPr/>
-          <p:nvPr/>
-        </p:nvSpPr>
-        <p:spPr>
-          <a:xfrm>
-            <a:off x="6461607" y="5064633"/>
-            <a:ext cx="822960" cy="292608"/>
-          </a:xfrm>
-          <a:prstGeom prst="roundRect">
-            <a:avLst>
-              <a:gd name="adj" fmla="val 50000"/>
-            </a:avLst>
-          </a:prstGeom>
-          <a:solidFill>
-            <a:srgbClr val="D3D9E1"/>
-          </a:solidFill>
-          <a:ln>
-            <a:noFill/>
-          </a:ln>
-        </p:spPr>
-        <p:txBody>
-          <a:bodyPr rtlCol="0" anchor="ctr"/>
-          <a:lstStyle/>
-          <a:p>
-            <a:pPr algn="ctr"/>
-          </a:p>
-        </p:txBody>
-      </p:sp>
-      <p:sp>
-        <p:nvSpPr>
-          <p:cNvPr id="23" name="TextBox 22"/>
-          <p:cNvSpPr txBox="1"/>
-          <p:nvPr/>
-        </p:nvSpPr>
-        <p:spPr>
-          <a:xfrm>
-            <a:off x="6461607" y="5064633"/>
-            <a:ext cx="822960" cy="292608"/>
-          </a:xfrm>
-          <a:prstGeom prst="rect">
-            <a:avLst/>
-          </a:prstGeom>
-          <a:noFill/>
-        </p:spPr>
-        <p:txBody>
-          <a:bodyPr wrap="square" anchor="ctr"/>
-          <a:lstStyle/>
-          <a:p>
-            <a:pPr algn="ctr">
-              <a:lnSpc>
-                <a:spcPct val="110000"/>
-              </a:lnSpc>
-            </a:pPr>
-            <a:r>
-              <a:rPr sz="1200" b="1">
-                <a:solidFill>
-                  <a:srgbClr val="13294B"/>
-                </a:solidFill>
-                <a:latin typeface="맑은 고딕"/>
-                <a:ea typeface="맑은 고딕"/>
-                <a:cs typeface="맑은 고딕"/>
-              </a:rPr>
-              <a:t>연결</a:t>
-            </a:r>
-          </a:p>
-        </p:txBody>
-      </p:sp>
-      <p:sp>
-        <p:nvSpPr>
-          <p:cNvPr id="24" name="Rounded Rectangle 23"/>
-          <p:cNvSpPr/>
-          <p:nvPr/>
-        </p:nvSpPr>
-        <p:spPr>
-          <a:xfrm>
-            <a:off x="9075191" y="2488311"/>
-            <a:ext cx="2567863" cy="3006089"/>
-          </a:xfrm>
-          <a:prstGeom prst="roundRect">
-            <a:avLst>
-              <a:gd name="adj" fmla="val 4000"/>
-            </a:avLst>
-          </a:prstGeom>
-          <a:solidFill>
-            <a:srgbClr val="FFFFFF"/>
-          </a:solidFill>
-          <a:ln w="28575">
-            <a:solidFill>
-              <a:srgbClr val="5CB8F2"/>
-            </a:solidFill>
-          </a:ln>
-        </p:spPr>
-        <p:txBody>
-          <a:bodyPr rtlCol="0" anchor="ctr"/>
-          <a:lstStyle/>
-          <a:p>
-            <a:pPr algn="ctr"/>
-          </a:p>
-        </p:txBody>
-      </p:sp>
-      <p:sp>
-        <p:nvSpPr>
-          <p:cNvPr id="25" name="Oval 24"/>
-          <p:cNvSpPr/>
-          <p:nvPr/>
-        </p:nvSpPr>
-        <p:spPr>
-          <a:xfrm>
-            <a:off x="9303791" y="2689479"/>
-            <a:ext cx="731520" cy="731520"/>
-          </a:xfrm>
-          <a:prstGeom prst="ellipse">
-            <a:avLst/>
-          </a:prstGeom>
-          <a:solidFill>
-            <a:srgbClr val="5CB8F2"/>
-          </a:solidFill>
-          <a:ln>
-            <a:noFill/>
-          </a:ln>
-        </p:spPr>
-        <p:txBody>
-          <a:bodyPr rtlCol="0" anchor="ctr"/>
-          <a:lstStyle/>
-          <a:p>
-            <a:pPr algn="ctr"/>
-          </a:p>
-        </p:txBody>
-      </p:sp>
-      <p:pic>
-        <p:nvPicPr>
-          <p:cNvPr id="26" name="아이콘:zoom-question" descr="zoom-question_13294B_1.6.png"/>
-          <p:cNvPicPr>
-            <a:picLocks noChangeAspect="1"/>
-          </p:cNvPicPr>
-          <p:nvPr/>
-        </p:nvPicPr>
-        <p:blipFill>
-          <a:blip r:embed="rId6"/>
-          <a:stretch>
-            <a:fillRect/>
-          </a:stretch>
-        </p:blipFill>
-        <p:spPr>
-          <a:xfrm>
-            <a:off x="9457410" y="2843098"/>
-            <a:ext cx="424281" cy="424281"/>
-          </a:xfrm>
-          <a:prstGeom prst="rect">
-            <a:avLst/>
-          </a:prstGeom>
-        </p:spPr>
-      </p:pic>
-      <p:sp>
-        <p:nvSpPr>
-          <p:cNvPr id="27" name="TextBox 26"/>
-          <p:cNvSpPr txBox="1"/>
-          <p:nvPr/>
-        </p:nvSpPr>
-        <p:spPr>
-          <a:xfrm>
-            <a:off x="9239783" y="3512439"/>
-            <a:ext cx="2238679" cy="1479041"/>
-          </a:xfrm>
-          <a:prstGeom prst="rect">
-            <a:avLst/>
-          </a:prstGeom>
-          <a:noFill/>
-        </p:spPr>
-        <p:txBody>
-          <a:bodyPr wrap="square" anchor="t"/>
-          <a:lstStyle/>
-          <a:p>
-            <a:pPr algn="l">
-              <a:lnSpc>
-                <a:spcPct val="110000"/>
-              </a:lnSpc>
-              <a:spcAft>
-                <a:spcPts val="400"/>
-              </a:spcAft>
-            </a:pPr>
-            <a:r>
-              <a:rPr sz="1800" b="1">
-                <a:solidFill>
-                  <a:srgbClr val="13294B"/>
-                </a:solidFill>
-                <a:latin typeface="맑은 고딕"/>
-                <a:ea typeface="맑은 고딕"/>
-                <a:cs typeface="맑은 고딕"/>
-              </a:rPr>
-              <a:t>원인 미확정</a:t>
-            </a:r>
-          </a:p>
-          <a:p>
-            <a:pPr algn="l">
-              <a:lnSpc>
-                <a:spcPct val="110000"/>
-              </a:lnSpc>
-              <a:spcAft>
-                <a:spcPts val="400"/>
-              </a:spcAft>
-            </a:pPr>
-            <a:r>
-              <a:rPr sz="1350" b="0">
-                <a:solidFill>
-                  <a:srgbClr val="1F2A3A"/>
-                </a:solidFill>
-                <a:latin typeface="맑은 고딕"/>
-                <a:ea typeface="맑은 고딕"/>
-                <a:cs typeface="맑은 고딕"/>
-              </a:rPr>
-              <a:t>원인이 정해지지 않았으면 단정하지 않고 조사 요청으로 넘긴다</a:t>
-            </a:r>
-          </a:p>
-        </p:txBody>
-      </p:sp>
-      <p:sp>
-        <p:nvSpPr>
-          <p:cNvPr id="28" name="Rounded Rectangle 27"/>
-          <p:cNvSpPr/>
-          <p:nvPr/>
-        </p:nvSpPr>
-        <p:spPr>
-          <a:xfrm>
-            <a:off x="9303791" y="5064633"/>
-            <a:ext cx="1021080" cy="292608"/>
-          </a:xfrm>
-          <a:prstGeom prst="roundRect">
-            <a:avLst>
-              <a:gd name="adj" fmla="val 50000"/>
-            </a:avLst>
-          </a:prstGeom>
-          <a:solidFill>
-            <a:srgbClr val="5CB8F2"/>
-          </a:solidFill>
-          <a:ln>
-            <a:noFill/>
-          </a:ln>
-        </p:spPr>
-        <p:txBody>
-          <a:bodyPr rtlCol="0" anchor="ctr"/>
-          <a:lstStyle/>
-          <a:p>
-            <a:pPr algn="ctr"/>
-          </a:p>
-        </p:txBody>
-      </p:sp>
-      <p:sp>
-        <p:nvSpPr>
-          <p:cNvPr id="29" name="TextBox 28"/>
-          <p:cNvSpPr txBox="1"/>
-          <p:nvPr/>
-        </p:nvSpPr>
-        <p:spPr>
-          <a:xfrm>
-            <a:off x="9303791" y="5064633"/>
-            <a:ext cx="1021080" cy="292608"/>
-          </a:xfrm>
-          <a:prstGeom prst="rect">
-            <a:avLst/>
-          </a:prstGeom>
-          <a:noFill/>
-        </p:spPr>
-        <p:txBody>
-          <a:bodyPr wrap="square" anchor="ctr"/>
-          <a:lstStyle/>
-          <a:p>
-            <a:pPr algn="ctr">
-              <a:lnSpc>
-                <a:spcPct val="110000"/>
-              </a:lnSpc>
-            </a:pPr>
-            <a:r>
-              <a:rPr sz="1200" b="1">
-                <a:solidFill>
-                  <a:srgbClr val="13294B"/>
-                </a:solidFill>
-                <a:latin typeface="맑은 고딕"/>
-                <a:ea typeface="맑은 고딕"/>
-                <a:cs typeface="맑은 고딕"/>
-              </a:rPr>
-              <a:t>조사 요청</a:t>
             </a:r>
           </a:p>
         </p:txBody>
@@ -27126,7 +27811,7 @@
                 <a:ea typeface="맑은 고딕"/>
                 <a:cs typeface="맑은 고딕"/>
               </a:rPr>
-              <a:t>오늘 다룬 핵심 개념과 주요 용어 정리</a:t>
+              <a:t>실습에서 만드는 출력과 갈라지는 경우</a:t>
             </a:r>
           </a:p>
         </p:txBody>
@@ -27165,7 +27850,7 @@
                 <a:ea typeface="맑은 고딕"/>
                 <a:cs typeface="맑은 고딕"/>
               </a:rPr>
-              <a:t>이 회차에서 정식 명칭을 붙인 용어와, 그 용어가 쿨러 사건의 에이전트에서 놓이는 자리를 모은다.</a:t>
+              <a:t>이 실습을 마치면 불량 접수 한 건이 품질 유형, 확인 항목, 담당 부서, 대응 초안을 갖춘 품질 대응 카드로 바뀐다.</a:t>
             </a:r>
           </a:p>
         </p:txBody>
@@ -27246,16 +27931,47 @@
         </p:nvSpPr>
         <p:spPr>
           <a:xfrm>
-            <a:off x="548640" y="1961387"/>
-            <a:ext cx="11094415" cy="347472"/>
+            <a:off x="548640" y="2488311"/>
+            <a:ext cx="2567863" cy="3006089"/>
           </a:xfrm>
           <a:prstGeom prst="roundRect">
             <a:avLst>
-              <a:gd name="adj" fmla="val 12000"/>
+              <a:gd name="adj" fmla="val 4000"/>
             </a:avLst>
           </a:prstGeom>
           <a:solidFill>
-            <a:srgbClr val="13294B"/>
+            <a:srgbClr val="FFFFFF"/>
+          </a:solidFill>
+          <a:ln w="15875">
+            <a:solidFill>
+              <a:srgbClr val="D3D9E1"/>
+            </a:solidFill>
+          </a:ln>
+        </p:spPr>
+        <p:txBody>
+          <a:bodyPr rtlCol="0" anchor="ctr"/>
+          <a:lstStyle/>
+          <a:p>
+            <a:pPr algn="ctr"/>
+          </a:p>
+        </p:txBody>
+      </p:sp>
+      <p:sp>
+        <p:nvSpPr>
+          <p:cNvPr id="7" name="Oval 6"/>
+          <p:cNvSpPr/>
+          <p:nvPr/>
+        </p:nvSpPr>
+        <p:spPr>
+          <a:xfrm>
+            <a:off x="777240" y="2689479"/>
+            <a:ext cx="731520" cy="731520"/>
+          </a:xfrm>
+          <a:prstGeom prst="ellipse">
+            <a:avLst/>
+          </a:prstGeom>
+          <a:solidFill>
+            <a:srgbClr val="E7F3FD"/>
           </a:solidFill>
           <a:ln>
             <a:noFill/>
@@ -27269,119 +27985,89 @@
           </a:p>
         </p:txBody>
       </p:sp>
-      <p:sp>
-        <p:nvSpPr>
-          <p:cNvPr id="7" name="TextBox 6"/>
-          <p:cNvSpPr txBox="1"/>
-          <p:nvPr/>
-        </p:nvSpPr>
-        <p:spPr>
-          <a:xfrm>
-            <a:off x="685800" y="1961387"/>
-            <a:ext cx="2514600" cy="347472"/>
-          </a:xfrm>
-          <a:prstGeom prst="rect">
-            <a:avLst/>
-          </a:prstGeom>
-          <a:noFill/>
-        </p:spPr>
-        <p:txBody>
-          <a:bodyPr wrap="square" anchor="ctr"/>
+      <p:pic>
+        <p:nvPicPr>
+          <p:cNvPr id="8" name="아이콘:category" descr="category_13294B_1.6.png"/>
+          <p:cNvPicPr>
+            <a:picLocks noChangeAspect="1"/>
+          </p:cNvPicPr>
+          <p:nvPr/>
+        </p:nvPicPr>
+        <p:blipFill>
+          <a:blip r:embed="rId3"/>
+          <a:stretch>
+            <a:fillRect/>
+          </a:stretch>
+        </p:blipFill>
+        <p:spPr>
+          <a:xfrm>
+            <a:off x="930859" y="2843098"/>
+            <a:ext cx="424281" cy="424281"/>
+          </a:xfrm>
+          <a:prstGeom prst="rect">
+            <a:avLst/>
+          </a:prstGeom>
+        </p:spPr>
+      </p:pic>
+      <p:sp>
+        <p:nvSpPr>
+          <p:cNvPr id="9" name="TextBox 8"/>
+          <p:cNvSpPr txBox="1"/>
+          <p:nvPr/>
+        </p:nvSpPr>
+        <p:spPr>
+          <a:xfrm>
+            <a:off x="713232" y="3512439"/>
+            <a:ext cx="2238679" cy="1479041"/>
+          </a:xfrm>
+          <a:prstGeom prst="rect">
+            <a:avLst/>
+          </a:prstGeom>
+          <a:noFill/>
+        </p:spPr>
+        <p:txBody>
+          <a:bodyPr wrap="square" anchor="t"/>
           <a:lstStyle/>
           <a:p>
             <a:pPr algn="l">
               <a:lnSpc>
                 <a:spcPct val="110000"/>
               </a:lnSpc>
-            </a:pPr>
-            <a:r>
-              <a:rPr sz="1300" b="1">
-                <a:solidFill>
-                  <a:srgbClr val="FFFFFF"/>
-                </a:solidFill>
-                <a:latin typeface="맑은 고딕"/>
-                <a:ea typeface="맑은 고딕"/>
-                <a:cs typeface="맑은 고딕"/>
-              </a:rPr>
-              <a:t>용어</a:t>
-            </a:r>
-          </a:p>
-        </p:txBody>
-      </p:sp>
-      <p:sp>
-        <p:nvSpPr>
-          <p:cNvPr id="8" name="TextBox 7"/>
-          <p:cNvSpPr txBox="1"/>
-          <p:nvPr/>
-        </p:nvSpPr>
-        <p:spPr>
-          <a:xfrm>
-            <a:off x="3200400" y="1961387"/>
-            <a:ext cx="6248095" cy="347472"/>
-          </a:xfrm>
-          <a:prstGeom prst="rect">
-            <a:avLst/>
-          </a:prstGeom>
-          <a:noFill/>
-        </p:spPr>
-        <p:txBody>
-          <a:bodyPr wrap="square" anchor="ctr"/>
-          <a:lstStyle/>
+              <a:spcAft>
+                <a:spcPts val="400"/>
+              </a:spcAft>
+            </a:pPr>
+            <a:r>
+              <a:rPr sz="1800" b="1">
+                <a:solidFill>
+                  <a:srgbClr val="13294B"/>
+                </a:solidFill>
+                <a:latin typeface="맑은 고딕"/>
+                <a:ea typeface="맑은 고딕"/>
+                <a:cs typeface="맑은 고딕"/>
+              </a:rPr>
+              <a:t>품질 유형</a:t>
+            </a:r>
+          </a:p>
           <a:p>
             <a:pPr algn="l">
               <a:lnSpc>
                 <a:spcPct val="110000"/>
               </a:lnSpc>
-            </a:pPr>
-            <a:r>
-              <a:rPr sz="1300" b="1">
-                <a:solidFill>
-                  <a:srgbClr val="FFFFFF"/>
-                </a:solidFill>
-                <a:latin typeface="맑은 고딕"/>
-                <a:ea typeface="맑은 고딕"/>
-                <a:cs typeface="맑은 고딕"/>
-              </a:rPr>
-              <a:t>정식 명칭</a:t>
-            </a:r>
-          </a:p>
-        </p:txBody>
-      </p:sp>
-      <p:sp>
-        <p:nvSpPr>
-          <p:cNvPr id="9" name="TextBox 8"/>
-          <p:cNvSpPr txBox="1"/>
-          <p:nvPr/>
-        </p:nvSpPr>
-        <p:spPr>
-          <a:xfrm>
-            <a:off x="9448495" y="1961387"/>
-            <a:ext cx="2194560" cy="347472"/>
-          </a:xfrm>
-          <a:prstGeom prst="rect">
-            <a:avLst/>
-          </a:prstGeom>
-          <a:noFill/>
-        </p:spPr>
-        <p:txBody>
-          <a:bodyPr wrap="square" anchor="ctr"/>
-          <a:lstStyle/>
-          <a:p>
-            <a:pPr algn="l">
-              <a:lnSpc>
-                <a:spcPct val="110000"/>
-              </a:lnSpc>
-            </a:pPr>
-            <a:r>
-              <a:rPr sz="1300" b="1">
-                <a:solidFill>
-                  <a:srgbClr val="FFFFFF"/>
-                </a:solidFill>
-                <a:latin typeface="맑은 고딕"/>
-                <a:ea typeface="맑은 고딕"/>
-                <a:cs typeface="맑은 고딕"/>
-              </a:rPr>
-              <a:t>쿨러 사건의 에이전트에서</a:t>
+              <a:spcAft>
+                <a:spcPts val="400"/>
+              </a:spcAft>
+            </a:pPr>
+            <a:r>
+              <a:rPr sz="1350" b="0">
+                <a:solidFill>
+                  <a:srgbClr val="1F2A3A"/>
+                </a:solidFill>
+                <a:latin typeface="맑은 고딕"/>
+                <a:ea typeface="맑은 고딕"/>
+                <a:cs typeface="맑은 고딕"/>
+              </a:rPr>
+              <a:t>제공된 분류 기준으로 접수 내용의 유형을 정한다</a:t>
             </a:r>
           </a:p>
         </p:txBody>
@@ -27394,16 +28080,16 @@
         </p:nvSpPr>
         <p:spPr>
           <a:xfrm>
-            <a:off x="548640" y="2395727"/>
-            <a:ext cx="11094415" cy="850392"/>
+            <a:off x="777240" y="5064633"/>
+            <a:ext cx="822960" cy="292608"/>
           </a:xfrm>
           <a:prstGeom prst="roundRect">
             <a:avLst>
-              <a:gd name="adj" fmla="val 8000"/>
+              <a:gd name="adj" fmla="val 50000"/>
             </a:avLst>
           </a:prstGeom>
           <a:solidFill>
-            <a:srgbClr val="F3F6F9"/>
+            <a:srgbClr val="D3D9E1"/>
           </a:solidFill>
           <a:ln>
             <a:noFill/>
@@ -27425,8 +28111,8 @@
         </p:nvSpPr>
         <p:spPr>
           <a:xfrm>
-            <a:off x="685800" y="2363723"/>
-            <a:ext cx="2514600" cy="914400"/>
+            <a:off x="777240" y="5064633"/>
+            <a:ext cx="822960" cy="292608"/>
           </a:xfrm>
           <a:prstGeom prst="rect">
             <a:avLst/>
@@ -27437,13 +28123,13 @@
           <a:bodyPr wrap="square" anchor="ctr"/>
           <a:lstStyle/>
           <a:p>
-            <a:pPr algn="l">
-              <a:lnSpc>
-                <a:spcPct val="110000"/>
-              </a:lnSpc>
-            </a:pPr>
-            <a:r>
-              <a:rPr sz="1600" b="1">
+            <a:pPr algn="ctr">
+              <a:lnSpc>
+                <a:spcPct val="110000"/>
+              </a:lnSpc>
+            </a:pPr>
+            <a:r>
+              <a:rPr sz="1200" b="1">
                 <a:solidFill>
                   <a:srgbClr val="13294B"/>
                 </a:solidFill>
@@ -27451,107 +28137,60 @@
                 <a:ea typeface="맑은 고딕"/>
                 <a:cs typeface="맑은 고딕"/>
               </a:rPr>
-              <a:t>에이전트</a:t>
-            </a:r>
-          </a:p>
-        </p:txBody>
-      </p:sp>
-      <p:sp>
-        <p:nvSpPr>
-          <p:cNvPr id="12" name="TextBox 11"/>
-          <p:cNvSpPr txBox="1"/>
-          <p:nvPr/>
-        </p:nvSpPr>
-        <p:spPr>
-          <a:xfrm>
-            <a:off x="3200400" y="2363723"/>
-            <a:ext cx="6156655" cy="914400"/>
-          </a:xfrm>
-          <a:prstGeom prst="rect">
-            <a:avLst/>
-          </a:prstGeom>
-          <a:noFill/>
-        </p:spPr>
-        <p:txBody>
-          <a:bodyPr wrap="square" anchor="ctr"/>
-          <a:lstStyle/>
-          <a:p>
-            <a:pPr algn="l">
-              <a:lnSpc>
-                <a:spcPct val="110000"/>
-              </a:lnSpc>
-            </a:pPr>
-            <a:r>
-              <a:rPr sz="1400" b="0">
-                <a:solidFill>
-                  <a:srgbClr val="1F2A3A"/>
-                </a:solidFill>
-                <a:latin typeface="맑은 고딕"/>
-                <a:ea typeface="맑은 고딕"/>
-                <a:cs typeface="맑은 고딕"/>
-              </a:rPr>
-              <a:t>AI Agent</a:t>
-            </a:r>
-          </a:p>
-        </p:txBody>
-      </p:sp>
-      <p:sp>
-        <p:nvSpPr>
-          <p:cNvPr id="13" name="TextBox 12"/>
-          <p:cNvSpPr txBox="1"/>
-          <p:nvPr/>
-        </p:nvSpPr>
-        <p:spPr>
-          <a:xfrm>
-            <a:off x="9448495" y="2363723"/>
-            <a:ext cx="2103120" cy="914400"/>
-          </a:xfrm>
-          <a:prstGeom prst="rect">
-            <a:avLst/>
-          </a:prstGeom>
-          <a:noFill/>
-        </p:spPr>
-        <p:txBody>
-          <a:bodyPr wrap="square" anchor="ctr"/>
-          <a:lstStyle/>
-          <a:p>
-            <a:pPr algn="l">
-              <a:lnSpc>
-                <a:spcPct val="110000"/>
-              </a:lnSpc>
-            </a:pPr>
-            <a:r>
-              <a:rPr sz="1250" b="1">
-                <a:solidFill>
-                  <a:srgbClr val="556175"/>
-                </a:solidFill>
-                <a:latin typeface="맑은 고딕"/>
-                <a:ea typeface="맑은 고딕"/>
-                <a:cs typeface="맑은 고딕"/>
-              </a:rPr>
-              <a:t>냉각 긴급 대응 에이전트</a:t>
-            </a:r>
-          </a:p>
-        </p:txBody>
-      </p:sp>
-      <p:sp>
-        <p:nvSpPr>
-          <p:cNvPr id="14" name="Rounded Rectangle 13"/>
+              <a:t>분류</a:t>
+            </a:r>
+          </a:p>
+        </p:txBody>
+      </p:sp>
+      <p:sp>
+        <p:nvSpPr>
+          <p:cNvPr id="12" name="Rounded Rectangle 11"/>
           <p:cNvSpPr/>
           <p:nvPr/>
         </p:nvSpPr>
         <p:spPr>
           <a:xfrm>
-            <a:off x="548640" y="3310127"/>
-            <a:ext cx="11094415" cy="850392"/>
+            <a:off x="3390823" y="2488311"/>
+            <a:ext cx="2567863" cy="3006089"/>
           </a:xfrm>
           <a:prstGeom prst="roundRect">
             <a:avLst>
-              <a:gd name="adj" fmla="val 8000"/>
+              <a:gd name="adj" fmla="val 4000"/>
             </a:avLst>
           </a:prstGeom>
           <a:solidFill>
-            <a:srgbClr val="F3F6F9"/>
+            <a:srgbClr val="FFFFFF"/>
+          </a:solidFill>
+          <a:ln w="15875">
+            <a:solidFill>
+              <a:srgbClr val="D3D9E1"/>
+            </a:solidFill>
+          </a:ln>
+        </p:spPr>
+        <p:txBody>
+          <a:bodyPr rtlCol="0" anchor="ctr"/>
+          <a:lstStyle/>
+          <a:p>
+            <a:pPr algn="ctr"/>
+          </a:p>
+        </p:txBody>
+      </p:sp>
+      <p:sp>
+        <p:nvSpPr>
+          <p:cNvPr id="13" name="Oval 12"/>
+          <p:cNvSpPr/>
+          <p:nvPr/>
+        </p:nvSpPr>
+        <p:spPr>
+          <a:xfrm>
+            <a:off x="3619423" y="2689479"/>
+            <a:ext cx="731520" cy="731520"/>
+          </a:xfrm>
+          <a:prstGeom prst="ellipse">
+            <a:avLst/>
+          </a:prstGeom>
+          <a:solidFill>
+            <a:srgbClr val="E7F3FD"/>
           </a:solidFill>
           <a:ln>
             <a:noFill/>
@@ -27565,6 +28204,30 @@
           </a:p>
         </p:txBody>
       </p:sp>
+      <p:pic>
+        <p:nvPicPr>
+          <p:cNvPr id="14" name="아이콘:list-check" descr="list-check_13294B_1.6.png"/>
+          <p:cNvPicPr>
+            <a:picLocks noChangeAspect="1"/>
+          </p:cNvPicPr>
+          <p:nvPr/>
+        </p:nvPicPr>
+        <p:blipFill>
+          <a:blip r:embed="rId4"/>
+          <a:stretch>
+            <a:fillRect/>
+          </a:stretch>
+        </p:blipFill>
+        <p:spPr>
+          <a:xfrm>
+            <a:off x="3773043" y="2843098"/>
+            <a:ext cx="424281" cy="424281"/>
+          </a:xfrm>
+          <a:prstGeom prst="rect">
+            <a:avLst/>
+          </a:prstGeom>
+        </p:spPr>
+      </p:pic>
       <p:sp>
         <p:nvSpPr>
           <p:cNvPr id="15" name="TextBox 14"/>
@@ -27573,25 +28236,28 @@
         </p:nvSpPr>
         <p:spPr>
           <a:xfrm>
-            <a:off x="685800" y="3278123"/>
-            <a:ext cx="2514600" cy="914400"/>
-          </a:xfrm>
-          <a:prstGeom prst="rect">
-            <a:avLst/>
-          </a:prstGeom>
-          <a:noFill/>
-        </p:spPr>
-        <p:txBody>
-          <a:bodyPr wrap="square" anchor="ctr"/>
+            <a:off x="3555415" y="3512439"/>
+            <a:ext cx="2238679" cy="1479041"/>
+          </a:xfrm>
+          <a:prstGeom prst="rect">
+            <a:avLst/>
+          </a:prstGeom>
+          <a:noFill/>
+        </p:spPr>
+        <p:txBody>
+          <a:bodyPr wrap="square" anchor="t"/>
           <a:lstStyle/>
           <a:p>
             <a:pPr algn="l">
               <a:lnSpc>
                 <a:spcPct val="110000"/>
               </a:lnSpc>
-            </a:pPr>
-            <a:r>
-              <a:rPr sz="1600" b="1">
+              <a:spcAft>
+                <a:spcPts val="400"/>
+              </a:spcAft>
+            </a:pPr>
+            <a:r>
+              <a:rPr sz="1800" b="1">
                 <a:solidFill>
                   <a:srgbClr val="13294B"/>
                 </a:solidFill>
@@ -27599,38 +28265,20 @@
                 <a:ea typeface="맑은 고딕"/>
                 <a:cs typeface="맑은 고딕"/>
               </a:rPr>
-              <a:t>도구</a:t>
-            </a:r>
-          </a:p>
-        </p:txBody>
-      </p:sp>
-      <p:sp>
-        <p:nvSpPr>
-          <p:cNvPr id="16" name="TextBox 15"/>
-          <p:cNvSpPr txBox="1"/>
-          <p:nvPr/>
-        </p:nvSpPr>
-        <p:spPr>
-          <a:xfrm>
-            <a:off x="3200400" y="3278123"/>
-            <a:ext cx="6156655" cy="914400"/>
-          </a:xfrm>
-          <a:prstGeom prst="rect">
-            <a:avLst/>
-          </a:prstGeom>
-          <a:noFill/>
-        </p:spPr>
-        <p:txBody>
-          <a:bodyPr wrap="square" anchor="ctr"/>
-          <a:lstStyle/>
+              <a:t>추가 확인 항목</a:t>
+            </a:r>
+          </a:p>
           <a:p>
             <a:pPr algn="l">
               <a:lnSpc>
                 <a:spcPct val="110000"/>
               </a:lnSpc>
-            </a:pPr>
-            <a:r>
-              <a:rPr sz="1400" b="0">
+              <a:spcAft>
+                <a:spcPts val="400"/>
+              </a:spcAft>
+            </a:pPr>
+            <a:r>
+              <a:rPr sz="1350" b="0">
                 <a:solidFill>
                   <a:srgbClr val="1F2A3A"/>
                 </a:solidFill>
@@ -27638,68 +28286,29 @@
                 <a:ea typeface="맑은 고딕"/>
                 <a:cs typeface="맑은 고딕"/>
               </a:rPr>
-              <a:t>Tool</a:t>
-            </a:r>
-          </a:p>
-        </p:txBody>
-      </p:sp>
-      <p:sp>
-        <p:nvSpPr>
-          <p:cNvPr id="17" name="TextBox 16"/>
-          <p:cNvSpPr txBox="1"/>
-          <p:nvPr/>
-        </p:nvSpPr>
-        <p:spPr>
-          <a:xfrm>
-            <a:off x="9448495" y="3278123"/>
-            <a:ext cx="2103120" cy="914400"/>
-          </a:xfrm>
-          <a:prstGeom prst="rect">
-            <a:avLst/>
-          </a:prstGeom>
-          <a:noFill/>
-        </p:spPr>
-        <p:txBody>
-          <a:bodyPr wrap="square" anchor="ctr"/>
-          <a:lstStyle/>
-          <a:p>
-            <a:pPr algn="l">
-              <a:lnSpc>
-                <a:spcPct val="110000"/>
-              </a:lnSpc>
-            </a:pPr>
-            <a:r>
-              <a:rPr sz="1250" b="1">
-                <a:solidFill>
-                  <a:srgbClr val="556175"/>
-                </a:solidFill>
-                <a:latin typeface="맑은 고딕"/>
-                <a:ea typeface="맑은 고딕"/>
-                <a:cs typeface="맑은 고딕"/>
-              </a:rPr>
-              <a:t>원인 진단, 대안 평가, 판단 제출</a:t>
-            </a:r>
-          </a:p>
-        </p:txBody>
-      </p:sp>
-      <p:sp>
-        <p:nvSpPr>
-          <p:cNvPr id="18" name="Rounded Rectangle 17"/>
+              <a:t>판단에 모자란 정보를 확인 항목으로 적는다</a:t>
+            </a:r>
+          </a:p>
+        </p:txBody>
+      </p:sp>
+      <p:sp>
+        <p:nvSpPr>
+          <p:cNvPr id="16" name="Rounded Rectangle 15"/>
           <p:cNvSpPr/>
           <p:nvPr/>
         </p:nvSpPr>
         <p:spPr>
           <a:xfrm>
-            <a:off x="548640" y="4224527"/>
-            <a:ext cx="11094415" cy="850392"/>
+            <a:off x="3619423" y="5064633"/>
+            <a:ext cx="822960" cy="292608"/>
           </a:xfrm>
           <a:prstGeom prst="roundRect">
             <a:avLst>
-              <a:gd name="adj" fmla="val 8000"/>
+              <a:gd name="adj" fmla="val 50000"/>
             </a:avLst>
           </a:prstGeom>
           <a:solidFill>
-            <a:srgbClr val="F3F6F9"/>
+            <a:srgbClr val="D3D9E1"/>
           </a:solidFill>
           <a:ln>
             <a:noFill/>
@@ -27715,14 +28324,14 @@
       </p:sp>
       <p:sp>
         <p:nvSpPr>
-          <p:cNvPr id="19" name="TextBox 18"/>
-          <p:cNvSpPr txBox="1"/>
-          <p:nvPr/>
-        </p:nvSpPr>
-        <p:spPr>
-          <a:xfrm>
-            <a:off x="685800" y="4192523"/>
-            <a:ext cx="2514600" cy="914400"/>
+          <p:cNvPr id="17" name="TextBox 16"/>
+          <p:cNvSpPr txBox="1"/>
+          <p:nvPr/>
+        </p:nvSpPr>
+        <p:spPr>
+          <a:xfrm>
+            <a:off x="3619423" y="5064633"/>
+            <a:ext cx="822960" cy="292608"/>
           </a:xfrm>
           <a:prstGeom prst="rect">
             <a:avLst/>
@@ -27733,13 +28342,13 @@
           <a:bodyPr wrap="square" anchor="ctr"/>
           <a:lstStyle/>
           <a:p>
-            <a:pPr algn="l">
-              <a:lnSpc>
-                <a:spcPct val="110000"/>
-              </a:lnSpc>
-            </a:pPr>
-            <a:r>
-              <a:rPr sz="1600" b="1">
+            <a:pPr algn="ctr">
+              <a:lnSpc>
+                <a:spcPct val="110000"/>
+              </a:lnSpc>
+            </a:pPr>
+            <a:r>
+              <a:rPr sz="1200" b="1">
                 <a:solidFill>
                   <a:srgbClr val="13294B"/>
                 </a:solidFill>
@@ -27747,107 +28356,60 @@
                 <a:ea typeface="맑은 고딕"/>
                 <a:cs typeface="맑은 고딕"/>
               </a:rPr>
-              <a:t>RAG</a:t>
-            </a:r>
-          </a:p>
-        </p:txBody>
-      </p:sp>
-      <p:sp>
-        <p:nvSpPr>
-          <p:cNvPr id="20" name="TextBox 19"/>
-          <p:cNvSpPr txBox="1"/>
-          <p:nvPr/>
-        </p:nvSpPr>
-        <p:spPr>
-          <a:xfrm>
-            <a:off x="3200400" y="4192523"/>
-            <a:ext cx="6156655" cy="914400"/>
-          </a:xfrm>
-          <a:prstGeom prst="rect">
-            <a:avLst/>
-          </a:prstGeom>
-          <a:noFill/>
-        </p:spPr>
-        <p:txBody>
-          <a:bodyPr wrap="square" anchor="ctr"/>
-          <a:lstStyle/>
-          <a:p>
-            <a:pPr algn="l">
-              <a:lnSpc>
-                <a:spcPct val="110000"/>
-              </a:lnSpc>
-            </a:pPr>
-            <a:r>
-              <a:rPr sz="1400" b="0">
-                <a:solidFill>
-                  <a:srgbClr val="1F2A3A"/>
-                </a:solidFill>
-                <a:latin typeface="맑은 고딕"/>
-                <a:ea typeface="맑은 고딕"/>
-                <a:cs typeface="맑은 고딕"/>
-              </a:rPr>
-              <a:t>Retrieval-Augmented Generation</a:t>
-            </a:r>
-          </a:p>
-        </p:txBody>
-      </p:sp>
-      <p:sp>
-        <p:nvSpPr>
-          <p:cNvPr id="21" name="TextBox 20"/>
-          <p:cNvSpPr txBox="1"/>
-          <p:nvPr/>
-        </p:nvSpPr>
-        <p:spPr>
-          <a:xfrm>
-            <a:off x="9448495" y="4192523"/>
-            <a:ext cx="2103120" cy="914400"/>
-          </a:xfrm>
-          <a:prstGeom prst="rect">
-            <a:avLst/>
-          </a:prstGeom>
-          <a:noFill/>
-        </p:spPr>
-        <p:txBody>
-          <a:bodyPr wrap="square" anchor="ctr"/>
-          <a:lstStyle/>
-          <a:p>
-            <a:pPr algn="l">
-              <a:lnSpc>
-                <a:spcPct val="110000"/>
-              </a:lnSpc>
-            </a:pPr>
-            <a:r>
-              <a:rPr sz="1250" b="1">
-                <a:solidFill>
-                  <a:srgbClr val="556175"/>
-                </a:solidFill>
-                <a:latin typeface="맑은 고딕"/>
-                <a:ea typeface="맑은 고딕"/>
-                <a:cs typeface="맑은 고딕"/>
-              </a:rPr>
-              <a:t>문서를 찾아 함께 읽히는 방식</a:t>
-            </a:r>
-          </a:p>
-        </p:txBody>
-      </p:sp>
-      <p:sp>
-        <p:nvSpPr>
-          <p:cNvPr id="22" name="Rounded Rectangle 21"/>
+              <a:t>확인</a:t>
+            </a:r>
+          </a:p>
+        </p:txBody>
+      </p:sp>
+      <p:sp>
+        <p:nvSpPr>
+          <p:cNvPr id="18" name="Rounded Rectangle 17"/>
           <p:cNvSpPr/>
           <p:nvPr/>
         </p:nvSpPr>
         <p:spPr>
           <a:xfrm>
-            <a:off x="548640" y="5138927"/>
-            <a:ext cx="11094415" cy="850392"/>
+            <a:off x="6233007" y="2488311"/>
+            <a:ext cx="2567863" cy="3006089"/>
           </a:xfrm>
           <a:prstGeom prst="roundRect">
             <a:avLst>
-              <a:gd name="adj" fmla="val 8000"/>
+              <a:gd name="adj" fmla="val 4000"/>
             </a:avLst>
           </a:prstGeom>
           <a:solidFill>
-            <a:srgbClr val="F3F6F9"/>
+            <a:srgbClr val="FFFFFF"/>
+          </a:solidFill>
+          <a:ln w="15875">
+            <a:solidFill>
+              <a:srgbClr val="D3D9E1"/>
+            </a:solidFill>
+          </a:ln>
+        </p:spPr>
+        <p:txBody>
+          <a:bodyPr rtlCol="0" anchor="ctr"/>
+          <a:lstStyle/>
+          <a:p>
+            <a:pPr algn="ctr"/>
+          </a:p>
+        </p:txBody>
+      </p:sp>
+      <p:sp>
+        <p:nvSpPr>
+          <p:cNvPr id="19" name="Oval 18"/>
+          <p:cNvSpPr/>
+          <p:nvPr/>
+        </p:nvSpPr>
+        <p:spPr>
+          <a:xfrm>
+            <a:off x="6461607" y="2689479"/>
+            <a:ext cx="731520" cy="731520"/>
+          </a:xfrm>
+          <a:prstGeom prst="ellipse">
+            <a:avLst/>
+          </a:prstGeom>
+          <a:solidFill>
+            <a:srgbClr val="E7F3FD"/>
           </a:solidFill>
           <a:ln>
             <a:noFill/>
@@ -27861,6 +28423,124 @@
           </a:p>
         </p:txBody>
       </p:sp>
+      <p:pic>
+        <p:nvPicPr>
+          <p:cNvPr id="20" name="아이콘:building-factory-2" descr="building-factory-2_13294B_1.6.png"/>
+          <p:cNvPicPr>
+            <a:picLocks noChangeAspect="1"/>
+          </p:cNvPicPr>
+          <p:nvPr/>
+        </p:nvPicPr>
+        <p:blipFill>
+          <a:blip r:embed="rId5"/>
+          <a:stretch>
+            <a:fillRect/>
+          </a:stretch>
+        </p:blipFill>
+        <p:spPr>
+          <a:xfrm>
+            <a:off x="6615226" y="2843098"/>
+            <a:ext cx="424281" cy="424281"/>
+          </a:xfrm>
+          <a:prstGeom prst="rect">
+            <a:avLst/>
+          </a:prstGeom>
+        </p:spPr>
+      </p:pic>
+      <p:sp>
+        <p:nvSpPr>
+          <p:cNvPr id="21" name="TextBox 20"/>
+          <p:cNvSpPr txBox="1"/>
+          <p:nvPr/>
+        </p:nvSpPr>
+        <p:spPr>
+          <a:xfrm>
+            <a:off x="6397599" y="3512439"/>
+            <a:ext cx="2238679" cy="1479041"/>
+          </a:xfrm>
+          <a:prstGeom prst="rect">
+            <a:avLst/>
+          </a:prstGeom>
+          <a:noFill/>
+        </p:spPr>
+        <p:txBody>
+          <a:bodyPr wrap="square" anchor="t"/>
+          <a:lstStyle/>
+          <a:p>
+            <a:pPr algn="l">
+              <a:lnSpc>
+                <a:spcPct val="110000"/>
+              </a:lnSpc>
+              <a:spcAft>
+                <a:spcPts val="400"/>
+              </a:spcAft>
+            </a:pPr>
+            <a:r>
+              <a:rPr sz="1800" b="1">
+                <a:solidFill>
+                  <a:srgbClr val="13294B"/>
+                </a:solidFill>
+                <a:latin typeface="맑은 고딕"/>
+                <a:ea typeface="맑은 고딕"/>
+                <a:cs typeface="맑은 고딕"/>
+              </a:rPr>
+              <a:t>담당 부서와 대응 초안</a:t>
+            </a:r>
+          </a:p>
+          <a:p>
+            <a:pPr algn="l">
+              <a:lnSpc>
+                <a:spcPct val="110000"/>
+              </a:lnSpc>
+              <a:spcAft>
+                <a:spcPts val="400"/>
+              </a:spcAft>
+            </a:pPr>
+            <a:r>
+              <a:rPr sz="1350" b="0">
+                <a:solidFill>
+                  <a:srgbClr val="1F2A3A"/>
+                </a:solidFill>
+                <a:latin typeface="맑은 고딕"/>
+                <a:ea typeface="맑은 고딕"/>
+                <a:cs typeface="맑은 고딕"/>
+              </a:rPr>
+              <a:t>넘길 부서를 정하고 대응 초안을 쓴다</a:t>
+            </a:r>
+          </a:p>
+        </p:txBody>
+      </p:sp>
+      <p:sp>
+        <p:nvSpPr>
+          <p:cNvPr id="22" name="Rounded Rectangle 21"/>
+          <p:cNvSpPr/>
+          <p:nvPr/>
+        </p:nvSpPr>
+        <p:spPr>
+          <a:xfrm>
+            <a:off x="6461607" y="5064633"/>
+            <a:ext cx="822960" cy="292608"/>
+          </a:xfrm>
+          <a:prstGeom prst="roundRect">
+            <a:avLst>
+              <a:gd name="adj" fmla="val 50000"/>
+            </a:avLst>
+          </a:prstGeom>
+          <a:solidFill>
+            <a:srgbClr val="D3D9E1"/>
+          </a:solidFill>
+          <a:ln>
+            <a:noFill/>
+          </a:ln>
+        </p:spPr>
+        <p:txBody>
+          <a:bodyPr rtlCol="0" anchor="ctr"/>
+          <a:lstStyle/>
+          <a:p>
+            <a:pPr algn="ctr"/>
+          </a:p>
+        </p:txBody>
+      </p:sp>
       <p:sp>
         <p:nvSpPr>
           <p:cNvPr id="23" name="TextBox 22"/>
@@ -27869,8 +28549,8 @@
         </p:nvSpPr>
         <p:spPr>
           <a:xfrm>
-            <a:off x="685800" y="5106923"/>
-            <a:ext cx="2514600" cy="914400"/>
+            <a:off x="6461607" y="5064633"/>
+            <a:ext cx="822960" cy="292608"/>
           </a:xfrm>
           <a:prstGeom prst="rect">
             <a:avLst/>
@@ -27881,13 +28561,141 @@
           <a:bodyPr wrap="square" anchor="ctr"/>
           <a:lstStyle/>
           <a:p>
+            <a:pPr algn="ctr">
+              <a:lnSpc>
+                <a:spcPct val="110000"/>
+              </a:lnSpc>
+            </a:pPr>
+            <a:r>
+              <a:rPr sz="1200" b="1">
+                <a:solidFill>
+                  <a:srgbClr val="13294B"/>
+                </a:solidFill>
+                <a:latin typeface="맑은 고딕"/>
+                <a:ea typeface="맑은 고딕"/>
+                <a:cs typeface="맑은 고딕"/>
+              </a:rPr>
+              <a:t>연결</a:t>
+            </a:r>
+          </a:p>
+        </p:txBody>
+      </p:sp>
+      <p:sp>
+        <p:nvSpPr>
+          <p:cNvPr id="24" name="Rounded Rectangle 23"/>
+          <p:cNvSpPr/>
+          <p:nvPr/>
+        </p:nvSpPr>
+        <p:spPr>
+          <a:xfrm>
+            <a:off x="9075191" y="2488311"/>
+            <a:ext cx="2567863" cy="3006089"/>
+          </a:xfrm>
+          <a:prstGeom prst="roundRect">
+            <a:avLst>
+              <a:gd name="adj" fmla="val 4000"/>
+            </a:avLst>
+          </a:prstGeom>
+          <a:solidFill>
+            <a:srgbClr val="FFFFFF"/>
+          </a:solidFill>
+          <a:ln w="28575">
+            <a:solidFill>
+              <a:srgbClr val="5CB8F2"/>
+            </a:solidFill>
+          </a:ln>
+        </p:spPr>
+        <p:txBody>
+          <a:bodyPr rtlCol="0" anchor="ctr"/>
+          <a:lstStyle/>
+          <a:p>
+            <a:pPr algn="ctr"/>
+          </a:p>
+        </p:txBody>
+      </p:sp>
+      <p:sp>
+        <p:nvSpPr>
+          <p:cNvPr id="25" name="Oval 24"/>
+          <p:cNvSpPr/>
+          <p:nvPr/>
+        </p:nvSpPr>
+        <p:spPr>
+          <a:xfrm>
+            <a:off x="9303791" y="2689479"/>
+            <a:ext cx="731520" cy="731520"/>
+          </a:xfrm>
+          <a:prstGeom prst="ellipse">
+            <a:avLst/>
+          </a:prstGeom>
+          <a:solidFill>
+            <a:srgbClr val="5CB8F2"/>
+          </a:solidFill>
+          <a:ln>
+            <a:noFill/>
+          </a:ln>
+        </p:spPr>
+        <p:txBody>
+          <a:bodyPr rtlCol="0" anchor="ctr"/>
+          <a:lstStyle/>
+          <a:p>
+            <a:pPr algn="ctr"/>
+          </a:p>
+        </p:txBody>
+      </p:sp>
+      <p:pic>
+        <p:nvPicPr>
+          <p:cNvPr id="26" name="아이콘:zoom-question" descr="zoom-question_13294B_1.6.png"/>
+          <p:cNvPicPr>
+            <a:picLocks noChangeAspect="1"/>
+          </p:cNvPicPr>
+          <p:nvPr/>
+        </p:nvPicPr>
+        <p:blipFill>
+          <a:blip r:embed="rId6"/>
+          <a:stretch>
+            <a:fillRect/>
+          </a:stretch>
+        </p:blipFill>
+        <p:spPr>
+          <a:xfrm>
+            <a:off x="9457410" y="2843098"/>
+            <a:ext cx="424281" cy="424281"/>
+          </a:xfrm>
+          <a:prstGeom prst="rect">
+            <a:avLst/>
+          </a:prstGeom>
+        </p:spPr>
+      </p:pic>
+      <p:sp>
+        <p:nvSpPr>
+          <p:cNvPr id="27" name="TextBox 26"/>
+          <p:cNvSpPr txBox="1"/>
+          <p:nvPr/>
+        </p:nvSpPr>
+        <p:spPr>
+          <a:xfrm>
+            <a:off x="9239783" y="3512439"/>
+            <a:ext cx="2238679" cy="1479041"/>
+          </a:xfrm>
+          <a:prstGeom prst="rect">
+            <a:avLst/>
+          </a:prstGeom>
+          <a:noFill/>
+        </p:spPr>
+        <p:txBody>
+          <a:bodyPr wrap="square" anchor="t"/>
+          <a:lstStyle/>
+          <a:p>
             <a:pPr algn="l">
               <a:lnSpc>
                 <a:spcPct val="110000"/>
               </a:lnSpc>
-            </a:pPr>
-            <a:r>
-              <a:rPr sz="1600" b="1">
+              <a:spcAft>
+                <a:spcPts val="400"/>
+              </a:spcAft>
+            </a:pPr>
+            <a:r>
+              <a:rPr sz="1800" b="1">
                 <a:solidFill>
                   <a:srgbClr val="13294B"/>
                 </a:solidFill>
@@ -27895,21 +28703,73 @@
                 <a:ea typeface="맑은 고딕"/>
                 <a:cs typeface="맑은 고딕"/>
               </a:rPr>
-              <a:t>근거의 상태</a:t>
-            </a:r>
-          </a:p>
-        </p:txBody>
-      </p:sp>
-      <p:sp>
-        <p:nvSpPr>
-          <p:cNvPr id="24" name="TextBox 23"/>
-          <p:cNvSpPr txBox="1"/>
-          <p:nvPr/>
-        </p:nvSpPr>
-        <p:spPr>
-          <a:xfrm>
-            <a:off x="3200400" y="5106923"/>
-            <a:ext cx="6156655" cy="914400"/>
+              <a:t>원인 미확정</a:t>
+            </a:r>
+          </a:p>
+          <a:p>
+            <a:pPr algn="l">
+              <a:lnSpc>
+                <a:spcPct val="110000"/>
+              </a:lnSpc>
+              <a:spcAft>
+                <a:spcPts val="400"/>
+              </a:spcAft>
+            </a:pPr>
+            <a:r>
+              <a:rPr sz="1350" b="0">
+                <a:solidFill>
+                  <a:srgbClr val="1F2A3A"/>
+                </a:solidFill>
+                <a:latin typeface="맑은 고딕"/>
+                <a:ea typeface="맑은 고딕"/>
+                <a:cs typeface="맑은 고딕"/>
+              </a:rPr>
+              <a:t>원인이 정해지지 않았으면 단정하지 않고 조사 요청으로 넘긴다</a:t>
+            </a:r>
+          </a:p>
+        </p:txBody>
+      </p:sp>
+      <p:sp>
+        <p:nvSpPr>
+          <p:cNvPr id="28" name="Rounded Rectangle 27"/>
+          <p:cNvSpPr/>
+          <p:nvPr/>
+        </p:nvSpPr>
+        <p:spPr>
+          <a:xfrm>
+            <a:off x="9303791" y="5064633"/>
+            <a:ext cx="1021080" cy="292608"/>
+          </a:xfrm>
+          <a:prstGeom prst="roundRect">
+            <a:avLst>
+              <a:gd name="adj" fmla="val 50000"/>
+            </a:avLst>
+          </a:prstGeom>
+          <a:solidFill>
+            <a:srgbClr val="5CB8F2"/>
+          </a:solidFill>
+          <a:ln>
+            <a:noFill/>
+          </a:ln>
+        </p:spPr>
+        <p:txBody>
+          <a:bodyPr rtlCol="0" anchor="ctr"/>
+          <a:lstStyle/>
+          <a:p>
+            <a:pPr algn="ctr"/>
+          </a:p>
+        </p:txBody>
+      </p:sp>
+      <p:sp>
+        <p:nvSpPr>
+          <p:cNvPr id="29" name="TextBox 28"/>
+          <p:cNvSpPr txBox="1"/>
+          <p:nvPr/>
+        </p:nvSpPr>
+        <p:spPr>
+          <a:xfrm>
+            <a:off x="9303791" y="5064633"/>
+            <a:ext cx="1021080" cy="292608"/>
           </a:xfrm>
           <a:prstGeom prst="rect">
             <a:avLst/>
@@ -27920,60 +28780,21 @@
           <a:bodyPr wrap="square" anchor="ctr"/>
           <a:lstStyle/>
           <a:p>
-            <a:pPr algn="l">
-              <a:lnSpc>
-                <a:spcPct val="110000"/>
-              </a:lnSpc>
-            </a:pPr>
-            <a:r>
-              <a:rPr sz="1400" b="0">
-                <a:solidFill>
-                  <a:srgbClr val="1F2A3A"/>
-                </a:solidFill>
-                <a:latin typeface="맑은 고딕"/>
-                <a:ea typeface="맑은 고딕"/>
-                <a:cs typeface="맑은 고딕"/>
-              </a:rPr>
-              <a:t>SUPPORTED · UNKNOWN · UNSUPPORTED</a:t>
-            </a:r>
-          </a:p>
-        </p:txBody>
-      </p:sp>
-      <p:sp>
-        <p:nvSpPr>
-          <p:cNvPr id="25" name="TextBox 24"/>
-          <p:cNvSpPr txBox="1"/>
-          <p:nvPr/>
-        </p:nvSpPr>
-        <p:spPr>
-          <a:xfrm>
-            <a:off x="9448495" y="5106923"/>
-            <a:ext cx="2103120" cy="914400"/>
-          </a:xfrm>
-          <a:prstGeom prst="rect">
-            <a:avLst/>
-          </a:prstGeom>
-          <a:noFill/>
-        </p:spPr>
-        <p:txBody>
-          <a:bodyPr wrap="square" anchor="ctr"/>
-          <a:lstStyle/>
-          <a:p>
-            <a:pPr algn="l">
-              <a:lnSpc>
-                <a:spcPct val="110000"/>
-              </a:lnSpc>
-            </a:pPr>
-            <a:r>
-              <a:rPr sz="1250" b="1">
-                <a:solidFill>
-                  <a:srgbClr val="556175"/>
-                </a:solidFill>
-                <a:latin typeface="맑은 고딕"/>
-                <a:ea typeface="맑은 고딕"/>
-                <a:cs typeface="맑은 고딕"/>
-              </a:rPr>
-              <a:t>확인됨, 확인하지 못함, 맞는 근거 없음</a:t>
+            <a:pPr algn="ctr">
+              <a:lnSpc>
+                <a:spcPct val="110000"/>
+              </a:lnSpc>
+            </a:pPr>
+            <a:r>
+              <a:rPr sz="1200" b="1">
+                <a:solidFill>
+                  <a:srgbClr val="13294B"/>
+                </a:solidFill>
+                <a:latin typeface="맑은 고딕"/>
+                <a:ea typeface="맑은 고딕"/>
+                <a:cs typeface="맑은 고딕"/>
+              </a:rPr>
+              <a:t>조사 요청</a:t>
             </a:r>
           </a:p>
         </p:txBody>
@@ -27987,6 +28808,918 @@
 </file>
 
 <file path=ppt/slides/slide38.xml><?xml version="1.0" encoding="utf-8"?>
+<p:sld xmlns:a="http://schemas.openxmlformats.org/drawingml/2006/main" xmlns:p="http://schemas.openxmlformats.org/presentationml/2006/main" xmlns:r="http://schemas.openxmlformats.org/officeDocument/2006/relationships">
+  <p:cSld>
+    <p:bg>
+      <p:bgPr>
+        <a:solidFill>
+          <a:srgbClr val="FFFFFF"/>
+        </a:solidFill>
+        <a:effectLst/>
+      </p:bgPr>
+    </p:bg>
+    <p:spTree>
+      <p:nvGrpSpPr>
+        <p:cNvPr id="1" name=""/>
+        <p:cNvGrpSpPr/>
+        <p:nvPr/>
+      </p:nvGrpSpPr>
+      <p:grpSpPr/>
+      <p:sp>
+        <p:nvSpPr>
+          <p:cNvPr id="2" name="TextBox 1"/>
+          <p:cNvSpPr txBox="1"/>
+          <p:nvPr/>
+        </p:nvSpPr>
+        <p:spPr>
+          <a:xfrm>
+            <a:off x="457200" y="329184"/>
+            <a:ext cx="11277295" cy="603504"/>
+          </a:xfrm>
+          <a:prstGeom prst="rect">
+            <a:avLst/>
+          </a:prstGeom>
+          <a:noFill/>
+        </p:spPr>
+        <p:txBody>
+          <a:bodyPr wrap="square" anchor="ctr"/>
+          <a:lstStyle/>
+          <a:p>
+            <a:pPr algn="l">
+              <a:lnSpc>
+                <a:spcPct val="110000"/>
+              </a:lnSpc>
+            </a:pPr>
+            <a:r>
+              <a:rPr sz="2800" b="1">
+                <a:solidFill>
+                  <a:srgbClr val="13294B"/>
+                </a:solidFill>
+                <a:latin typeface="맑은 고딕"/>
+                <a:ea typeface="맑은 고딕"/>
+                <a:cs typeface="맑은 고딕"/>
+              </a:rPr>
+              <a:t>오늘 다룬 핵심 개념과 주요 용어 정리</a:t>
+            </a:r>
+          </a:p>
+        </p:txBody>
+      </p:sp>
+      <p:sp>
+        <p:nvSpPr>
+          <p:cNvPr id="3" name="TextBox 2"/>
+          <p:cNvSpPr txBox="1"/>
+          <p:nvPr/>
+        </p:nvSpPr>
+        <p:spPr>
+          <a:xfrm>
+            <a:off x="457200" y="932688"/>
+            <a:ext cx="11277295" cy="420624"/>
+          </a:xfrm>
+          <a:prstGeom prst="rect">
+            <a:avLst/>
+          </a:prstGeom>
+          <a:noFill/>
+        </p:spPr>
+        <p:txBody>
+          <a:bodyPr wrap="square" anchor="ctr"/>
+          <a:lstStyle/>
+          <a:p>
+            <a:pPr algn="l">
+              <a:lnSpc>
+                <a:spcPct val="110000"/>
+              </a:lnSpc>
+            </a:pPr>
+            <a:r>
+              <a:rPr sz="1600" b="0">
+                <a:solidFill>
+                  <a:srgbClr val="556175"/>
+                </a:solidFill>
+                <a:latin typeface="맑은 고딕"/>
+                <a:ea typeface="맑은 고딕"/>
+                <a:cs typeface="맑은 고딕"/>
+              </a:rPr>
+              <a:t>이 회차에서 정식 명칭을 붙인 용어와, 그 용어의 뜻이나 쿨러 사건에서의 예를 모은다.</a:t>
+            </a:r>
+          </a:p>
+        </p:txBody>
+      </p:sp>
+      <p:sp>
+        <p:nvSpPr>
+          <p:cNvPr id="4" name="Rectangle 3"/>
+          <p:cNvSpPr/>
+          <p:nvPr/>
+        </p:nvSpPr>
+        <p:spPr>
+          <a:xfrm>
+            <a:off x="548640" y="1408176"/>
+            <a:ext cx="11094415" cy="18288"/>
+          </a:xfrm>
+          <a:prstGeom prst="rect">
+            <a:avLst/>
+          </a:prstGeom>
+          <a:solidFill>
+            <a:srgbClr val="D3D9E1"/>
+          </a:solidFill>
+          <a:ln>
+            <a:noFill/>
+          </a:ln>
+        </p:spPr>
+        <p:txBody>
+          <a:bodyPr rtlCol="0" anchor="ctr"/>
+          <a:lstStyle/>
+          <a:p>
+            <a:pPr algn="ctr"/>
+          </a:p>
+        </p:txBody>
+      </p:sp>
+      <p:sp>
+        <p:nvSpPr>
+          <p:cNvPr id="5" name="TextBox 4"/>
+          <p:cNvSpPr txBox="1"/>
+          <p:nvPr/>
+        </p:nvSpPr>
+        <p:spPr>
+          <a:xfrm>
+            <a:off x="10911535" y="6473952"/>
+            <a:ext cx="822960" cy="274320"/>
+          </a:xfrm>
+          <a:prstGeom prst="rect">
+            <a:avLst/>
+          </a:prstGeom>
+          <a:noFill/>
+        </p:spPr>
+        <p:txBody>
+          <a:bodyPr wrap="square" anchor="t"/>
+          <a:lstStyle/>
+          <a:p>
+            <a:pPr algn="r">
+              <a:lnSpc>
+                <a:spcPct val="110000"/>
+              </a:lnSpc>
+            </a:pPr>
+            <a:r>
+              <a:rPr sz="1000" b="0">
+                <a:solidFill>
+                  <a:srgbClr val="556175"/>
+                </a:solidFill>
+                <a:latin typeface="맑은 고딕"/>
+                <a:ea typeface="맑은 고딕"/>
+                <a:cs typeface="맑은 고딕"/>
+              </a:rPr>
+              <a:t>38</a:t>
+            </a:r>
+          </a:p>
+        </p:txBody>
+      </p:sp>
+      <p:sp>
+        <p:nvSpPr>
+          <p:cNvPr id="6" name="Rounded Rectangle 5"/>
+          <p:cNvSpPr/>
+          <p:nvPr/>
+        </p:nvSpPr>
+        <p:spPr>
+          <a:xfrm>
+            <a:off x="548640" y="1961387"/>
+            <a:ext cx="11094415" cy="347472"/>
+          </a:xfrm>
+          <a:prstGeom prst="roundRect">
+            <a:avLst>
+              <a:gd name="adj" fmla="val 12000"/>
+            </a:avLst>
+          </a:prstGeom>
+          <a:solidFill>
+            <a:srgbClr val="13294B"/>
+          </a:solidFill>
+          <a:ln>
+            <a:noFill/>
+          </a:ln>
+        </p:spPr>
+        <p:txBody>
+          <a:bodyPr rtlCol="0" anchor="ctr"/>
+          <a:lstStyle/>
+          <a:p>
+            <a:pPr algn="ctr"/>
+          </a:p>
+        </p:txBody>
+      </p:sp>
+      <p:sp>
+        <p:nvSpPr>
+          <p:cNvPr id="7" name="TextBox 6"/>
+          <p:cNvSpPr txBox="1"/>
+          <p:nvPr/>
+        </p:nvSpPr>
+        <p:spPr>
+          <a:xfrm>
+            <a:off x="685800" y="1961387"/>
+            <a:ext cx="2514600" cy="347472"/>
+          </a:xfrm>
+          <a:prstGeom prst="rect">
+            <a:avLst/>
+          </a:prstGeom>
+          <a:noFill/>
+        </p:spPr>
+        <p:txBody>
+          <a:bodyPr wrap="square" anchor="ctr"/>
+          <a:lstStyle/>
+          <a:p>
+            <a:pPr algn="l">
+              <a:lnSpc>
+                <a:spcPct val="110000"/>
+              </a:lnSpc>
+            </a:pPr>
+            <a:r>
+              <a:rPr sz="1300" b="1">
+                <a:solidFill>
+                  <a:srgbClr val="FFFFFF"/>
+                </a:solidFill>
+                <a:latin typeface="맑은 고딕"/>
+                <a:ea typeface="맑은 고딕"/>
+                <a:cs typeface="맑은 고딕"/>
+              </a:rPr>
+              <a:t>용어</a:t>
+            </a:r>
+          </a:p>
+        </p:txBody>
+      </p:sp>
+      <p:sp>
+        <p:nvSpPr>
+          <p:cNvPr id="8" name="TextBox 7"/>
+          <p:cNvSpPr txBox="1"/>
+          <p:nvPr/>
+        </p:nvSpPr>
+        <p:spPr>
+          <a:xfrm>
+            <a:off x="3200400" y="1961387"/>
+            <a:ext cx="6248095" cy="347472"/>
+          </a:xfrm>
+          <a:prstGeom prst="rect">
+            <a:avLst/>
+          </a:prstGeom>
+          <a:noFill/>
+        </p:spPr>
+        <p:txBody>
+          <a:bodyPr wrap="square" anchor="ctr"/>
+          <a:lstStyle/>
+          <a:p>
+            <a:pPr algn="l">
+              <a:lnSpc>
+                <a:spcPct val="110000"/>
+              </a:lnSpc>
+            </a:pPr>
+            <a:r>
+              <a:rPr sz="1300" b="1">
+                <a:solidFill>
+                  <a:srgbClr val="FFFFFF"/>
+                </a:solidFill>
+                <a:latin typeface="맑은 고딕"/>
+                <a:ea typeface="맑은 고딕"/>
+                <a:cs typeface="맑은 고딕"/>
+              </a:rPr>
+              <a:t>정식 명칭</a:t>
+            </a:r>
+          </a:p>
+        </p:txBody>
+      </p:sp>
+      <p:sp>
+        <p:nvSpPr>
+          <p:cNvPr id="9" name="TextBox 8"/>
+          <p:cNvSpPr txBox="1"/>
+          <p:nvPr/>
+        </p:nvSpPr>
+        <p:spPr>
+          <a:xfrm>
+            <a:off x="9448495" y="1961387"/>
+            <a:ext cx="2194560" cy="347472"/>
+          </a:xfrm>
+          <a:prstGeom prst="rect">
+            <a:avLst/>
+          </a:prstGeom>
+          <a:noFill/>
+        </p:spPr>
+        <p:txBody>
+          <a:bodyPr wrap="square" anchor="ctr"/>
+          <a:lstStyle/>
+          <a:p>
+            <a:pPr algn="l">
+              <a:lnSpc>
+                <a:spcPct val="110000"/>
+              </a:lnSpc>
+            </a:pPr>
+            <a:r>
+              <a:rPr sz="1300" b="1">
+                <a:solidFill>
+                  <a:srgbClr val="FFFFFF"/>
+                </a:solidFill>
+                <a:latin typeface="맑은 고딕"/>
+                <a:ea typeface="맑은 고딕"/>
+                <a:cs typeface="맑은 고딕"/>
+              </a:rPr>
+              <a:t>뜻 또는 쿨러 사건의 예</a:t>
+            </a:r>
+          </a:p>
+        </p:txBody>
+      </p:sp>
+      <p:sp>
+        <p:nvSpPr>
+          <p:cNvPr id="10" name="Rounded Rectangle 9"/>
+          <p:cNvSpPr/>
+          <p:nvPr/>
+        </p:nvSpPr>
+        <p:spPr>
+          <a:xfrm>
+            <a:off x="548640" y="2395727"/>
+            <a:ext cx="11094415" cy="850392"/>
+          </a:xfrm>
+          <a:prstGeom prst="roundRect">
+            <a:avLst>
+              <a:gd name="adj" fmla="val 8000"/>
+            </a:avLst>
+          </a:prstGeom>
+          <a:solidFill>
+            <a:srgbClr val="F3F6F9"/>
+          </a:solidFill>
+          <a:ln>
+            <a:noFill/>
+          </a:ln>
+        </p:spPr>
+        <p:txBody>
+          <a:bodyPr rtlCol="0" anchor="ctr"/>
+          <a:lstStyle/>
+          <a:p>
+            <a:pPr algn="ctr"/>
+          </a:p>
+        </p:txBody>
+      </p:sp>
+      <p:sp>
+        <p:nvSpPr>
+          <p:cNvPr id="11" name="TextBox 10"/>
+          <p:cNvSpPr txBox="1"/>
+          <p:nvPr/>
+        </p:nvSpPr>
+        <p:spPr>
+          <a:xfrm>
+            <a:off x="685800" y="2363723"/>
+            <a:ext cx="2514600" cy="914400"/>
+          </a:xfrm>
+          <a:prstGeom prst="rect">
+            <a:avLst/>
+          </a:prstGeom>
+          <a:noFill/>
+        </p:spPr>
+        <p:txBody>
+          <a:bodyPr wrap="square" anchor="ctr"/>
+          <a:lstStyle/>
+          <a:p>
+            <a:pPr algn="l">
+              <a:lnSpc>
+                <a:spcPct val="110000"/>
+              </a:lnSpc>
+            </a:pPr>
+            <a:r>
+              <a:rPr sz="1600" b="1">
+                <a:solidFill>
+                  <a:srgbClr val="13294B"/>
+                </a:solidFill>
+                <a:latin typeface="맑은 고딕"/>
+                <a:ea typeface="맑은 고딕"/>
+                <a:cs typeface="맑은 고딕"/>
+              </a:rPr>
+              <a:t>에이전트</a:t>
+            </a:r>
+          </a:p>
+        </p:txBody>
+      </p:sp>
+      <p:sp>
+        <p:nvSpPr>
+          <p:cNvPr id="12" name="TextBox 11"/>
+          <p:cNvSpPr txBox="1"/>
+          <p:nvPr/>
+        </p:nvSpPr>
+        <p:spPr>
+          <a:xfrm>
+            <a:off x="3200400" y="2363723"/>
+            <a:ext cx="6156655" cy="914400"/>
+          </a:xfrm>
+          <a:prstGeom prst="rect">
+            <a:avLst/>
+          </a:prstGeom>
+          <a:noFill/>
+        </p:spPr>
+        <p:txBody>
+          <a:bodyPr wrap="square" anchor="ctr"/>
+          <a:lstStyle/>
+          <a:p>
+            <a:pPr algn="l">
+              <a:lnSpc>
+                <a:spcPct val="110000"/>
+              </a:lnSpc>
+            </a:pPr>
+            <a:r>
+              <a:rPr sz="1400" b="0">
+                <a:solidFill>
+                  <a:srgbClr val="1F2A3A"/>
+                </a:solidFill>
+                <a:latin typeface="맑은 고딕"/>
+                <a:ea typeface="맑은 고딕"/>
+                <a:cs typeface="맑은 고딕"/>
+              </a:rPr>
+              <a:t>AI Agent</a:t>
+            </a:r>
+          </a:p>
+        </p:txBody>
+      </p:sp>
+      <p:sp>
+        <p:nvSpPr>
+          <p:cNvPr id="13" name="TextBox 12"/>
+          <p:cNvSpPr txBox="1"/>
+          <p:nvPr/>
+        </p:nvSpPr>
+        <p:spPr>
+          <a:xfrm>
+            <a:off x="9448495" y="2363723"/>
+            <a:ext cx="2103120" cy="914400"/>
+          </a:xfrm>
+          <a:prstGeom prst="rect">
+            <a:avLst/>
+          </a:prstGeom>
+          <a:noFill/>
+        </p:spPr>
+        <p:txBody>
+          <a:bodyPr wrap="square" anchor="ctr"/>
+          <a:lstStyle/>
+          <a:p>
+            <a:pPr algn="l">
+              <a:lnSpc>
+                <a:spcPct val="110000"/>
+              </a:lnSpc>
+            </a:pPr>
+            <a:r>
+              <a:rPr sz="1250" b="1">
+                <a:solidFill>
+                  <a:srgbClr val="556175"/>
+                </a:solidFill>
+                <a:latin typeface="맑은 고딕"/>
+                <a:ea typeface="맑은 고딕"/>
+                <a:cs typeface="맑은 고딕"/>
+              </a:rPr>
+              <a:t>냉각 긴급 대응 에이전트</a:t>
+            </a:r>
+          </a:p>
+        </p:txBody>
+      </p:sp>
+      <p:sp>
+        <p:nvSpPr>
+          <p:cNvPr id="14" name="Rounded Rectangle 13"/>
+          <p:cNvSpPr/>
+          <p:nvPr/>
+        </p:nvSpPr>
+        <p:spPr>
+          <a:xfrm>
+            <a:off x="548640" y="3310127"/>
+            <a:ext cx="11094415" cy="850392"/>
+          </a:xfrm>
+          <a:prstGeom prst="roundRect">
+            <a:avLst>
+              <a:gd name="adj" fmla="val 8000"/>
+            </a:avLst>
+          </a:prstGeom>
+          <a:solidFill>
+            <a:srgbClr val="F3F6F9"/>
+          </a:solidFill>
+          <a:ln>
+            <a:noFill/>
+          </a:ln>
+        </p:spPr>
+        <p:txBody>
+          <a:bodyPr rtlCol="0" anchor="ctr"/>
+          <a:lstStyle/>
+          <a:p>
+            <a:pPr algn="ctr"/>
+          </a:p>
+        </p:txBody>
+      </p:sp>
+      <p:sp>
+        <p:nvSpPr>
+          <p:cNvPr id="15" name="TextBox 14"/>
+          <p:cNvSpPr txBox="1"/>
+          <p:nvPr/>
+        </p:nvSpPr>
+        <p:spPr>
+          <a:xfrm>
+            <a:off x="685800" y="3278123"/>
+            <a:ext cx="2514600" cy="914400"/>
+          </a:xfrm>
+          <a:prstGeom prst="rect">
+            <a:avLst/>
+          </a:prstGeom>
+          <a:noFill/>
+        </p:spPr>
+        <p:txBody>
+          <a:bodyPr wrap="square" anchor="ctr"/>
+          <a:lstStyle/>
+          <a:p>
+            <a:pPr algn="l">
+              <a:lnSpc>
+                <a:spcPct val="110000"/>
+              </a:lnSpc>
+            </a:pPr>
+            <a:r>
+              <a:rPr sz="1600" b="1">
+                <a:solidFill>
+                  <a:srgbClr val="13294B"/>
+                </a:solidFill>
+                <a:latin typeface="맑은 고딕"/>
+                <a:ea typeface="맑은 고딕"/>
+                <a:cs typeface="맑은 고딕"/>
+              </a:rPr>
+              <a:t>도구</a:t>
+            </a:r>
+          </a:p>
+        </p:txBody>
+      </p:sp>
+      <p:sp>
+        <p:nvSpPr>
+          <p:cNvPr id="16" name="TextBox 15"/>
+          <p:cNvSpPr txBox="1"/>
+          <p:nvPr/>
+        </p:nvSpPr>
+        <p:spPr>
+          <a:xfrm>
+            <a:off x="3200400" y="3278123"/>
+            <a:ext cx="6156655" cy="914400"/>
+          </a:xfrm>
+          <a:prstGeom prst="rect">
+            <a:avLst/>
+          </a:prstGeom>
+          <a:noFill/>
+        </p:spPr>
+        <p:txBody>
+          <a:bodyPr wrap="square" anchor="ctr"/>
+          <a:lstStyle/>
+          <a:p>
+            <a:pPr algn="l">
+              <a:lnSpc>
+                <a:spcPct val="110000"/>
+              </a:lnSpc>
+            </a:pPr>
+            <a:r>
+              <a:rPr sz="1400" b="0">
+                <a:solidFill>
+                  <a:srgbClr val="1F2A3A"/>
+                </a:solidFill>
+                <a:latin typeface="맑은 고딕"/>
+                <a:ea typeface="맑은 고딕"/>
+                <a:cs typeface="맑은 고딕"/>
+              </a:rPr>
+              <a:t>Tool</a:t>
+            </a:r>
+          </a:p>
+        </p:txBody>
+      </p:sp>
+      <p:sp>
+        <p:nvSpPr>
+          <p:cNvPr id="17" name="TextBox 16"/>
+          <p:cNvSpPr txBox="1"/>
+          <p:nvPr/>
+        </p:nvSpPr>
+        <p:spPr>
+          <a:xfrm>
+            <a:off x="9448495" y="3278123"/>
+            <a:ext cx="2103120" cy="914400"/>
+          </a:xfrm>
+          <a:prstGeom prst="rect">
+            <a:avLst/>
+          </a:prstGeom>
+          <a:noFill/>
+        </p:spPr>
+        <p:txBody>
+          <a:bodyPr wrap="square" anchor="ctr"/>
+          <a:lstStyle/>
+          <a:p>
+            <a:pPr algn="l">
+              <a:lnSpc>
+                <a:spcPct val="110000"/>
+              </a:lnSpc>
+            </a:pPr>
+            <a:r>
+              <a:rPr sz="1250" b="1">
+                <a:solidFill>
+                  <a:srgbClr val="556175"/>
+                </a:solidFill>
+                <a:latin typeface="맑은 고딕"/>
+                <a:ea typeface="맑은 고딕"/>
+                <a:cs typeface="맑은 고딕"/>
+              </a:rPr>
+              <a:t>원인 진단, 대안 평가, 판단 제출</a:t>
+            </a:r>
+          </a:p>
+        </p:txBody>
+      </p:sp>
+      <p:sp>
+        <p:nvSpPr>
+          <p:cNvPr id="18" name="Rounded Rectangle 17"/>
+          <p:cNvSpPr/>
+          <p:nvPr/>
+        </p:nvSpPr>
+        <p:spPr>
+          <a:xfrm>
+            <a:off x="548640" y="4224527"/>
+            <a:ext cx="11094415" cy="850392"/>
+          </a:xfrm>
+          <a:prstGeom prst="roundRect">
+            <a:avLst>
+              <a:gd name="adj" fmla="val 8000"/>
+            </a:avLst>
+          </a:prstGeom>
+          <a:solidFill>
+            <a:srgbClr val="F3F6F9"/>
+          </a:solidFill>
+          <a:ln>
+            <a:noFill/>
+          </a:ln>
+        </p:spPr>
+        <p:txBody>
+          <a:bodyPr rtlCol="0" anchor="ctr"/>
+          <a:lstStyle/>
+          <a:p>
+            <a:pPr algn="ctr"/>
+          </a:p>
+        </p:txBody>
+      </p:sp>
+      <p:sp>
+        <p:nvSpPr>
+          <p:cNvPr id="19" name="TextBox 18"/>
+          <p:cNvSpPr txBox="1"/>
+          <p:nvPr/>
+        </p:nvSpPr>
+        <p:spPr>
+          <a:xfrm>
+            <a:off x="685800" y="4192523"/>
+            <a:ext cx="2514600" cy="914400"/>
+          </a:xfrm>
+          <a:prstGeom prst="rect">
+            <a:avLst/>
+          </a:prstGeom>
+          <a:noFill/>
+        </p:spPr>
+        <p:txBody>
+          <a:bodyPr wrap="square" anchor="ctr"/>
+          <a:lstStyle/>
+          <a:p>
+            <a:pPr algn="l">
+              <a:lnSpc>
+                <a:spcPct val="110000"/>
+              </a:lnSpc>
+            </a:pPr>
+            <a:r>
+              <a:rPr sz="1600" b="1">
+                <a:solidFill>
+                  <a:srgbClr val="13294B"/>
+                </a:solidFill>
+                <a:latin typeface="맑은 고딕"/>
+                <a:ea typeface="맑은 고딕"/>
+                <a:cs typeface="맑은 고딕"/>
+              </a:rPr>
+              <a:t>RAG</a:t>
+            </a:r>
+          </a:p>
+        </p:txBody>
+      </p:sp>
+      <p:sp>
+        <p:nvSpPr>
+          <p:cNvPr id="20" name="TextBox 19"/>
+          <p:cNvSpPr txBox="1"/>
+          <p:nvPr/>
+        </p:nvSpPr>
+        <p:spPr>
+          <a:xfrm>
+            <a:off x="3200400" y="4192523"/>
+            <a:ext cx="6156655" cy="914400"/>
+          </a:xfrm>
+          <a:prstGeom prst="rect">
+            <a:avLst/>
+          </a:prstGeom>
+          <a:noFill/>
+        </p:spPr>
+        <p:txBody>
+          <a:bodyPr wrap="square" anchor="ctr"/>
+          <a:lstStyle/>
+          <a:p>
+            <a:pPr algn="l">
+              <a:lnSpc>
+                <a:spcPct val="110000"/>
+              </a:lnSpc>
+            </a:pPr>
+            <a:r>
+              <a:rPr sz="1400" b="0">
+                <a:solidFill>
+                  <a:srgbClr val="1F2A3A"/>
+                </a:solidFill>
+                <a:latin typeface="맑은 고딕"/>
+                <a:ea typeface="맑은 고딕"/>
+                <a:cs typeface="맑은 고딕"/>
+              </a:rPr>
+              <a:t>Retrieval-Augmented Generation</a:t>
+            </a:r>
+          </a:p>
+        </p:txBody>
+      </p:sp>
+      <p:sp>
+        <p:nvSpPr>
+          <p:cNvPr id="21" name="TextBox 20"/>
+          <p:cNvSpPr txBox="1"/>
+          <p:nvPr/>
+        </p:nvSpPr>
+        <p:spPr>
+          <a:xfrm>
+            <a:off x="9448495" y="4192523"/>
+            <a:ext cx="2103120" cy="914400"/>
+          </a:xfrm>
+          <a:prstGeom prst="rect">
+            <a:avLst/>
+          </a:prstGeom>
+          <a:noFill/>
+        </p:spPr>
+        <p:txBody>
+          <a:bodyPr wrap="square" anchor="ctr"/>
+          <a:lstStyle/>
+          <a:p>
+            <a:pPr algn="l">
+              <a:lnSpc>
+                <a:spcPct val="110000"/>
+              </a:lnSpc>
+            </a:pPr>
+            <a:r>
+              <a:rPr sz="1250" b="1">
+                <a:solidFill>
+                  <a:srgbClr val="556175"/>
+                </a:solidFill>
+                <a:latin typeface="맑은 고딕"/>
+                <a:ea typeface="맑은 고딕"/>
+                <a:cs typeface="맑은 고딕"/>
+              </a:rPr>
+              <a:t>문서를 찾아 함께 읽히는 방식</a:t>
+            </a:r>
+          </a:p>
+        </p:txBody>
+      </p:sp>
+      <p:sp>
+        <p:nvSpPr>
+          <p:cNvPr id="22" name="Rounded Rectangle 21"/>
+          <p:cNvSpPr/>
+          <p:nvPr/>
+        </p:nvSpPr>
+        <p:spPr>
+          <a:xfrm>
+            <a:off x="548640" y="5138927"/>
+            <a:ext cx="11094415" cy="850392"/>
+          </a:xfrm>
+          <a:prstGeom prst="roundRect">
+            <a:avLst>
+              <a:gd name="adj" fmla="val 8000"/>
+            </a:avLst>
+          </a:prstGeom>
+          <a:solidFill>
+            <a:srgbClr val="F3F6F9"/>
+          </a:solidFill>
+          <a:ln>
+            <a:noFill/>
+          </a:ln>
+        </p:spPr>
+        <p:txBody>
+          <a:bodyPr rtlCol="0" anchor="ctr"/>
+          <a:lstStyle/>
+          <a:p>
+            <a:pPr algn="ctr"/>
+          </a:p>
+        </p:txBody>
+      </p:sp>
+      <p:sp>
+        <p:nvSpPr>
+          <p:cNvPr id="23" name="TextBox 22"/>
+          <p:cNvSpPr txBox="1"/>
+          <p:nvPr/>
+        </p:nvSpPr>
+        <p:spPr>
+          <a:xfrm>
+            <a:off x="685800" y="5106923"/>
+            <a:ext cx="2514600" cy="914400"/>
+          </a:xfrm>
+          <a:prstGeom prst="rect">
+            <a:avLst/>
+          </a:prstGeom>
+          <a:noFill/>
+        </p:spPr>
+        <p:txBody>
+          <a:bodyPr wrap="square" anchor="ctr"/>
+          <a:lstStyle/>
+          <a:p>
+            <a:pPr algn="l">
+              <a:lnSpc>
+                <a:spcPct val="110000"/>
+              </a:lnSpc>
+            </a:pPr>
+            <a:r>
+              <a:rPr sz="1600" b="1">
+                <a:solidFill>
+                  <a:srgbClr val="13294B"/>
+                </a:solidFill>
+                <a:latin typeface="맑은 고딕"/>
+                <a:ea typeface="맑은 고딕"/>
+                <a:cs typeface="맑은 고딕"/>
+              </a:rPr>
+              <a:t>근거의 상태</a:t>
+            </a:r>
+          </a:p>
+        </p:txBody>
+      </p:sp>
+      <p:sp>
+        <p:nvSpPr>
+          <p:cNvPr id="24" name="TextBox 23"/>
+          <p:cNvSpPr txBox="1"/>
+          <p:nvPr/>
+        </p:nvSpPr>
+        <p:spPr>
+          <a:xfrm>
+            <a:off x="3200400" y="5106923"/>
+            <a:ext cx="6156655" cy="914400"/>
+          </a:xfrm>
+          <a:prstGeom prst="rect">
+            <a:avLst/>
+          </a:prstGeom>
+          <a:noFill/>
+        </p:spPr>
+        <p:txBody>
+          <a:bodyPr wrap="square" anchor="ctr"/>
+          <a:lstStyle/>
+          <a:p>
+            <a:pPr algn="l">
+              <a:lnSpc>
+                <a:spcPct val="110000"/>
+              </a:lnSpc>
+            </a:pPr>
+            <a:r>
+              <a:rPr sz="1400" b="0">
+                <a:solidFill>
+                  <a:srgbClr val="1F2A3A"/>
+                </a:solidFill>
+                <a:latin typeface="맑은 고딕"/>
+                <a:ea typeface="맑은 고딕"/>
+                <a:cs typeface="맑은 고딕"/>
+              </a:rPr>
+              <a:t>SUPPORTED · UNKNOWN · UNSUPPORTED</a:t>
+            </a:r>
+          </a:p>
+        </p:txBody>
+      </p:sp>
+      <p:sp>
+        <p:nvSpPr>
+          <p:cNvPr id="25" name="TextBox 24"/>
+          <p:cNvSpPr txBox="1"/>
+          <p:nvPr/>
+        </p:nvSpPr>
+        <p:spPr>
+          <a:xfrm>
+            <a:off x="9448495" y="5106923"/>
+            <a:ext cx="2103120" cy="914400"/>
+          </a:xfrm>
+          <a:prstGeom prst="rect">
+            <a:avLst/>
+          </a:prstGeom>
+          <a:noFill/>
+        </p:spPr>
+        <p:txBody>
+          <a:bodyPr wrap="square" anchor="ctr"/>
+          <a:lstStyle/>
+          <a:p>
+            <a:pPr algn="l">
+              <a:lnSpc>
+                <a:spcPct val="110000"/>
+              </a:lnSpc>
+            </a:pPr>
+            <a:r>
+              <a:rPr sz="1250" b="1">
+                <a:solidFill>
+                  <a:srgbClr val="556175"/>
+                </a:solidFill>
+                <a:latin typeface="맑은 고딕"/>
+                <a:ea typeface="맑은 고딕"/>
+                <a:cs typeface="맑은 고딕"/>
+              </a:rPr>
+              <a:t>확인됨, 확인하지 못함, 맞는 근거 없음</a:t>
+            </a:r>
+          </a:p>
+        </p:txBody>
+      </p:sp>
+    </p:spTree>
+  </p:cSld>
+  <p:clrMapOvr>
+    <a:masterClrMapping/>
+  </p:clrMapOvr>
+</p:sld>
+</file>
+
+<file path=ppt/slides/slide39.xml><?xml version="1.0" encoding="utf-8"?>
 <p:sld xmlns:a="http://schemas.openxmlformats.org/drawingml/2006/main" xmlns:p="http://schemas.openxmlformats.org/presentationml/2006/main" xmlns:r="http://schemas.openxmlformats.org/officeDocument/2006/relationships">
   <p:cSld>
     <p:bg>
@@ -28146,800 +29879,6 @@
                 <a:cs typeface="맑은 고딕"/>
               </a:rPr>
               <a:t>배운 내용을 바탕으로 정답을 맞춰보세요.</a:t>
-            </a:r>
-          </a:p>
-        </p:txBody>
-      </p:sp>
-    </p:spTree>
-  </p:cSld>
-  <p:clrMapOvr>
-    <a:masterClrMapping/>
-  </p:clrMapOvr>
-</p:sld>
-</file>
-
-<file path=ppt/slides/slide39.xml><?xml version="1.0" encoding="utf-8"?>
-<p:sld xmlns:a="http://schemas.openxmlformats.org/drawingml/2006/main" xmlns:p="http://schemas.openxmlformats.org/presentationml/2006/main" xmlns:r="http://schemas.openxmlformats.org/officeDocument/2006/relationships">
-  <p:cSld>
-    <p:bg>
-      <p:bgPr>
-        <a:solidFill>
-          <a:srgbClr val="FFFFFF"/>
-        </a:solidFill>
-        <a:effectLst/>
-      </p:bgPr>
-    </p:bg>
-    <p:spTree>
-      <p:nvGrpSpPr>
-        <p:cNvPr id="1" name=""/>
-        <p:cNvGrpSpPr/>
-        <p:nvPr/>
-      </p:nvGrpSpPr>
-      <p:grpSpPr/>
-      <p:sp>
-        <p:nvSpPr>
-          <p:cNvPr id="2" name="TextBox 1"/>
-          <p:cNvSpPr txBox="1"/>
-          <p:nvPr/>
-        </p:nvSpPr>
-        <p:spPr>
-          <a:xfrm>
-            <a:off x="457200" y="329184"/>
-            <a:ext cx="11277295" cy="603504"/>
-          </a:xfrm>
-          <a:prstGeom prst="rect">
-            <a:avLst/>
-          </a:prstGeom>
-          <a:noFill/>
-        </p:spPr>
-        <p:txBody>
-          <a:bodyPr wrap="square" anchor="ctr"/>
-          <a:lstStyle/>
-          <a:p>
-            <a:pPr algn="l">
-              <a:lnSpc>
-                <a:spcPct val="110000"/>
-              </a:lnSpc>
-            </a:pPr>
-            <a:r>
-              <a:rPr sz="2800" b="1">
-                <a:solidFill>
-                  <a:srgbClr val="13294B"/>
-                </a:solidFill>
-                <a:latin typeface="맑은 고딕"/>
-                <a:ea typeface="맑은 고딕"/>
-                <a:cs typeface="맑은 고딕"/>
-              </a:rPr>
-              <a:t>Quiz 1. 처리 기록의 한 장면</a:t>
-            </a:r>
-          </a:p>
-        </p:txBody>
-      </p:sp>
-      <p:sp>
-        <p:nvSpPr>
-          <p:cNvPr id="3" name="TextBox 2"/>
-          <p:cNvSpPr txBox="1"/>
-          <p:nvPr/>
-        </p:nvSpPr>
-        <p:spPr>
-          <a:xfrm>
-            <a:off x="457200" y="932688"/>
-            <a:ext cx="11277295" cy="420624"/>
-          </a:xfrm>
-          <a:prstGeom prst="rect">
-            <a:avLst/>
-          </a:prstGeom>
-          <a:noFill/>
-        </p:spPr>
-        <p:txBody>
-          <a:bodyPr wrap="square" anchor="ctr"/>
-          <a:lstStyle/>
-          <a:p>
-            <a:pPr algn="l">
-              <a:lnSpc>
-                <a:spcPct val="110000"/>
-              </a:lnSpc>
-            </a:pPr>
-            <a:r>
-              <a:rPr sz="1600" b="0">
-                <a:solidFill>
-                  <a:srgbClr val="556175"/>
-                </a:solidFill>
-                <a:latin typeface="맑은 고딕"/>
-                <a:ea typeface="맑은 고딕"/>
-                <a:cs typeface="맑은 고딕"/>
-              </a:rPr>
-              <a:t>에이전트가 원인 진단을 부른 뒤, 그 결과에 든 원인과 고장 유형의 식별자를 넣어 대안 평가를 불렀다.</a:t>
-            </a:r>
-          </a:p>
-        </p:txBody>
-      </p:sp>
-      <p:sp>
-        <p:nvSpPr>
-          <p:cNvPr id="4" name="Rectangle 3"/>
-          <p:cNvSpPr/>
-          <p:nvPr/>
-        </p:nvSpPr>
-        <p:spPr>
-          <a:xfrm>
-            <a:off x="548640" y="1408176"/>
-            <a:ext cx="11094415" cy="18288"/>
-          </a:xfrm>
-          <a:prstGeom prst="rect">
-            <a:avLst/>
-          </a:prstGeom>
-          <a:solidFill>
-            <a:srgbClr val="D3D9E1"/>
-          </a:solidFill>
-          <a:ln>
-            <a:noFill/>
-          </a:ln>
-        </p:spPr>
-        <p:txBody>
-          <a:bodyPr rtlCol="0" anchor="ctr"/>
-          <a:lstStyle/>
-          <a:p>
-            <a:pPr algn="ctr"/>
-          </a:p>
-        </p:txBody>
-      </p:sp>
-      <p:sp>
-        <p:nvSpPr>
-          <p:cNvPr id="5" name="TextBox 4"/>
-          <p:cNvSpPr txBox="1"/>
-          <p:nvPr/>
-        </p:nvSpPr>
-        <p:spPr>
-          <a:xfrm>
-            <a:off x="10911535" y="6473952"/>
-            <a:ext cx="822960" cy="274320"/>
-          </a:xfrm>
-          <a:prstGeom prst="rect">
-            <a:avLst/>
-          </a:prstGeom>
-          <a:noFill/>
-        </p:spPr>
-        <p:txBody>
-          <a:bodyPr wrap="square" anchor="t"/>
-          <a:lstStyle/>
-          <a:p>
-            <a:pPr algn="r">
-              <a:lnSpc>
-                <a:spcPct val="110000"/>
-              </a:lnSpc>
-            </a:pPr>
-            <a:r>
-              <a:rPr sz="1000" b="0">
-                <a:solidFill>
-                  <a:srgbClr val="556175"/>
-                </a:solidFill>
-                <a:latin typeface="맑은 고딕"/>
-                <a:ea typeface="맑은 고딕"/>
-                <a:cs typeface="맑은 고딕"/>
-              </a:rPr>
-              <a:t>39</a:t>
-            </a:r>
-          </a:p>
-        </p:txBody>
-      </p:sp>
-      <p:sp>
-        <p:nvSpPr>
-          <p:cNvPr id="6" name="Rounded Rectangle 5"/>
-          <p:cNvSpPr/>
-          <p:nvPr/>
-        </p:nvSpPr>
-        <p:spPr>
-          <a:xfrm>
-            <a:off x="548640" y="1627632"/>
-            <a:ext cx="11094415" cy="704088"/>
-          </a:xfrm>
-          <a:prstGeom prst="roundRect">
-            <a:avLst>
-              <a:gd name="adj" fmla="val 5000"/>
-            </a:avLst>
-          </a:prstGeom>
-          <a:solidFill>
-            <a:srgbClr val="E7F3FD"/>
-          </a:solidFill>
-          <a:ln>
-            <a:noFill/>
-          </a:ln>
-        </p:spPr>
-        <p:txBody>
-          <a:bodyPr rtlCol="0" anchor="ctr"/>
-          <a:lstStyle/>
-          <a:p>
-            <a:pPr algn="ctr"/>
-          </a:p>
-        </p:txBody>
-      </p:sp>
-      <p:sp>
-        <p:nvSpPr>
-          <p:cNvPr id="7" name="TextBox 6"/>
-          <p:cNvSpPr txBox="1"/>
-          <p:nvPr/>
-        </p:nvSpPr>
-        <p:spPr>
-          <a:xfrm>
-            <a:off x="777240" y="1627632"/>
-            <a:ext cx="10637215" cy="704088"/>
-          </a:xfrm>
-          <a:prstGeom prst="rect">
-            <a:avLst/>
-          </a:prstGeom>
-          <a:noFill/>
-        </p:spPr>
-        <p:txBody>
-          <a:bodyPr wrap="square" anchor="ctr"/>
-          <a:lstStyle/>
-          <a:p>
-            <a:pPr algn="l">
-              <a:lnSpc>
-                <a:spcPct val="110000"/>
-              </a:lnSpc>
-            </a:pPr>
-            <a:r>
-              <a:rPr sz="1900" b="1">
-                <a:solidFill>
-                  <a:srgbClr val="13294B"/>
-                </a:solidFill>
-                <a:latin typeface="맑은 고딕"/>
-                <a:ea typeface="맑은 고딕"/>
-                <a:cs typeface="맑은 고딕"/>
-              </a:rPr>
-              <a:t>이 장면이 보여 주는 실행 고리의 단계는?</a:t>
-            </a:r>
-          </a:p>
-        </p:txBody>
-      </p:sp>
-      <p:sp>
-        <p:nvSpPr>
-          <p:cNvPr id="8" name="Rounded Rectangle 7"/>
-          <p:cNvSpPr/>
-          <p:nvPr/>
-        </p:nvSpPr>
-        <p:spPr>
-          <a:xfrm>
-            <a:off x="548640" y="2560320"/>
-            <a:ext cx="11094415" cy="822960"/>
-          </a:xfrm>
-          <a:prstGeom prst="roundRect">
-            <a:avLst>
-              <a:gd name="adj" fmla="val 8000"/>
-            </a:avLst>
-          </a:prstGeom>
-          <a:solidFill>
-            <a:srgbClr val="F3F6F9"/>
-          </a:solidFill>
-          <a:ln>
-            <a:noFill/>
-          </a:ln>
-        </p:spPr>
-        <p:txBody>
-          <a:bodyPr rtlCol="0" anchor="ctr"/>
-          <a:lstStyle/>
-          <a:p>
-            <a:pPr algn="ctr"/>
-          </a:p>
-        </p:txBody>
-      </p:sp>
-      <p:sp>
-        <p:nvSpPr>
-          <p:cNvPr id="9" name="Oval 8"/>
-          <p:cNvSpPr/>
-          <p:nvPr/>
-        </p:nvSpPr>
-        <p:spPr>
-          <a:xfrm>
-            <a:off x="731520" y="2788920"/>
-            <a:ext cx="365760" cy="365760"/>
-          </a:xfrm>
-          <a:prstGeom prst="ellipse">
-            <a:avLst/>
-          </a:prstGeom>
-          <a:solidFill>
-            <a:srgbClr val="13294B"/>
-          </a:solidFill>
-          <a:ln>
-            <a:noFill/>
-          </a:ln>
-        </p:spPr>
-        <p:txBody>
-          <a:bodyPr rtlCol="0" anchor="ctr"/>
-          <a:lstStyle/>
-          <a:p>
-            <a:pPr algn="ctr"/>
-          </a:p>
-        </p:txBody>
-      </p:sp>
-      <p:sp>
-        <p:nvSpPr>
-          <p:cNvPr id="10" name="TextBox 9"/>
-          <p:cNvSpPr txBox="1"/>
-          <p:nvPr/>
-        </p:nvSpPr>
-        <p:spPr>
-          <a:xfrm>
-            <a:off x="731520" y="2788920"/>
-            <a:ext cx="365760" cy="365760"/>
-          </a:xfrm>
-          <a:prstGeom prst="rect">
-            <a:avLst/>
-          </a:prstGeom>
-          <a:noFill/>
-        </p:spPr>
-        <p:txBody>
-          <a:bodyPr wrap="square" anchor="ctr"/>
-          <a:lstStyle/>
-          <a:p>
-            <a:pPr algn="ctr">
-              <a:lnSpc>
-                <a:spcPct val="110000"/>
-              </a:lnSpc>
-            </a:pPr>
-            <a:r>
-              <a:rPr sz="1300" b="1">
-                <a:solidFill>
-                  <a:srgbClr val="FFFFFF"/>
-                </a:solidFill>
-                <a:latin typeface="맑은 고딕"/>
-                <a:ea typeface="맑은 고딕"/>
-                <a:cs typeface="맑은 고딕"/>
-              </a:rPr>
-              <a:t>1</a:t>
-            </a:r>
-          </a:p>
-        </p:txBody>
-      </p:sp>
-      <p:sp>
-        <p:nvSpPr>
-          <p:cNvPr id="11" name="TextBox 10"/>
-          <p:cNvSpPr txBox="1"/>
-          <p:nvPr/>
-        </p:nvSpPr>
-        <p:spPr>
-          <a:xfrm>
-            <a:off x="1234440" y="2514600"/>
-            <a:ext cx="10225735" cy="914400"/>
-          </a:xfrm>
-          <a:prstGeom prst="rect">
-            <a:avLst/>
-          </a:prstGeom>
-          <a:noFill/>
-        </p:spPr>
-        <p:txBody>
-          <a:bodyPr wrap="square" anchor="ctr"/>
-          <a:lstStyle/>
-          <a:p>
-            <a:pPr algn="l">
-              <a:lnSpc>
-                <a:spcPct val="110000"/>
-              </a:lnSpc>
-            </a:pPr>
-            <a:r>
-              <a:rPr sz="1550" b="1">
-                <a:solidFill>
-                  <a:srgbClr val="1F2A3A"/>
-                </a:solidFill>
-                <a:latin typeface="맑은 고딕"/>
-                <a:ea typeface="맑은 고딕"/>
-                <a:cs typeface="맑은 고딕"/>
-              </a:rPr>
-              <a:t>요청 해석 — 맡은 업무와 입력을 읽은 것이다</a:t>
-            </a:r>
-          </a:p>
-        </p:txBody>
-      </p:sp>
-      <p:sp>
-        <p:nvSpPr>
-          <p:cNvPr id="12" name="Rounded Rectangle 11"/>
-          <p:cNvSpPr/>
-          <p:nvPr/>
-        </p:nvSpPr>
-        <p:spPr>
-          <a:xfrm>
-            <a:off x="548640" y="3474720"/>
-            <a:ext cx="11094415" cy="822960"/>
-          </a:xfrm>
-          <a:prstGeom prst="roundRect">
-            <a:avLst>
-              <a:gd name="adj" fmla="val 8000"/>
-            </a:avLst>
-          </a:prstGeom>
-          <a:solidFill>
-            <a:srgbClr val="F3F6F9"/>
-          </a:solidFill>
-          <a:ln>
-            <a:noFill/>
-          </a:ln>
-        </p:spPr>
-        <p:txBody>
-          <a:bodyPr rtlCol="0" anchor="ctr"/>
-          <a:lstStyle/>
-          <a:p>
-            <a:pPr algn="ctr"/>
-          </a:p>
-        </p:txBody>
-      </p:sp>
-      <p:sp>
-        <p:nvSpPr>
-          <p:cNvPr id="13" name="Oval 12"/>
-          <p:cNvSpPr/>
-          <p:nvPr/>
-        </p:nvSpPr>
-        <p:spPr>
-          <a:xfrm>
-            <a:off x="731520" y="3703320"/>
-            <a:ext cx="365760" cy="365760"/>
-          </a:xfrm>
-          <a:prstGeom prst="ellipse">
-            <a:avLst/>
-          </a:prstGeom>
-          <a:solidFill>
-            <a:srgbClr val="13294B"/>
-          </a:solidFill>
-          <a:ln>
-            <a:noFill/>
-          </a:ln>
-        </p:spPr>
-        <p:txBody>
-          <a:bodyPr rtlCol="0" anchor="ctr"/>
-          <a:lstStyle/>
-          <a:p>
-            <a:pPr algn="ctr"/>
-          </a:p>
-        </p:txBody>
-      </p:sp>
-      <p:sp>
-        <p:nvSpPr>
-          <p:cNvPr id="14" name="TextBox 13"/>
-          <p:cNvSpPr txBox="1"/>
-          <p:nvPr/>
-        </p:nvSpPr>
-        <p:spPr>
-          <a:xfrm>
-            <a:off x="731520" y="3703320"/>
-            <a:ext cx="365760" cy="365760"/>
-          </a:xfrm>
-          <a:prstGeom prst="rect">
-            <a:avLst/>
-          </a:prstGeom>
-          <a:noFill/>
-        </p:spPr>
-        <p:txBody>
-          <a:bodyPr wrap="square" anchor="ctr"/>
-          <a:lstStyle/>
-          <a:p>
-            <a:pPr algn="ctr">
-              <a:lnSpc>
-                <a:spcPct val="110000"/>
-              </a:lnSpc>
-            </a:pPr>
-            <a:r>
-              <a:rPr sz="1300" b="1">
-                <a:solidFill>
-                  <a:srgbClr val="FFFFFF"/>
-                </a:solidFill>
-                <a:latin typeface="맑은 고딕"/>
-                <a:ea typeface="맑은 고딕"/>
-                <a:cs typeface="맑은 고딕"/>
-              </a:rPr>
-              <a:t>2</a:t>
-            </a:r>
-          </a:p>
-        </p:txBody>
-      </p:sp>
-      <p:sp>
-        <p:nvSpPr>
-          <p:cNvPr id="15" name="TextBox 14"/>
-          <p:cNvSpPr txBox="1"/>
-          <p:nvPr/>
-        </p:nvSpPr>
-        <p:spPr>
-          <a:xfrm>
-            <a:off x="1234440" y="3429000"/>
-            <a:ext cx="10225735" cy="914400"/>
-          </a:xfrm>
-          <a:prstGeom prst="rect">
-            <a:avLst/>
-          </a:prstGeom>
-          <a:noFill/>
-        </p:spPr>
-        <p:txBody>
-          <a:bodyPr wrap="square" anchor="ctr"/>
-          <a:lstStyle/>
-          <a:p>
-            <a:pPr algn="l">
-              <a:lnSpc>
-                <a:spcPct val="110000"/>
-              </a:lnSpc>
-            </a:pPr>
-            <a:r>
-              <a:rPr sz="1550" b="1">
-                <a:solidFill>
-                  <a:srgbClr val="1F2A3A"/>
-                </a:solidFill>
-                <a:latin typeface="맑은 고딕"/>
-                <a:ea typeface="맑은 고딕"/>
-                <a:cs typeface="맑은 고딕"/>
-              </a:rPr>
-              <a:t>결과 관찰에 이은 다음 호출 — 앞의 결과가 다음 입력을 정했다</a:t>
-            </a:r>
-          </a:p>
-        </p:txBody>
-      </p:sp>
-      <p:sp>
-        <p:nvSpPr>
-          <p:cNvPr id="16" name="Rounded Rectangle 15"/>
-          <p:cNvSpPr/>
-          <p:nvPr/>
-        </p:nvSpPr>
-        <p:spPr>
-          <a:xfrm>
-            <a:off x="548640" y="4389120"/>
-            <a:ext cx="11094415" cy="822960"/>
-          </a:xfrm>
-          <a:prstGeom prst="roundRect">
-            <a:avLst>
-              <a:gd name="adj" fmla="val 8000"/>
-            </a:avLst>
-          </a:prstGeom>
-          <a:solidFill>
-            <a:srgbClr val="F3F6F9"/>
-          </a:solidFill>
-          <a:ln>
-            <a:noFill/>
-          </a:ln>
-        </p:spPr>
-        <p:txBody>
-          <a:bodyPr rtlCol="0" anchor="ctr"/>
-          <a:lstStyle/>
-          <a:p>
-            <a:pPr algn="ctr"/>
-          </a:p>
-        </p:txBody>
-      </p:sp>
-      <p:sp>
-        <p:nvSpPr>
-          <p:cNvPr id="17" name="Oval 16"/>
-          <p:cNvSpPr/>
-          <p:nvPr/>
-        </p:nvSpPr>
-        <p:spPr>
-          <a:xfrm>
-            <a:off x="731520" y="4617720"/>
-            <a:ext cx="365760" cy="365760"/>
-          </a:xfrm>
-          <a:prstGeom prst="ellipse">
-            <a:avLst/>
-          </a:prstGeom>
-          <a:solidFill>
-            <a:srgbClr val="13294B"/>
-          </a:solidFill>
-          <a:ln>
-            <a:noFill/>
-          </a:ln>
-        </p:spPr>
-        <p:txBody>
-          <a:bodyPr rtlCol="0" anchor="ctr"/>
-          <a:lstStyle/>
-          <a:p>
-            <a:pPr algn="ctr"/>
-          </a:p>
-        </p:txBody>
-      </p:sp>
-      <p:sp>
-        <p:nvSpPr>
-          <p:cNvPr id="18" name="TextBox 17"/>
-          <p:cNvSpPr txBox="1"/>
-          <p:nvPr/>
-        </p:nvSpPr>
-        <p:spPr>
-          <a:xfrm>
-            <a:off x="731520" y="4617720"/>
-            <a:ext cx="365760" cy="365760"/>
-          </a:xfrm>
-          <a:prstGeom prst="rect">
-            <a:avLst/>
-          </a:prstGeom>
-          <a:noFill/>
-        </p:spPr>
-        <p:txBody>
-          <a:bodyPr wrap="square" anchor="ctr"/>
-          <a:lstStyle/>
-          <a:p>
-            <a:pPr algn="ctr">
-              <a:lnSpc>
-                <a:spcPct val="110000"/>
-              </a:lnSpc>
-            </a:pPr>
-            <a:r>
-              <a:rPr sz="1300" b="1">
-                <a:solidFill>
-                  <a:srgbClr val="FFFFFF"/>
-                </a:solidFill>
-                <a:latin typeface="맑은 고딕"/>
-                <a:ea typeface="맑은 고딕"/>
-                <a:cs typeface="맑은 고딕"/>
-              </a:rPr>
-              <a:t>3</a:t>
-            </a:r>
-          </a:p>
-        </p:txBody>
-      </p:sp>
-      <p:sp>
-        <p:nvSpPr>
-          <p:cNvPr id="19" name="TextBox 18"/>
-          <p:cNvSpPr txBox="1"/>
-          <p:nvPr/>
-        </p:nvSpPr>
-        <p:spPr>
-          <a:xfrm>
-            <a:off x="1234440" y="4343400"/>
-            <a:ext cx="10225735" cy="914400"/>
-          </a:xfrm>
-          <a:prstGeom prst="rect">
-            <a:avLst/>
-          </a:prstGeom>
-          <a:noFill/>
-        </p:spPr>
-        <p:txBody>
-          <a:bodyPr wrap="square" anchor="ctr"/>
-          <a:lstStyle/>
-          <a:p>
-            <a:pPr algn="l">
-              <a:lnSpc>
-                <a:spcPct val="110000"/>
-              </a:lnSpc>
-            </a:pPr>
-            <a:r>
-              <a:rPr sz="1550" b="1">
-                <a:solidFill>
-                  <a:srgbClr val="1F2A3A"/>
-                </a:solidFill>
-                <a:latin typeface="맑은 고딕"/>
-                <a:ea typeface="맑은 고딕"/>
-                <a:cs typeface="맑은 고딕"/>
-              </a:rPr>
-              <a:t>재시도 — 뜻대로 되지 않은 호출을 다시 부른 것이다</a:t>
-            </a:r>
-          </a:p>
-        </p:txBody>
-      </p:sp>
-      <p:sp>
-        <p:nvSpPr>
-          <p:cNvPr id="20" name="Rounded Rectangle 19"/>
-          <p:cNvSpPr/>
-          <p:nvPr/>
-        </p:nvSpPr>
-        <p:spPr>
-          <a:xfrm>
-            <a:off x="548640" y="5303520"/>
-            <a:ext cx="11094415" cy="822960"/>
-          </a:xfrm>
-          <a:prstGeom prst="roundRect">
-            <a:avLst>
-              <a:gd name="adj" fmla="val 8000"/>
-            </a:avLst>
-          </a:prstGeom>
-          <a:solidFill>
-            <a:srgbClr val="F3F6F9"/>
-          </a:solidFill>
-          <a:ln>
-            <a:noFill/>
-          </a:ln>
-        </p:spPr>
-        <p:txBody>
-          <a:bodyPr rtlCol="0" anchor="ctr"/>
-          <a:lstStyle/>
-          <a:p>
-            <a:pPr algn="ctr"/>
-          </a:p>
-        </p:txBody>
-      </p:sp>
-      <p:sp>
-        <p:nvSpPr>
-          <p:cNvPr id="21" name="Oval 20"/>
-          <p:cNvSpPr/>
-          <p:nvPr/>
-        </p:nvSpPr>
-        <p:spPr>
-          <a:xfrm>
-            <a:off x="731520" y="5532120"/>
-            <a:ext cx="365760" cy="365760"/>
-          </a:xfrm>
-          <a:prstGeom prst="ellipse">
-            <a:avLst/>
-          </a:prstGeom>
-          <a:solidFill>
-            <a:srgbClr val="13294B"/>
-          </a:solidFill>
-          <a:ln>
-            <a:noFill/>
-          </a:ln>
-        </p:spPr>
-        <p:txBody>
-          <a:bodyPr rtlCol="0" anchor="ctr"/>
-          <a:lstStyle/>
-          <a:p>
-            <a:pPr algn="ctr"/>
-          </a:p>
-        </p:txBody>
-      </p:sp>
-      <p:sp>
-        <p:nvSpPr>
-          <p:cNvPr id="22" name="TextBox 21"/>
-          <p:cNvSpPr txBox="1"/>
-          <p:nvPr/>
-        </p:nvSpPr>
-        <p:spPr>
-          <a:xfrm>
-            <a:off x="731520" y="5532120"/>
-            <a:ext cx="365760" cy="365760"/>
-          </a:xfrm>
-          <a:prstGeom prst="rect">
-            <a:avLst/>
-          </a:prstGeom>
-          <a:noFill/>
-        </p:spPr>
-        <p:txBody>
-          <a:bodyPr wrap="square" anchor="ctr"/>
-          <a:lstStyle/>
-          <a:p>
-            <a:pPr algn="ctr">
-              <a:lnSpc>
-                <a:spcPct val="110000"/>
-              </a:lnSpc>
-            </a:pPr>
-            <a:r>
-              <a:rPr sz="1300" b="1">
-                <a:solidFill>
-                  <a:srgbClr val="FFFFFF"/>
-                </a:solidFill>
-                <a:latin typeface="맑은 고딕"/>
-                <a:ea typeface="맑은 고딕"/>
-                <a:cs typeface="맑은 고딕"/>
-              </a:rPr>
-              <a:t>4</a:t>
-            </a:r>
-          </a:p>
-        </p:txBody>
-      </p:sp>
-      <p:sp>
-        <p:nvSpPr>
-          <p:cNvPr id="23" name="TextBox 22"/>
-          <p:cNvSpPr txBox="1"/>
-          <p:nvPr/>
-        </p:nvSpPr>
-        <p:spPr>
-          <a:xfrm>
-            <a:off x="1234440" y="5257800"/>
-            <a:ext cx="10225735" cy="914400"/>
-          </a:xfrm>
-          <a:prstGeom prst="rect">
-            <a:avLst/>
-          </a:prstGeom>
-          <a:noFill/>
-        </p:spPr>
-        <p:txBody>
-          <a:bodyPr wrap="square" anchor="ctr"/>
-          <a:lstStyle/>
-          <a:p>
-            <a:pPr algn="l">
-              <a:lnSpc>
-                <a:spcPct val="110000"/>
-              </a:lnSpc>
-            </a:pPr>
-            <a:r>
-              <a:rPr sz="1550" b="1">
-                <a:solidFill>
-                  <a:srgbClr val="1F2A3A"/>
-                </a:solidFill>
-                <a:latin typeface="맑은 고딕"/>
-                <a:ea typeface="맑은 고딕"/>
-                <a:cs typeface="맑은 고딕"/>
-              </a:rPr>
-              <a:t>종료 — 산출물을 제출하고 끝낸 것이다</a:t>
             </a:r>
           </a:p>
         </p:txBody>
@@ -29303,7 +30242,7 @@
                 <a:ea typeface="맑은 고딕"/>
                 <a:cs typeface="맑은 고딕"/>
               </a:rPr>
-              <a:t>Quiz 2. 읽지 못한 값과 묵은 값</a:t>
+              <a:t>Quiz 1. 처리 기록의 한 장면</a:t>
             </a:r>
           </a:p>
         </p:txBody>
@@ -29342,7 +30281,7 @@
                 <a:ea typeface="맑은 고딕"/>
                 <a:cs typeface="맑은 고딕"/>
               </a:rPr>
-              <a:t>에이전트가 원인을 가리려는데 유온의 최신 값은 3분 전의 것이었고, 냉각 효율의 조회는 실패했다.</a:t>
+              <a:t>에이전트가 원인 진단을 부른 뒤, 그 결과에 든 원인과 고장 유형의 식별자를 넣어 대안 평가를 불렀다.</a:t>
             </a:r>
           </a:p>
         </p:txBody>
@@ -29480,7 +30419,7 @@
                 <a:ea typeface="맑은 고딕"/>
                 <a:cs typeface="맑은 고딕"/>
               </a:rPr>
-              <a:t>이때 에이전트의 올바른 동작은?</a:t>
+              <a:t>이 장면이 보여 주는 실행 고리의 단계는?</a:t>
             </a:r>
           </a:p>
         </p:txBody>
@@ -29618,7 +30557,7 @@
                 <a:ea typeface="맑은 고딕"/>
                 <a:cs typeface="맑은 고딕"/>
               </a:rPr>
-              <a:t>3분 전의 유온과 판별 기준 70 %를 써서 쿨러 핀 오염으로 제출한다</a:t>
+              <a:t>요청 해석 — 맡은 업무와 입력을 읽은 것이다</a:t>
             </a:r>
           </a:p>
         </p:txBody>
@@ -29756,7 +30695,7 @@
                 <a:ea typeface="맑은 고딕"/>
                 <a:cs typeface="맑은 고딕"/>
               </a:rPr>
-              <a:t>냉각 효율을 0 %로 적고 유온을 가장 많이 내리는 조치를 추천한다</a:t>
+              <a:t>결과 관찰에 이은 다음 호출 — 앞의 결과가 다음 입력을 정했다</a:t>
             </a:r>
           </a:p>
         </p:txBody>
@@ -29894,7 +30833,7 @@
                 <a:ea typeface="맑은 고딕"/>
                 <a:cs typeface="맑은 고딕"/>
               </a:rPr>
-              <a:t>사전 확률이 가장 높은 쿨러 핀 오염을 확인된 원인으로 적는다</a:t>
+              <a:t>재시도 — 뜻대로 되지 않은 호출을 다시 부른 것이다</a:t>
             </a:r>
           </a:p>
         </p:txBody>
@@ -30032,7 +30971,7 @@
                 <a:ea typeface="맑은 고딕"/>
                 <a:cs typeface="맑은 고딕"/>
               </a:rPr>
-              <a:t>원인을 적지 않고, 확인하지 못한 값과 그 이유를 담아 보류한다</a:t>
+              <a:t>종료 — 산출물을 제출하고 끝낸 것이다</a:t>
             </a:r>
           </a:p>
         </p:txBody>
@@ -30097,7 +31036,7 @@
                 <a:ea typeface="맑은 고딕"/>
                 <a:cs typeface="맑은 고딕"/>
               </a:rPr>
-              <a:t>Quiz 3. 허용되지 않은 도구</a:t>
+              <a:t>Quiz 2. 읽지 못한 값과 묵은 값</a:t>
             </a:r>
           </a:p>
         </p:txBody>
@@ -30136,7 +31075,7 @@
                 <a:ea typeface="맑은 고딕"/>
                 <a:cs typeface="맑은 고딕"/>
               </a:rPr>
-              <a:t>에이전트가 일을 끝내려면 허용 목록에 없는 도구가 필요하다고 판단했고, 유온은 계속 오르고 있다.</a:t>
+              <a:t>에이전트가 원인을 가리려는데 유온의 최신 값은 3분 전의 것이었고, 냉각 효율의 조회는 실패했다.</a:t>
             </a:r>
           </a:p>
         </p:txBody>
@@ -30274,7 +31213,7 @@
                 <a:ea typeface="맑은 고딕"/>
                 <a:cs typeface="맑은 고딕"/>
               </a:rPr>
-              <a:t>이때 일어나야 하는 일은?</a:t>
+              <a:t>이때 에이전트의 올바른 동작은?</a:t>
             </a:r>
           </a:p>
         </p:txBody>
@@ -30412,7 +31351,7 @@
                 <a:ea typeface="맑은 고딕"/>
                 <a:cs typeface="맑은 고딕"/>
               </a:rPr>
-              <a:t>허용된 도구를 여럿 조합해 같은 효과를 내는 길을 찾는다</a:t>
+              <a:t>3분 전의 유온과 판별 기준 70 %를 써서 쿨러 핀 오염으로 제출한다</a:t>
             </a:r>
           </a:p>
         </p:txBody>
@@ -30550,7 +31489,7 @@
                 <a:ea typeface="맑은 고딕"/>
                 <a:cs typeface="맑은 고딕"/>
               </a:rPr>
-              <a:t>급한 상황이므로 한 번만 실행하고 그 사실을 기록에 남긴다</a:t>
+              <a:t>냉각 효율을 0 %로 적고 유온을 가장 많이 내리는 조치를 추천한다</a:t>
             </a:r>
           </a:p>
         </p:txBody>
@@ -30688,7 +31627,7 @@
                 <a:ea typeface="맑은 고딕"/>
                 <a:cs typeface="맑은 고딕"/>
               </a:rPr>
-              <a:t>실행하지 않고 사람에게 묻는다. 답을 받아도 실행 권한은 그대로이다</a:t>
+              <a:t>사전 확률이 가장 높은 쿨러 핀 오염을 확인된 원인으로 적는다</a:t>
             </a:r>
           </a:p>
         </p:txBody>
@@ -30826,7 +31765,7 @@
                 <a:ea typeface="맑은 고딕"/>
                 <a:cs typeface="맑은 고딕"/>
               </a:rPr>
-              <a:t>사람에게 물은 뒤 답을 받으면 그 도구를 직접 실행한다</a:t>
+              <a:t>원인을 적지 않고, 확인하지 못한 값과 그 이유를 담아 보류한다</a:t>
             </a:r>
           </a:p>
         </p:txBody>
@@ -30891,7 +31830,7 @@
                 <a:ea typeface="맑은 고딕"/>
                 <a:cs typeface="맑은 고딕"/>
               </a:rPr>
-              <a:t>정답과 판단 기준</a:t>
+              <a:t>Quiz 3. 허용되지 않은 도구</a:t>
             </a:r>
           </a:p>
         </p:txBody>
@@ -30930,7 +31869,7 @@
                 <a:ea typeface="맑은 고딕"/>
                 <a:cs typeface="맑은 고딕"/>
               </a:rPr>
-              <a:t>세 문항은 실행 고리의 단계, 지식과 값의 구분, 권한의 경계를 각각 올바른 기준으로 판단하는지를 확인한다.</a:t>
+              <a:t>에이전트가 일을 끝내려면 허용 목록에 없는 도구가 필요하다고 판단했고, 유온은 계속 오르고 있다.</a:t>
             </a:r>
           </a:p>
         </p:txBody>
@@ -30999,6 +31938,800 @@
                 <a:cs typeface="맑은 고딕"/>
               </a:rPr>
               <a:t>42</a:t>
+            </a:r>
+          </a:p>
+        </p:txBody>
+      </p:sp>
+      <p:sp>
+        <p:nvSpPr>
+          <p:cNvPr id="6" name="Rounded Rectangle 5"/>
+          <p:cNvSpPr/>
+          <p:nvPr/>
+        </p:nvSpPr>
+        <p:spPr>
+          <a:xfrm>
+            <a:off x="548640" y="1627632"/>
+            <a:ext cx="11094415" cy="704088"/>
+          </a:xfrm>
+          <a:prstGeom prst="roundRect">
+            <a:avLst>
+              <a:gd name="adj" fmla="val 5000"/>
+            </a:avLst>
+          </a:prstGeom>
+          <a:solidFill>
+            <a:srgbClr val="E7F3FD"/>
+          </a:solidFill>
+          <a:ln>
+            <a:noFill/>
+          </a:ln>
+        </p:spPr>
+        <p:txBody>
+          <a:bodyPr rtlCol="0" anchor="ctr"/>
+          <a:lstStyle/>
+          <a:p>
+            <a:pPr algn="ctr"/>
+          </a:p>
+        </p:txBody>
+      </p:sp>
+      <p:sp>
+        <p:nvSpPr>
+          <p:cNvPr id="7" name="TextBox 6"/>
+          <p:cNvSpPr txBox="1"/>
+          <p:nvPr/>
+        </p:nvSpPr>
+        <p:spPr>
+          <a:xfrm>
+            <a:off x="777240" y="1627632"/>
+            <a:ext cx="10637215" cy="704088"/>
+          </a:xfrm>
+          <a:prstGeom prst="rect">
+            <a:avLst/>
+          </a:prstGeom>
+          <a:noFill/>
+        </p:spPr>
+        <p:txBody>
+          <a:bodyPr wrap="square" anchor="ctr"/>
+          <a:lstStyle/>
+          <a:p>
+            <a:pPr algn="l">
+              <a:lnSpc>
+                <a:spcPct val="110000"/>
+              </a:lnSpc>
+            </a:pPr>
+            <a:r>
+              <a:rPr sz="1900" b="1">
+                <a:solidFill>
+                  <a:srgbClr val="13294B"/>
+                </a:solidFill>
+                <a:latin typeface="맑은 고딕"/>
+                <a:ea typeface="맑은 고딕"/>
+                <a:cs typeface="맑은 고딕"/>
+              </a:rPr>
+              <a:t>이때 일어나야 하는 일은?</a:t>
+            </a:r>
+          </a:p>
+        </p:txBody>
+      </p:sp>
+      <p:sp>
+        <p:nvSpPr>
+          <p:cNvPr id="8" name="Rounded Rectangle 7"/>
+          <p:cNvSpPr/>
+          <p:nvPr/>
+        </p:nvSpPr>
+        <p:spPr>
+          <a:xfrm>
+            <a:off x="548640" y="2560320"/>
+            <a:ext cx="11094415" cy="822960"/>
+          </a:xfrm>
+          <a:prstGeom prst="roundRect">
+            <a:avLst>
+              <a:gd name="adj" fmla="val 8000"/>
+            </a:avLst>
+          </a:prstGeom>
+          <a:solidFill>
+            <a:srgbClr val="F3F6F9"/>
+          </a:solidFill>
+          <a:ln>
+            <a:noFill/>
+          </a:ln>
+        </p:spPr>
+        <p:txBody>
+          <a:bodyPr rtlCol="0" anchor="ctr"/>
+          <a:lstStyle/>
+          <a:p>
+            <a:pPr algn="ctr"/>
+          </a:p>
+        </p:txBody>
+      </p:sp>
+      <p:sp>
+        <p:nvSpPr>
+          <p:cNvPr id="9" name="Oval 8"/>
+          <p:cNvSpPr/>
+          <p:nvPr/>
+        </p:nvSpPr>
+        <p:spPr>
+          <a:xfrm>
+            <a:off x="731520" y="2788920"/>
+            <a:ext cx="365760" cy="365760"/>
+          </a:xfrm>
+          <a:prstGeom prst="ellipse">
+            <a:avLst/>
+          </a:prstGeom>
+          <a:solidFill>
+            <a:srgbClr val="13294B"/>
+          </a:solidFill>
+          <a:ln>
+            <a:noFill/>
+          </a:ln>
+        </p:spPr>
+        <p:txBody>
+          <a:bodyPr rtlCol="0" anchor="ctr"/>
+          <a:lstStyle/>
+          <a:p>
+            <a:pPr algn="ctr"/>
+          </a:p>
+        </p:txBody>
+      </p:sp>
+      <p:sp>
+        <p:nvSpPr>
+          <p:cNvPr id="10" name="TextBox 9"/>
+          <p:cNvSpPr txBox="1"/>
+          <p:nvPr/>
+        </p:nvSpPr>
+        <p:spPr>
+          <a:xfrm>
+            <a:off x="731520" y="2788920"/>
+            <a:ext cx="365760" cy="365760"/>
+          </a:xfrm>
+          <a:prstGeom prst="rect">
+            <a:avLst/>
+          </a:prstGeom>
+          <a:noFill/>
+        </p:spPr>
+        <p:txBody>
+          <a:bodyPr wrap="square" anchor="ctr"/>
+          <a:lstStyle/>
+          <a:p>
+            <a:pPr algn="ctr">
+              <a:lnSpc>
+                <a:spcPct val="110000"/>
+              </a:lnSpc>
+            </a:pPr>
+            <a:r>
+              <a:rPr sz="1300" b="1">
+                <a:solidFill>
+                  <a:srgbClr val="FFFFFF"/>
+                </a:solidFill>
+                <a:latin typeface="맑은 고딕"/>
+                <a:ea typeface="맑은 고딕"/>
+                <a:cs typeface="맑은 고딕"/>
+              </a:rPr>
+              <a:t>1</a:t>
+            </a:r>
+          </a:p>
+        </p:txBody>
+      </p:sp>
+      <p:sp>
+        <p:nvSpPr>
+          <p:cNvPr id="11" name="TextBox 10"/>
+          <p:cNvSpPr txBox="1"/>
+          <p:nvPr/>
+        </p:nvSpPr>
+        <p:spPr>
+          <a:xfrm>
+            <a:off x="1234440" y="2514600"/>
+            <a:ext cx="10225735" cy="914400"/>
+          </a:xfrm>
+          <a:prstGeom prst="rect">
+            <a:avLst/>
+          </a:prstGeom>
+          <a:noFill/>
+        </p:spPr>
+        <p:txBody>
+          <a:bodyPr wrap="square" anchor="ctr"/>
+          <a:lstStyle/>
+          <a:p>
+            <a:pPr algn="l">
+              <a:lnSpc>
+                <a:spcPct val="110000"/>
+              </a:lnSpc>
+            </a:pPr>
+            <a:r>
+              <a:rPr sz="1550" b="1">
+                <a:solidFill>
+                  <a:srgbClr val="1F2A3A"/>
+                </a:solidFill>
+                <a:latin typeface="맑은 고딕"/>
+                <a:ea typeface="맑은 고딕"/>
+                <a:cs typeface="맑은 고딕"/>
+              </a:rPr>
+              <a:t>허용된 도구를 여럿 조합해 같은 효과를 내는 길을 찾는다</a:t>
+            </a:r>
+          </a:p>
+        </p:txBody>
+      </p:sp>
+      <p:sp>
+        <p:nvSpPr>
+          <p:cNvPr id="12" name="Rounded Rectangle 11"/>
+          <p:cNvSpPr/>
+          <p:nvPr/>
+        </p:nvSpPr>
+        <p:spPr>
+          <a:xfrm>
+            <a:off x="548640" y="3474720"/>
+            <a:ext cx="11094415" cy="822960"/>
+          </a:xfrm>
+          <a:prstGeom prst="roundRect">
+            <a:avLst>
+              <a:gd name="adj" fmla="val 8000"/>
+            </a:avLst>
+          </a:prstGeom>
+          <a:solidFill>
+            <a:srgbClr val="F3F6F9"/>
+          </a:solidFill>
+          <a:ln>
+            <a:noFill/>
+          </a:ln>
+        </p:spPr>
+        <p:txBody>
+          <a:bodyPr rtlCol="0" anchor="ctr"/>
+          <a:lstStyle/>
+          <a:p>
+            <a:pPr algn="ctr"/>
+          </a:p>
+        </p:txBody>
+      </p:sp>
+      <p:sp>
+        <p:nvSpPr>
+          <p:cNvPr id="13" name="Oval 12"/>
+          <p:cNvSpPr/>
+          <p:nvPr/>
+        </p:nvSpPr>
+        <p:spPr>
+          <a:xfrm>
+            <a:off x="731520" y="3703320"/>
+            <a:ext cx="365760" cy="365760"/>
+          </a:xfrm>
+          <a:prstGeom prst="ellipse">
+            <a:avLst/>
+          </a:prstGeom>
+          <a:solidFill>
+            <a:srgbClr val="13294B"/>
+          </a:solidFill>
+          <a:ln>
+            <a:noFill/>
+          </a:ln>
+        </p:spPr>
+        <p:txBody>
+          <a:bodyPr rtlCol="0" anchor="ctr"/>
+          <a:lstStyle/>
+          <a:p>
+            <a:pPr algn="ctr"/>
+          </a:p>
+        </p:txBody>
+      </p:sp>
+      <p:sp>
+        <p:nvSpPr>
+          <p:cNvPr id="14" name="TextBox 13"/>
+          <p:cNvSpPr txBox="1"/>
+          <p:nvPr/>
+        </p:nvSpPr>
+        <p:spPr>
+          <a:xfrm>
+            <a:off x="731520" y="3703320"/>
+            <a:ext cx="365760" cy="365760"/>
+          </a:xfrm>
+          <a:prstGeom prst="rect">
+            <a:avLst/>
+          </a:prstGeom>
+          <a:noFill/>
+        </p:spPr>
+        <p:txBody>
+          <a:bodyPr wrap="square" anchor="ctr"/>
+          <a:lstStyle/>
+          <a:p>
+            <a:pPr algn="ctr">
+              <a:lnSpc>
+                <a:spcPct val="110000"/>
+              </a:lnSpc>
+            </a:pPr>
+            <a:r>
+              <a:rPr sz="1300" b="1">
+                <a:solidFill>
+                  <a:srgbClr val="FFFFFF"/>
+                </a:solidFill>
+                <a:latin typeface="맑은 고딕"/>
+                <a:ea typeface="맑은 고딕"/>
+                <a:cs typeface="맑은 고딕"/>
+              </a:rPr>
+              <a:t>2</a:t>
+            </a:r>
+          </a:p>
+        </p:txBody>
+      </p:sp>
+      <p:sp>
+        <p:nvSpPr>
+          <p:cNvPr id="15" name="TextBox 14"/>
+          <p:cNvSpPr txBox="1"/>
+          <p:nvPr/>
+        </p:nvSpPr>
+        <p:spPr>
+          <a:xfrm>
+            <a:off x="1234440" y="3429000"/>
+            <a:ext cx="10225735" cy="914400"/>
+          </a:xfrm>
+          <a:prstGeom prst="rect">
+            <a:avLst/>
+          </a:prstGeom>
+          <a:noFill/>
+        </p:spPr>
+        <p:txBody>
+          <a:bodyPr wrap="square" anchor="ctr"/>
+          <a:lstStyle/>
+          <a:p>
+            <a:pPr algn="l">
+              <a:lnSpc>
+                <a:spcPct val="110000"/>
+              </a:lnSpc>
+            </a:pPr>
+            <a:r>
+              <a:rPr sz="1550" b="1">
+                <a:solidFill>
+                  <a:srgbClr val="1F2A3A"/>
+                </a:solidFill>
+                <a:latin typeface="맑은 고딕"/>
+                <a:ea typeface="맑은 고딕"/>
+                <a:cs typeface="맑은 고딕"/>
+              </a:rPr>
+              <a:t>급한 상황이므로 한 번만 실행하고 그 사실을 기록에 남긴다</a:t>
+            </a:r>
+          </a:p>
+        </p:txBody>
+      </p:sp>
+      <p:sp>
+        <p:nvSpPr>
+          <p:cNvPr id="16" name="Rounded Rectangle 15"/>
+          <p:cNvSpPr/>
+          <p:nvPr/>
+        </p:nvSpPr>
+        <p:spPr>
+          <a:xfrm>
+            <a:off x="548640" y="4389120"/>
+            <a:ext cx="11094415" cy="822960"/>
+          </a:xfrm>
+          <a:prstGeom prst="roundRect">
+            <a:avLst>
+              <a:gd name="adj" fmla="val 8000"/>
+            </a:avLst>
+          </a:prstGeom>
+          <a:solidFill>
+            <a:srgbClr val="F3F6F9"/>
+          </a:solidFill>
+          <a:ln>
+            <a:noFill/>
+          </a:ln>
+        </p:spPr>
+        <p:txBody>
+          <a:bodyPr rtlCol="0" anchor="ctr"/>
+          <a:lstStyle/>
+          <a:p>
+            <a:pPr algn="ctr"/>
+          </a:p>
+        </p:txBody>
+      </p:sp>
+      <p:sp>
+        <p:nvSpPr>
+          <p:cNvPr id="17" name="Oval 16"/>
+          <p:cNvSpPr/>
+          <p:nvPr/>
+        </p:nvSpPr>
+        <p:spPr>
+          <a:xfrm>
+            <a:off x="731520" y="4617720"/>
+            <a:ext cx="365760" cy="365760"/>
+          </a:xfrm>
+          <a:prstGeom prst="ellipse">
+            <a:avLst/>
+          </a:prstGeom>
+          <a:solidFill>
+            <a:srgbClr val="13294B"/>
+          </a:solidFill>
+          <a:ln>
+            <a:noFill/>
+          </a:ln>
+        </p:spPr>
+        <p:txBody>
+          <a:bodyPr rtlCol="0" anchor="ctr"/>
+          <a:lstStyle/>
+          <a:p>
+            <a:pPr algn="ctr"/>
+          </a:p>
+        </p:txBody>
+      </p:sp>
+      <p:sp>
+        <p:nvSpPr>
+          <p:cNvPr id="18" name="TextBox 17"/>
+          <p:cNvSpPr txBox="1"/>
+          <p:nvPr/>
+        </p:nvSpPr>
+        <p:spPr>
+          <a:xfrm>
+            <a:off x="731520" y="4617720"/>
+            <a:ext cx="365760" cy="365760"/>
+          </a:xfrm>
+          <a:prstGeom prst="rect">
+            <a:avLst/>
+          </a:prstGeom>
+          <a:noFill/>
+        </p:spPr>
+        <p:txBody>
+          <a:bodyPr wrap="square" anchor="ctr"/>
+          <a:lstStyle/>
+          <a:p>
+            <a:pPr algn="ctr">
+              <a:lnSpc>
+                <a:spcPct val="110000"/>
+              </a:lnSpc>
+            </a:pPr>
+            <a:r>
+              <a:rPr sz="1300" b="1">
+                <a:solidFill>
+                  <a:srgbClr val="FFFFFF"/>
+                </a:solidFill>
+                <a:latin typeface="맑은 고딕"/>
+                <a:ea typeface="맑은 고딕"/>
+                <a:cs typeface="맑은 고딕"/>
+              </a:rPr>
+              <a:t>3</a:t>
+            </a:r>
+          </a:p>
+        </p:txBody>
+      </p:sp>
+      <p:sp>
+        <p:nvSpPr>
+          <p:cNvPr id="19" name="TextBox 18"/>
+          <p:cNvSpPr txBox="1"/>
+          <p:nvPr/>
+        </p:nvSpPr>
+        <p:spPr>
+          <a:xfrm>
+            <a:off x="1234440" y="4343400"/>
+            <a:ext cx="10225735" cy="914400"/>
+          </a:xfrm>
+          <a:prstGeom prst="rect">
+            <a:avLst/>
+          </a:prstGeom>
+          <a:noFill/>
+        </p:spPr>
+        <p:txBody>
+          <a:bodyPr wrap="square" anchor="ctr"/>
+          <a:lstStyle/>
+          <a:p>
+            <a:pPr algn="l">
+              <a:lnSpc>
+                <a:spcPct val="110000"/>
+              </a:lnSpc>
+            </a:pPr>
+            <a:r>
+              <a:rPr sz="1550" b="1">
+                <a:solidFill>
+                  <a:srgbClr val="1F2A3A"/>
+                </a:solidFill>
+                <a:latin typeface="맑은 고딕"/>
+                <a:ea typeface="맑은 고딕"/>
+                <a:cs typeface="맑은 고딕"/>
+              </a:rPr>
+              <a:t>실행하지 않고 사람에게 묻는다. 답을 받아도 실행 권한은 그대로이다</a:t>
+            </a:r>
+          </a:p>
+        </p:txBody>
+      </p:sp>
+      <p:sp>
+        <p:nvSpPr>
+          <p:cNvPr id="20" name="Rounded Rectangle 19"/>
+          <p:cNvSpPr/>
+          <p:nvPr/>
+        </p:nvSpPr>
+        <p:spPr>
+          <a:xfrm>
+            <a:off x="548640" y="5303520"/>
+            <a:ext cx="11094415" cy="822960"/>
+          </a:xfrm>
+          <a:prstGeom prst="roundRect">
+            <a:avLst>
+              <a:gd name="adj" fmla="val 8000"/>
+            </a:avLst>
+          </a:prstGeom>
+          <a:solidFill>
+            <a:srgbClr val="F3F6F9"/>
+          </a:solidFill>
+          <a:ln>
+            <a:noFill/>
+          </a:ln>
+        </p:spPr>
+        <p:txBody>
+          <a:bodyPr rtlCol="0" anchor="ctr"/>
+          <a:lstStyle/>
+          <a:p>
+            <a:pPr algn="ctr"/>
+          </a:p>
+        </p:txBody>
+      </p:sp>
+      <p:sp>
+        <p:nvSpPr>
+          <p:cNvPr id="21" name="Oval 20"/>
+          <p:cNvSpPr/>
+          <p:nvPr/>
+        </p:nvSpPr>
+        <p:spPr>
+          <a:xfrm>
+            <a:off x="731520" y="5532120"/>
+            <a:ext cx="365760" cy="365760"/>
+          </a:xfrm>
+          <a:prstGeom prst="ellipse">
+            <a:avLst/>
+          </a:prstGeom>
+          <a:solidFill>
+            <a:srgbClr val="13294B"/>
+          </a:solidFill>
+          <a:ln>
+            <a:noFill/>
+          </a:ln>
+        </p:spPr>
+        <p:txBody>
+          <a:bodyPr rtlCol="0" anchor="ctr"/>
+          <a:lstStyle/>
+          <a:p>
+            <a:pPr algn="ctr"/>
+          </a:p>
+        </p:txBody>
+      </p:sp>
+      <p:sp>
+        <p:nvSpPr>
+          <p:cNvPr id="22" name="TextBox 21"/>
+          <p:cNvSpPr txBox="1"/>
+          <p:nvPr/>
+        </p:nvSpPr>
+        <p:spPr>
+          <a:xfrm>
+            <a:off x="731520" y="5532120"/>
+            <a:ext cx="365760" cy="365760"/>
+          </a:xfrm>
+          <a:prstGeom prst="rect">
+            <a:avLst/>
+          </a:prstGeom>
+          <a:noFill/>
+        </p:spPr>
+        <p:txBody>
+          <a:bodyPr wrap="square" anchor="ctr"/>
+          <a:lstStyle/>
+          <a:p>
+            <a:pPr algn="ctr">
+              <a:lnSpc>
+                <a:spcPct val="110000"/>
+              </a:lnSpc>
+            </a:pPr>
+            <a:r>
+              <a:rPr sz="1300" b="1">
+                <a:solidFill>
+                  <a:srgbClr val="FFFFFF"/>
+                </a:solidFill>
+                <a:latin typeface="맑은 고딕"/>
+                <a:ea typeface="맑은 고딕"/>
+                <a:cs typeface="맑은 고딕"/>
+              </a:rPr>
+              <a:t>4</a:t>
+            </a:r>
+          </a:p>
+        </p:txBody>
+      </p:sp>
+      <p:sp>
+        <p:nvSpPr>
+          <p:cNvPr id="23" name="TextBox 22"/>
+          <p:cNvSpPr txBox="1"/>
+          <p:nvPr/>
+        </p:nvSpPr>
+        <p:spPr>
+          <a:xfrm>
+            <a:off x="1234440" y="5257800"/>
+            <a:ext cx="10225735" cy="914400"/>
+          </a:xfrm>
+          <a:prstGeom prst="rect">
+            <a:avLst/>
+          </a:prstGeom>
+          <a:noFill/>
+        </p:spPr>
+        <p:txBody>
+          <a:bodyPr wrap="square" anchor="ctr"/>
+          <a:lstStyle/>
+          <a:p>
+            <a:pPr algn="l">
+              <a:lnSpc>
+                <a:spcPct val="110000"/>
+              </a:lnSpc>
+            </a:pPr>
+            <a:r>
+              <a:rPr sz="1550" b="1">
+                <a:solidFill>
+                  <a:srgbClr val="1F2A3A"/>
+                </a:solidFill>
+                <a:latin typeface="맑은 고딕"/>
+                <a:ea typeface="맑은 고딕"/>
+                <a:cs typeface="맑은 고딕"/>
+              </a:rPr>
+              <a:t>사람에게 물은 뒤 답을 받으면 그 도구를 직접 실행한다</a:t>
+            </a:r>
+          </a:p>
+        </p:txBody>
+      </p:sp>
+    </p:spTree>
+  </p:cSld>
+  <p:clrMapOvr>
+    <a:masterClrMapping/>
+  </p:clrMapOvr>
+</p:sld>
+</file>
+
+<file path=ppt/slides/slide43.xml><?xml version="1.0" encoding="utf-8"?>
+<p:sld xmlns:a="http://schemas.openxmlformats.org/drawingml/2006/main" xmlns:p="http://schemas.openxmlformats.org/presentationml/2006/main" xmlns:r="http://schemas.openxmlformats.org/officeDocument/2006/relationships">
+  <p:cSld>
+    <p:bg>
+      <p:bgPr>
+        <a:solidFill>
+          <a:srgbClr val="FFFFFF"/>
+        </a:solidFill>
+        <a:effectLst/>
+      </p:bgPr>
+    </p:bg>
+    <p:spTree>
+      <p:nvGrpSpPr>
+        <p:cNvPr id="1" name=""/>
+        <p:cNvGrpSpPr/>
+        <p:nvPr/>
+      </p:nvGrpSpPr>
+      <p:grpSpPr/>
+      <p:sp>
+        <p:nvSpPr>
+          <p:cNvPr id="2" name="TextBox 1"/>
+          <p:cNvSpPr txBox="1"/>
+          <p:nvPr/>
+        </p:nvSpPr>
+        <p:spPr>
+          <a:xfrm>
+            <a:off x="457200" y="329184"/>
+            <a:ext cx="11277295" cy="603504"/>
+          </a:xfrm>
+          <a:prstGeom prst="rect">
+            <a:avLst/>
+          </a:prstGeom>
+          <a:noFill/>
+        </p:spPr>
+        <p:txBody>
+          <a:bodyPr wrap="square" anchor="ctr"/>
+          <a:lstStyle/>
+          <a:p>
+            <a:pPr algn="l">
+              <a:lnSpc>
+                <a:spcPct val="110000"/>
+              </a:lnSpc>
+            </a:pPr>
+            <a:r>
+              <a:rPr sz="2800" b="1">
+                <a:solidFill>
+                  <a:srgbClr val="13294B"/>
+                </a:solidFill>
+                <a:latin typeface="맑은 고딕"/>
+                <a:ea typeface="맑은 고딕"/>
+                <a:cs typeface="맑은 고딕"/>
+              </a:rPr>
+              <a:t>정답과 판단 기준</a:t>
+            </a:r>
+          </a:p>
+        </p:txBody>
+      </p:sp>
+      <p:sp>
+        <p:nvSpPr>
+          <p:cNvPr id="3" name="TextBox 2"/>
+          <p:cNvSpPr txBox="1"/>
+          <p:nvPr/>
+        </p:nvSpPr>
+        <p:spPr>
+          <a:xfrm>
+            <a:off x="457200" y="932688"/>
+            <a:ext cx="11277295" cy="420624"/>
+          </a:xfrm>
+          <a:prstGeom prst="rect">
+            <a:avLst/>
+          </a:prstGeom>
+          <a:noFill/>
+        </p:spPr>
+        <p:txBody>
+          <a:bodyPr wrap="square" anchor="ctr"/>
+          <a:lstStyle/>
+          <a:p>
+            <a:pPr algn="l">
+              <a:lnSpc>
+                <a:spcPct val="110000"/>
+              </a:lnSpc>
+            </a:pPr>
+            <a:r>
+              <a:rPr sz="1600" b="0">
+                <a:solidFill>
+                  <a:srgbClr val="556175"/>
+                </a:solidFill>
+                <a:latin typeface="맑은 고딕"/>
+                <a:ea typeface="맑은 고딕"/>
+                <a:cs typeface="맑은 고딕"/>
+              </a:rPr>
+              <a:t>세 문항은 실행 고리의 단계, 지식과 값의 구분, 권한의 경계를 각각 올바른 기준으로 판단하는지를 확인한다.</a:t>
+            </a:r>
+          </a:p>
+        </p:txBody>
+      </p:sp>
+      <p:sp>
+        <p:nvSpPr>
+          <p:cNvPr id="4" name="Rectangle 3"/>
+          <p:cNvSpPr/>
+          <p:nvPr/>
+        </p:nvSpPr>
+        <p:spPr>
+          <a:xfrm>
+            <a:off x="548640" y="1408176"/>
+            <a:ext cx="11094415" cy="18288"/>
+          </a:xfrm>
+          <a:prstGeom prst="rect">
+            <a:avLst/>
+          </a:prstGeom>
+          <a:solidFill>
+            <a:srgbClr val="D3D9E1"/>
+          </a:solidFill>
+          <a:ln>
+            <a:noFill/>
+          </a:ln>
+        </p:spPr>
+        <p:txBody>
+          <a:bodyPr rtlCol="0" anchor="ctr"/>
+          <a:lstStyle/>
+          <a:p>
+            <a:pPr algn="ctr"/>
+          </a:p>
+        </p:txBody>
+      </p:sp>
+      <p:sp>
+        <p:nvSpPr>
+          <p:cNvPr id="5" name="TextBox 4"/>
+          <p:cNvSpPr txBox="1"/>
+          <p:nvPr/>
+        </p:nvSpPr>
+        <p:spPr>
+          <a:xfrm>
+            <a:off x="10911535" y="6473952"/>
+            <a:ext cx="822960" cy="274320"/>
+          </a:xfrm>
+          <a:prstGeom prst="rect">
+            <a:avLst/>
+          </a:prstGeom>
+          <a:noFill/>
+        </p:spPr>
+        <p:txBody>
+          <a:bodyPr wrap="square" anchor="t"/>
+          <a:lstStyle/>
+          <a:p>
+            <a:pPr algn="r">
+              <a:lnSpc>
+                <a:spcPct val="110000"/>
+              </a:lnSpc>
+            </a:pPr>
+            <a:r>
+              <a:rPr sz="1000" b="0">
+                <a:solidFill>
+                  <a:srgbClr val="556175"/>
+                </a:solidFill>
+                <a:latin typeface="맑은 고딕"/>
+                <a:ea typeface="맑은 고딕"/>
+                <a:cs typeface="맑은 고딕"/>
+              </a:rPr>
+              <a:t>43</a:t>
             </a:r>
           </a:p>
         </p:txBody>
@@ -31791,7 +33524,7 @@
       </p:sp>
       <p:pic>
         <p:nvPicPr>
-          <p:cNvPr id="6" name="삽화:경보에서승인까지.svg" descr="illust_5067692115363442791_1791735250.png"/>
+          <p:cNvPr id="6" name="삽화:경보에서승인까지.svg" descr="illust_9211011036171632505_1791735250.png"/>
           <p:cNvPicPr>
             <a:picLocks noChangeAspect="1"/>
           </p:cNvPicPr>
@@ -33915,7 +35648,7 @@
                 <a:ea typeface="맑은 고딕"/>
                 <a:cs typeface="맑은 고딕"/>
               </a:rPr>
-              <a:t>RAG는 질문과 가까운 문서 조각을 찾아 모델에 함께 넣어, 모델이 학습하지 않은 문서의 내용으로 답하게 한다.</a:t>
+              <a:t>RAG(Retrieval-Augmented Generation)는 문서 조각을 찾아 모델에 함께 넣어 학습하지 않은 내용으로 답하게 한다.</a:t>
             </a:r>
           </a:p>
         </p:txBody>

--- a/docs/교재/통합반_오프라인/05회차/통합반_오프라인_05회차.pptx
+++ b/docs/교재/통합반_오프라인/05회차/통합반_오프라인_05회차.pptx
@@ -964,7 +964,7 @@
           <a:lstStyle/>
           <a:p>
             <a:r>
-              <a:t>네 정보원 가운데 온톨로지와 SOP는 같은 지식 그래프에 들어 있습니다. 4회차까지 만든 그래프입니다. 에이전트는 고장 유형에서 CAUSES를 거슬러 원인 후보 셋을, MITIGATED_BY를 따라 조치 방법을 얻었습니다. 후보마다 붙은 사전 확률은 아직 값을 보지 않은 상태의 가능성이며, 어느 후보가 맞는지는 값을 읽어야 정해집니다.</a:t>
+              <a:t>네 정보원 가운데 온톨로지와 SOP는 같은 지식 그래프에 들어 있습니다. 4회차까지 만든 그래프입니다. 에이전트는 고장 유형에서 CAUSES를 거슬러 원인 후보 셋을, MITIGATED_BY를 따라 조치 방법을 얻었습니다. 그래프가 알려 주는 것은 후보까지이며, 셋 가운데 어느 것이 맞는지는 값을 읽어야 정해집니다.</a:t>
             </a:r>
           </a:p>
         </p:txBody>
@@ -1594,7 +1594,7 @@
           <a:lstStyle/>
           <a:p>
             <a:r>
-              <a:t>둘째인 도구 호출 실패는 다시 해도 오류가 돌아올 때 지어내지 않고 멈추는 것이었고, 여기서는 셋째 멈춤 조건인 권한 제한을 봅니다. 에이전트마다 부를 수 있는 도구가 허용 목록으로 정해져 있습니다. 목록 밖의 도구를 부르려 하면 실행되지 않고 권한 요청이 되며, 그 요청은 질문이 되어 사람에게 올라갑니다. 마지막 칸은 에이전트에게 주는 지시의 한 문장입니다. 사람이 질문에 답하더라도 그것으로 에이전트의 권한이 넓어지지는 않습니다.</a:t>
+              <a:t>세 멈춤 조건 가운데 권한 제한을 봅니다. 에이전트마다 부를 수 있는 도구가 허용 목록으로 정해져 있습니다. 목록 밖의 도구를 부르려 하면 실행되지 않고 권한 요청이 되며, 그 요청은 질문이 되어 사람에게 올라갑니다. 마지막 칸은 에이전트에게 주는 지시의 한 문장입니다. 사람이 질문에 답하더라도 그것으로 에이전트의 권한이 넓어지지는 않습니다.</a:t>
             </a:r>
           </a:p>
         </p:txBody>
@@ -2434,7 +2434,7 @@
           <a:lstStyle/>
           <a:p>
             <a:r>
-              <a:t>정답보다 판단 기준이 중요합니다. 첫 문항의 3번은 같은 일을 방법을 바꾸어 다시 한 경우에 해당하는 말이며 이 장면과는 다릅니다. 둘째 문항의 1번은 묵은 값을, 2번은 실패를 0으로, 3번은 가능성을 확인으로 바꾸어 쓴 것입니다. 셋째 문항의 4번은 사람에게 물었다는 점에서 그럴듯하지만, 답변이 권한을 바꾸지 않는다는 점에서 틀렸습니다.</a:t>
+              <a:t>정답보다 판단 기준이 중요합니다. 첫 문항의 3번은 같은 일을 방법을 바꾸어 다시 한 경우에 해당하는 말이며 이 장면과는 다릅니다. 둘째 문항의 1번은 묵은 값을, 2번은 실패를 0으로, 3번은 후보를 확인된 원인으로 바꾸어 쓴 것입니다. 셋째 문항의 4번은 사람에게 물었다는 점에서 그럴듯하지만, 답변이 권한을 바꾸지 않는다는 점에서 틀렸습니다.</a:t>
             </a:r>
           </a:p>
         </p:txBody>
@@ -2854,7 +2854,7 @@
           <a:lstStyle/>
           <a:p>
             <a:r>
-              <a:t>에이전트 하나는 이 항목들로 정의됩니다. 쿨러 사건을 맡은 냉각 긴급 대응 에이전트의 값입니다. 목표는 무엇을 이루어야 끝나는지를, 도구는 무엇을 쓸 수 있는지를 정합니다. 업무 지침은 에이전트 스킬이라는 파일로 주며, 그 형식은 다음 회차에 다룹니다.</a:t>
+              <a:t>에이전트 하나는 이 항목들로 정의됩니다. 쿨러 사건을 맡은 냉각 긴급 대응 에이전트의 값입니다. 목표는 무엇을 이루어야 끝나는지를, 도구는 무엇을 쓸 수 있는지를 정합니다. 목표 칸은 에이전트에 적힌 문장을 이 수업의 낱말로 줄여 옮긴 요지입니다. 업무 지침은 에이전트 스킬이라는 파일로 주며, 그 형식은 다음 회차에 다룹니다.</a:t>
             </a:r>
           </a:p>
         </p:txBody>
@@ -7340,7 +7340,7 @@
       </p:sp>
       <p:pic>
         <p:nvPicPr>
-          <p:cNvPr id="6" name="삽화:세요소.svg" descr="illust_3991639501693704938_1791735250.png"/>
+          <p:cNvPr id="6" name="삽화:세요소.svg" descr="illust_2920339353675500372_1791735250.png"/>
           <p:cNvPicPr>
             <a:picLocks noChangeAspect="1"/>
           </p:cNvPicPr>
@@ -8228,7 +8228,7 @@
                 <a:ea typeface="맑은 고딕"/>
                 <a:cs typeface="맑은 고딕"/>
               </a:rPr>
-              <a:t>쿨러 성능 저하 경보의 원인을 진단하고, 냉각 조치 후보를 규정과 회사 목표로 견주어 추천 하나와 뒤진 대안을 올린다</a:t>
+              <a:t>요지: 쿨러 성능 저하 경보의 원인을 진단하고, 냉각 조치 후보를 규정과 회사 목표로 견주어 추천 하나와 뒤진 대안을 올린다</a:t>
             </a:r>
           </a:p>
         </p:txBody>
@@ -9462,7 +9462,7 @@
       </p:sp>
       <p:pic>
         <p:nvPicPr>
-          <p:cNvPr id="6" name="삽화:실행고리.svg" descr="illust_190617246343993327_1791735250.png"/>
+          <p:cNvPr id="6" name="삽화:실행고리.svg" descr="illust_1969153389985339881_1791735250.png"/>
           <p:cNvPicPr>
             <a:picLocks noChangeAspect="1"/>
           </p:cNvPicPr>
@@ -11260,7 +11260,7 @@
       </p:sp>
       <p:pic>
         <p:nvPicPr>
-          <p:cNvPr id="6" name="삽화:정보원.svg" descr="illust_175209253604745589_1791735250.png"/>
+          <p:cNvPr id="6" name="삽화:정보원.svg" descr="illust_4028360065608945016_1791735250.png"/>
           <p:cNvPicPr>
             <a:picLocks noChangeAspect="1"/>
           </p:cNvPicPr>
@@ -12987,24 +12987,6 @@
               <a:t>원인</a:t>
             </a:r>
           </a:p>
-          <a:p>
-            <a:pPr algn="ctr">
-              <a:lnSpc>
-                <a:spcPct val="110000"/>
-              </a:lnSpc>
-            </a:pPr>
-            <a:r>
-              <a:rPr sz="1100" b="0">
-                <a:solidFill>
-                  <a:srgbClr val="556175"/>
-                </a:solidFill>
-                <a:latin typeface="맑은 고딕"/>
-                <a:ea typeface="맑은 고딕"/>
-                <a:cs typeface="맑은 고딕"/>
-              </a:rPr>
-              <a:t>사전 확률 0.6</a:t>
-            </a:r>
-          </a:p>
         </p:txBody>
       </p:sp>
       <p:sp>
@@ -13093,24 +13075,6 @@
               <a:t>원인</a:t>
             </a:r>
           </a:p>
-          <a:p>
-            <a:pPr algn="ctr">
-              <a:lnSpc>
-                <a:spcPct val="110000"/>
-              </a:lnSpc>
-            </a:pPr>
-            <a:r>
-              <a:rPr sz="1100" b="0">
-                <a:solidFill>
-                  <a:srgbClr val="556175"/>
-                </a:solidFill>
-                <a:latin typeface="맑은 고딕"/>
-                <a:ea typeface="맑은 고딕"/>
-                <a:cs typeface="맑은 고딕"/>
-              </a:rPr>
-              <a:t>사전 확률 0.2</a:t>
-            </a:r>
-          </a:p>
         </p:txBody>
       </p:sp>
       <p:sp>
@@ -13197,24 +13161,6 @@
                 <a:cs typeface="맑은 고딕"/>
               </a:rPr>
               <a:t>원인</a:t>
-            </a:r>
-          </a:p>
-          <a:p>
-            <a:pPr algn="ctr">
-              <a:lnSpc>
-                <a:spcPct val="110000"/>
-              </a:lnSpc>
-            </a:pPr>
-            <a:r>
-              <a:rPr sz="1100" b="0">
-                <a:solidFill>
-                  <a:srgbClr val="556175"/>
-                </a:solidFill>
-                <a:latin typeface="맑은 고딕"/>
-                <a:ea typeface="맑은 고딕"/>
-                <a:cs typeface="맑은 고딕"/>
-              </a:rPr>
-              <a:t>사전 확률 0.2</a:t>
             </a:r>
           </a:p>
         </p:txBody>
@@ -16645,7 +16591,7 @@
       </p:sp>
       <p:pic>
         <p:nvPicPr>
-          <p:cNvPr id="6" name="삽화:신선도.svg" descr="illust_420244806827002284_1791735250.png"/>
+          <p:cNvPr id="6" name="삽화:신선도.svg" descr="illust_4126359175904457029_1791735250.png"/>
           <p:cNvPicPr>
             <a:picLocks noChangeAspect="1"/>
           </p:cNvPicPr>
@@ -17910,7 +17856,7 @@
       </p:sp>
       <p:pic>
         <p:nvPicPr>
-          <p:cNvPr id="6" name="삽화:멈춤조건.svg" descr="illust_1126432722587110781_1791735250.png"/>
+          <p:cNvPr id="6" name="삽화:멈춤조건.svg" descr="illust_632331667988771501_1791735250.png"/>
           <p:cNvPicPr>
             <a:picLocks noChangeAspect="1"/>
           </p:cNvPicPr>
@@ -21980,8 +21926,8 @@
         </p:nvSpPr>
         <p:spPr>
           <a:xfrm>
-            <a:off x="548640" y="2603182"/>
-            <a:ext cx="2485567" cy="2776346"/>
+            <a:off x="548640" y="2498598"/>
+            <a:ext cx="2485567" cy="2985515"/>
           </a:xfrm>
           <a:prstGeom prst="roundRect">
             <a:avLst>
@@ -22011,7 +21957,7 @@
         </p:nvSpPr>
         <p:spPr>
           <a:xfrm>
-            <a:off x="1425663" y="2786062"/>
+            <a:off x="1425663" y="2681478"/>
             <a:ext cx="731520" cy="731520"/>
           </a:xfrm>
           <a:prstGeom prst="ellipse">
@@ -22048,7 +21994,7 @@
         </p:blipFill>
         <p:spPr>
           <a:xfrm>
-            <a:off x="1579283" y="2939681"/>
+            <a:off x="1579283" y="2835097"/>
             <a:ext cx="424281" cy="424281"/>
           </a:xfrm>
           <a:prstGeom prst="rect">
@@ -22064,8 +22010,8 @@
         </p:nvSpPr>
         <p:spPr>
           <a:xfrm>
-            <a:off x="621792" y="3590734"/>
-            <a:ext cx="2339263" cy="1715642"/>
+            <a:off x="621792" y="3486150"/>
+            <a:ext cx="2339263" cy="1924811"/>
           </a:xfrm>
           <a:prstGeom prst="rect">
             <a:avLst/>
@@ -22177,8 +22123,8 @@
         </p:nvSpPr>
         <p:spPr>
           <a:xfrm>
-            <a:off x="3418255" y="2603182"/>
-            <a:ext cx="2485567" cy="2776346"/>
+            <a:off x="3418255" y="2498598"/>
+            <a:ext cx="2485567" cy="2985515"/>
           </a:xfrm>
           <a:prstGeom prst="roundRect">
             <a:avLst>
@@ -22210,7 +22156,7 @@
         </p:nvSpPr>
         <p:spPr>
           <a:xfrm>
-            <a:off x="4295279" y="2786062"/>
+            <a:off x="4295279" y="2681478"/>
             <a:ext cx="731520" cy="731520"/>
           </a:xfrm>
           <a:prstGeom prst="ellipse">
@@ -22247,7 +22193,7 @@
         </p:blipFill>
         <p:spPr>
           <a:xfrm>
-            <a:off x="4448898" y="2939681"/>
+            <a:off x="4448898" y="2835097"/>
             <a:ext cx="424281" cy="424281"/>
           </a:xfrm>
           <a:prstGeom prst="rect">
@@ -22263,8 +22209,8 @@
         </p:nvSpPr>
         <p:spPr>
           <a:xfrm>
-            <a:off x="3491407" y="3590734"/>
-            <a:ext cx="2339263" cy="1715642"/>
+            <a:off x="3491407" y="3486150"/>
+            <a:ext cx="2339263" cy="1924811"/>
           </a:xfrm>
           <a:prstGeom prst="rect">
             <a:avLst/>
@@ -22376,8 +22322,8 @@
         </p:nvSpPr>
         <p:spPr>
           <a:xfrm>
-            <a:off x="6287871" y="2603182"/>
-            <a:ext cx="2485567" cy="2776346"/>
+            <a:off x="6287871" y="2498598"/>
+            <a:ext cx="2485567" cy="2985515"/>
           </a:xfrm>
           <a:prstGeom prst="roundRect">
             <a:avLst>
@@ -22407,7 +22353,7 @@
         </p:nvSpPr>
         <p:spPr>
           <a:xfrm>
-            <a:off x="7164895" y="2786062"/>
+            <a:off x="7164895" y="2681478"/>
             <a:ext cx="731520" cy="731520"/>
           </a:xfrm>
           <a:prstGeom prst="ellipse">
@@ -22444,7 +22390,7 @@
         </p:blipFill>
         <p:spPr>
           <a:xfrm>
-            <a:off x="7318514" y="2939681"/>
+            <a:off x="7318514" y="2835097"/>
             <a:ext cx="424281" cy="424281"/>
           </a:xfrm>
           <a:prstGeom prst="rect">
@@ -22460,8 +22406,8 @@
         </p:nvSpPr>
         <p:spPr>
           <a:xfrm>
-            <a:off x="6361023" y="3590734"/>
-            <a:ext cx="2339263" cy="1715642"/>
+            <a:off x="6361023" y="3486150"/>
+            <a:ext cx="2339263" cy="1924811"/>
           </a:xfrm>
           <a:prstGeom prst="rect">
             <a:avLst/>
@@ -22553,6 +22499,27 @@
                 <a:cs typeface="맑은 고딕"/>
               </a:rPr>
               <a:t>고쳐서 다시 낸다</a:t>
+            </a:r>
+          </a:p>
+          <a:p>
+            <a:pPr algn="ctr">
+              <a:lnSpc>
+                <a:spcPct val="110000"/>
+              </a:lnSpc>
+              <a:spcAft>
+                <a:spcPts val="400"/>
+              </a:spcAft>
+            </a:pPr>
+            <a:r>
+              <a:rPr sz="1350" b="0">
+                <a:solidFill>
+                  <a:srgbClr val="1F2A3A"/>
+                </a:solidFill>
+                <a:latin typeface="맑은 고딕"/>
+                <a:ea typeface="맑은 고딕"/>
+                <a:cs typeface="맑은 고딕"/>
+              </a:rPr>
+              <a:t>교정은 두 번까지</a:t>
             </a:r>
           </a:p>
         </p:txBody>
@@ -22594,8 +22561,8 @@
         </p:nvSpPr>
         <p:spPr>
           <a:xfrm>
-            <a:off x="9157487" y="2603182"/>
-            <a:ext cx="2485567" cy="2776346"/>
+            <a:off x="9157487" y="2498598"/>
+            <a:ext cx="2485567" cy="2985515"/>
           </a:xfrm>
           <a:prstGeom prst="roundRect">
             <a:avLst>
@@ -22625,7 +22592,7 @@
         </p:nvSpPr>
         <p:spPr>
           <a:xfrm>
-            <a:off x="10034511" y="2786062"/>
+            <a:off x="10034511" y="2681478"/>
             <a:ext cx="731520" cy="731520"/>
           </a:xfrm>
           <a:prstGeom prst="ellipse">
@@ -22662,7 +22629,7 @@
         </p:blipFill>
         <p:spPr>
           <a:xfrm>
-            <a:off x="10188130" y="2939681"/>
+            <a:off x="10188130" y="2835097"/>
             <a:ext cx="424281" cy="424281"/>
           </a:xfrm>
           <a:prstGeom prst="rect">
@@ -22678,8 +22645,8 @@
         </p:nvSpPr>
         <p:spPr>
           <a:xfrm>
-            <a:off x="9230639" y="3590734"/>
-            <a:ext cx="2339263" cy="1715642"/>
+            <a:off x="9230639" y="3486150"/>
+            <a:ext cx="2339263" cy="1924811"/>
           </a:xfrm>
           <a:prstGeom prst="rect">
             <a:avLst/>
@@ -26591,7 +26558,7 @@
                 <a:ea typeface="맑은 고딕"/>
                 <a:cs typeface="맑은 고딕"/>
               </a:rPr>
-              <a:t>이 실습을 마치면 입력마다의 점검 순서와 근거, 그리고 증거가 모자라거나 어긋날 때 낸 추가 확인 요청이 남는다.</a:t>
+              <a:t>입력을 바꾸어 넣으면 점검 순서와 근거가 달라지고, 증거가 모자라거나 어긋날 때는 단정 대신 추가 확인 요청이 나온다.</a:t>
             </a:r>
           </a:p>
         </p:txBody>
@@ -27850,7 +27817,7 @@
                 <a:ea typeface="맑은 고딕"/>
                 <a:cs typeface="맑은 고딕"/>
               </a:rPr>
-              <a:t>이 실습을 마치면 불량 접수 한 건이 품질 유형, 확인 항목, 담당 부서, 대응 초안을 갖춘 품질 대응 카드로 바뀐다.</a:t>
+              <a:t>불량 접수 한 건을 품질 유형, 확인 항목, 담당 부서, 대응 초안을 갖춘 품질 대응 카드로 바꾼다.</a:t>
             </a:r>
           </a:p>
         </p:txBody>
@@ -31627,7 +31594,7 @@
                 <a:ea typeface="맑은 고딕"/>
                 <a:cs typeface="맑은 고딕"/>
               </a:rPr>
-              <a:t>사전 확률이 가장 높은 쿨러 핀 오염을 확인된 원인으로 적는다</a:t>
+              <a:t>원인 후보에 올라 있는 쿨러 핀 오염을 확인된 원인으로 적는다</a:t>
             </a:r>
           </a:p>
         </p:txBody>
@@ -33524,7 +33491,7 @@
       </p:sp>
       <p:pic>
         <p:nvPicPr>
-          <p:cNvPr id="6" name="삽화:경보에서승인까지.svg" descr="illust_9211011036171632505_1791735250.png"/>
+          <p:cNvPr id="6" name="삽화:경보에서승인까지.svg" descr="illust_6028816046322501483_1791735250.png"/>
           <p:cNvPicPr>
             <a:picLocks noChangeAspect="1"/>
           </p:cNvPicPr>

--- a/docs/교재/통합반_오프라인/05회차/통합반_오프라인_05회차.pptx
+++ b/docs/교재/통합반_오프라인/05회차/통합반_오프라인_05회차.pptx
@@ -7340,7 +7340,7 @@
       </p:sp>
       <p:pic>
         <p:nvPicPr>
-          <p:cNvPr id="6" name="삽화:세요소.svg" descr="illust_2920339353675500372_1791735250.png"/>
+          <p:cNvPr id="6" name="삽화:세요소.svg" descr="illust_1852076780040679497_1791735250.png"/>
           <p:cNvPicPr>
             <a:picLocks noChangeAspect="1"/>
           </p:cNvPicPr>
@@ -9462,7 +9462,7 @@
       </p:sp>
       <p:pic>
         <p:nvPicPr>
-          <p:cNvPr id="6" name="삽화:실행고리.svg" descr="illust_1969153389985339881_1791735250.png"/>
+          <p:cNvPr id="6" name="삽화:실행고리.svg" descr="illust_5835128202016622545_1791735250.png"/>
           <p:cNvPicPr>
             <a:picLocks noChangeAspect="1"/>
           </p:cNvPicPr>
@@ -11260,7 +11260,7 @@
       </p:sp>
       <p:pic>
         <p:nvPicPr>
-          <p:cNvPr id="6" name="삽화:정보원.svg" descr="illust_4028360065608945016_1791735250.png"/>
+          <p:cNvPr id="6" name="삽화:정보원.svg" descr="illust_1063980192524579_1791735250.png"/>
           <p:cNvPicPr>
             <a:picLocks noChangeAspect="1"/>
           </p:cNvPicPr>
@@ -16591,7 +16591,7 @@
       </p:sp>
       <p:pic>
         <p:nvPicPr>
-          <p:cNvPr id="6" name="삽화:신선도.svg" descr="illust_4126359175904457029_1791735250.png"/>
+          <p:cNvPr id="6" name="삽화:신선도.svg" descr="illust_925902919417888594_1791735250.png"/>
           <p:cNvPicPr>
             <a:picLocks noChangeAspect="1"/>
           </p:cNvPicPr>
@@ -17856,7 +17856,7 @@
       </p:sp>
       <p:pic>
         <p:nvPicPr>
-          <p:cNvPr id="6" name="삽화:멈춤조건.svg" descr="illust_632331667988771501_1791735250.png"/>
+          <p:cNvPr id="6" name="삽화:멈춤조건.svg" descr="illust_830991087137722144_1791735250.png"/>
           <p:cNvPicPr>
             <a:picLocks noChangeAspect="1"/>
           </p:cNvPicPr>
@@ -29845,7 +29845,7 @@
                 <a:ea typeface="맑은 고딕"/>
                 <a:cs typeface="맑은 고딕"/>
               </a:rPr>
-              <a:t>배운 내용을 바탕으로 정답을 맞춰보세요.</a:t>
+              <a:t>배운 내용을 바탕으로 정답을 맞혀 보세요.</a:t>
             </a:r>
           </a:p>
         </p:txBody>
@@ -33491,7 +33491,7 @@
       </p:sp>
       <p:pic>
         <p:nvPicPr>
-          <p:cNvPr id="6" name="삽화:경보에서승인까지.svg" descr="illust_6028816046322501483_1791735250.png"/>
+          <p:cNvPr id="6" name="삽화:경보에서승인까지.svg" descr="illust_1285277290652475530_1791735250.png"/>
           <p:cNvPicPr>
             <a:picLocks noChangeAspect="1"/>
           </p:cNvPicPr>

--- a/docs/교재/통합반_오프라인/05회차/통합반_오프라인_05회차.pptx
+++ b/docs/교재/통합반_오프라인/05회차/통합반_오프라인_05회차.pptx
@@ -1874,7 +1874,7 @@
           <a:lstStyle/>
           <a:p>
             <a:r>
-              <a:t>둘째 실습은 VS Code에서 Claude Code로 진행합니다. 공용 온톨로지의 관계와 제공된 센서 입력을 읽어 후보 원인과 증거, 추가 점검 항목을 내는 에이전트를 만듭니다. 확인되지 않은 원인은 단정하지 않고 가설로 표시해야 합니다. 끝나면 에이전트와, 후보 원인과 점검 항목을 근거와 함께 적은 출력이 파일로 남습니다.</a:t>
+              <a:t>둘째 실습은 바이브 코딩으로 진행합니다. 공용 온톨로지의 관계와 제공된 센서 입력을 읽어 후보 원인과 증거, 추가 점검 항목을 내는 에이전트를 만듭니다. 확인되지 않은 원인은 단정하지 않고 가설로 표시해야 합니다. 끝나면 에이전트와, 후보 원인과 점검 항목을 근거와 함께 적은 출력이 파일로 남습니다.</a:t>
             </a:r>
           </a:p>
         </p:txBody>
@@ -7340,7 +7340,7 @@
       </p:sp>
       <p:pic>
         <p:nvPicPr>
-          <p:cNvPr id="6" name="삽화:세요소.svg" descr="illust_1852076780040679497_1791735250.png"/>
+          <p:cNvPr id="6" name="삽화:세요소.svg" descr="illust_5113541593512482139_1791735250.png"/>
           <p:cNvPicPr>
             <a:picLocks noChangeAspect="1"/>
           </p:cNvPicPr>
@@ -9462,7 +9462,7 @@
       </p:sp>
       <p:pic>
         <p:nvPicPr>
-          <p:cNvPr id="6" name="삽화:실행고리.svg" descr="illust_5835128202016622545_1791735250.png"/>
+          <p:cNvPr id="6" name="삽화:실행고리.svg" descr="illust_764138223512525258_1791735250.png"/>
           <p:cNvPicPr>
             <a:picLocks noChangeAspect="1"/>
           </p:cNvPicPr>
@@ -11260,7 +11260,7 @@
       </p:sp>
       <p:pic>
         <p:nvPicPr>
-          <p:cNvPr id="6" name="삽화:정보원.svg" descr="illust_1063980192524579_1791735250.png"/>
+          <p:cNvPr id="6" name="삽화:정보원.svg" descr="illust_2352344172136999551_1791735250.png"/>
           <p:cNvPicPr>
             <a:picLocks noChangeAspect="1"/>
           </p:cNvPicPr>
@@ -16591,7 +16591,7 @@
       </p:sp>
       <p:pic>
         <p:nvPicPr>
-          <p:cNvPr id="6" name="삽화:신선도.svg" descr="illust_925902919417888594_1791735250.png"/>
+          <p:cNvPr id="6" name="삽화:신선도.svg" descr="illust_5270109804977412610_1791735250.png"/>
           <p:cNvPicPr>
             <a:picLocks noChangeAspect="1"/>
           </p:cNvPicPr>
@@ -17856,7 +17856,7 @@
       </p:sp>
       <p:pic>
         <p:nvPicPr>
-          <p:cNvPr id="6" name="삽화:멈춤조건.svg" descr="illust_830991087137722144_1791735250.png"/>
+          <p:cNvPr id="6" name="삽화:멈춤조건.svg" descr="illust_661083235198953823_1791735250.png"/>
           <p:cNvPicPr>
             <a:picLocks noChangeAspect="1"/>
           </p:cNvPicPr>
@@ -25237,7 +25237,7 @@
                 <a:ea typeface="맑은 고딕"/>
                 <a:cs typeface="맑은 고딕"/>
               </a:rPr>
-              <a:t>Claude Code로 온톨로지의 관계와 SOP, 센서 입력을 읽어 후보 원인과 점검 항목을 내는 에이전트를 만든다</a:t>
+              <a:t>바이브 코딩으로 온톨로지의 관계와 SOP, 센서 입력으로 후보 원인과 점검 항목을 내는 에이전트를 만든다</a:t>
             </a:r>
           </a:p>
         </p:txBody>
@@ -33491,7 +33491,7 @@
       </p:sp>
       <p:pic>
         <p:nvPicPr>
-          <p:cNvPr id="6" name="삽화:경보에서승인까지.svg" descr="illust_1285277290652475530_1791735250.png"/>
+          <p:cNvPr id="6" name="삽화:경보에서승인까지.svg" descr="illust_6080019967392966374_1791735250.png"/>
           <p:cNvPicPr>
             <a:picLocks noChangeAspect="1"/>
           </p:cNvPicPr>
